--- a/projects/MLB26/Econometrics Final.pptx
+++ b/projects/MLB26/Econometrics Final.pptx
@@ -2,15 +2,22 @@
 <file path=ppt/presentation.xml><?xml version="1.0" encoding="utf-8"?>
 <p:presentation xmlns:a="http://schemas.openxmlformats.org/drawingml/2006/main" xmlns:r="http://schemas.openxmlformats.org/officeDocument/2006/relationships" xmlns:p="http://schemas.openxmlformats.org/presentationml/2006/main" saveSubsetFonts="1">
   <p:sldMasterIdLst>
-    <p:sldMasterId id="2147483648" r:id="rId1"/>
+    <p:sldMasterId id="2147483684" r:id="rId1"/>
   </p:sldMasterIdLst>
+  <p:notesMasterIdLst>
+    <p:notesMasterId r:id="rId12"/>
+  </p:notesMasterIdLst>
   <p:sldIdLst>
     <p:sldId id="256" r:id="rId2"/>
-    <p:sldId id="257" r:id="rId3"/>
-    <p:sldId id="258" r:id="rId4"/>
-    <p:sldId id="259" r:id="rId5"/>
-    <p:sldId id="260" r:id="rId6"/>
-    <p:sldId id="261" r:id="rId7"/>
+    <p:sldId id="262" r:id="rId3"/>
+    <p:sldId id="266" r:id="rId4"/>
+    <p:sldId id="267" r:id="rId5"/>
+    <p:sldId id="258" r:id="rId6"/>
+    <p:sldId id="264" r:id="rId7"/>
+    <p:sldId id="265" r:id="rId8"/>
+    <p:sldId id="260" r:id="rId9"/>
+    <p:sldId id="268" r:id="rId10"/>
+    <p:sldId id="261" r:id="rId11"/>
   </p:sldIdLst>
   <p:sldSz cx="12192000" cy="6858000"/>
   <p:notesSz cx="6858000" cy="9144000"/>
@@ -18,7 +25,7 @@
     <a:defPPr>
       <a:defRPr lang="en-US"/>
     </a:defPPr>
-    <a:lvl1pPr marL="0" algn="l" defTabSz="914400" rtl="0" eaLnBrk="1" latinLnBrk="0" hangingPunct="1">
+    <a:lvl1pPr marL="0" algn="l" defTabSz="457200" rtl="0" eaLnBrk="1" latinLnBrk="0" hangingPunct="1">
       <a:defRPr sz="1800" kern="1200">
         <a:solidFill>
           <a:schemeClr val="tx1"/>
@@ -28,7 +35,7 @@
         <a:cs typeface="+mn-cs"/>
       </a:defRPr>
     </a:lvl1pPr>
-    <a:lvl2pPr marL="457200" algn="l" defTabSz="914400" rtl="0" eaLnBrk="1" latinLnBrk="0" hangingPunct="1">
+    <a:lvl2pPr marL="457200" algn="l" defTabSz="457200" rtl="0" eaLnBrk="1" latinLnBrk="0" hangingPunct="1">
       <a:defRPr sz="1800" kern="1200">
         <a:solidFill>
           <a:schemeClr val="tx1"/>
@@ -38,7 +45,7 @@
         <a:cs typeface="+mn-cs"/>
       </a:defRPr>
     </a:lvl2pPr>
-    <a:lvl3pPr marL="914400" algn="l" defTabSz="914400" rtl="0" eaLnBrk="1" latinLnBrk="0" hangingPunct="1">
+    <a:lvl3pPr marL="914400" algn="l" defTabSz="457200" rtl="0" eaLnBrk="1" latinLnBrk="0" hangingPunct="1">
       <a:defRPr sz="1800" kern="1200">
         <a:solidFill>
           <a:schemeClr val="tx1"/>
@@ -48,7 +55,7 @@
         <a:cs typeface="+mn-cs"/>
       </a:defRPr>
     </a:lvl3pPr>
-    <a:lvl4pPr marL="1371600" algn="l" defTabSz="914400" rtl="0" eaLnBrk="1" latinLnBrk="0" hangingPunct="1">
+    <a:lvl4pPr marL="1371600" algn="l" defTabSz="457200" rtl="0" eaLnBrk="1" latinLnBrk="0" hangingPunct="1">
       <a:defRPr sz="1800" kern="1200">
         <a:solidFill>
           <a:schemeClr val="tx1"/>
@@ -58,7 +65,7 @@
         <a:cs typeface="+mn-cs"/>
       </a:defRPr>
     </a:lvl4pPr>
-    <a:lvl5pPr marL="1828800" algn="l" defTabSz="914400" rtl="0" eaLnBrk="1" latinLnBrk="0" hangingPunct="1">
+    <a:lvl5pPr marL="1828800" algn="l" defTabSz="457200" rtl="0" eaLnBrk="1" latinLnBrk="0" hangingPunct="1">
       <a:defRPr sz="1800" kern="1200">
         <a:solidFill>
           <a:schemeClr val="tx1"/>
@@ -68,7 +75,7 @@
         <a:cs typeface="+mn-cs"/>
       </a:defRPr>
     </a:lvl5pPr>
-    <a:lvl6pPr marL="2286000" algn="l" defTabSz="914400" rtl="0" eaLnBrk="1" latinLnBrk="0" hangingPunct="1">
+    <a:lvl6pPr marL="2286000" algn="l" defTabSz="457200" rtl="0" eaLnBrk="1" latinLnBrk="0" hangingPunct="1">
       <a:defRPr sz="1800" kern="1200">
         <a:solidFill>
           <a:schemeClr val="tx1"/>
@@ -78,7 +85,7 @@
         <a:cs typeface="+mn-cs"/>
       </a:defRPr>
     </a:lvl6pPr>
-    <a:lvl7pPr marL="2743200" algn="l" defTabSz="914400" rtl="0" eaLnBrk="1" latinLnBrk="0" hangingPunct="1">
+    <a:lvl7pPr marL="2743200" algn="l" defTabSz="457200" rtl="0" eaLnBrk="1" latinLnBrk="0" hangingPunct="1">
       <a:defRPr sz="1800" kern="1200">
         <a:solidFill>
           <a:schemeClr val="tx1"/>
@@ -88,7 +95,7 @@
         <a:cs typeface="+mn-cs"/>
       </a:defRPr>
     </a:lvl7pPr>
-    <a:lvl8pPr marL="3200400" algn="l" defTabSz="914400" rtl="0" eaLnBrk="1" latinLnBrk="0" hangingPunct="1">
+    <a:lvl8pPr marL="3200400" algn="l" defTabSz="457200" rtl="0" eaLnBrk="1" latinLnBrk="0" hangingPunct="1">
       <a:defRPr sz="1800" kern="1200">
         <a:solidFill>
           <a:schemeClr val="tx1"/>
@@ -98,7 +105,7 @@
         <a:cs typeface="+mn-cs"/>
       </a:defRPr>
     </a:lvl8pPr>
-    <a:lvl9pPr marL="3657600" algn="l" defTabSz="914400" rtl="0" eaLnBrk="1" latinLnBrk="0" hangingPunct="1">
+    <a:lvl9pPr marL="3657600" algn="l" defTabSz="457200" rtl="0" eaLnBrk="1" latinLnBrk="0" hangingPunct="1">
       <a:defRPr sz="1800" kern="1200">
         <a:solidFill>
           <a:schemeClr val="tx1"/>
@@ -109,11 +116,999 @@
       </a:defRPr>
     </a:lvl9pPr>
   </p:defaultTextStyle>
+  <p:extLst>
+    <p:ext uri="{EFAFB233-063F-42B5-8137-9DF3F51BA10A}">
+      <p15:sldGuideLst xmlns:p15="http://schemas.microsoft.com/office/powerpoint/2012/main"/>
+    </p:ext>
+  </p:extLst>
 </p:presentation>
 </file>
 
+<file path=ppt/revisionInfo.xml><?xml version="1.0" encoding="utf-8"?>
+<p1510:revInfo xmlns:a="http://schemas.openxmlformats.org/drawingml/2006/main" xmlns:r="http://schemas.openxmlformats.org/officeDocument/2006/relationships" xmlns:p1510="http://schemas.microsoft.com/office/powerpoint/2015/10/main">
+  <p1510:revLst>
+    <p1510:client id="{B7750AB7-4C3F-4950-AE64-1BB6A3A50F15}" v="17" dt="2026-04-16T08:03:42.713"/>
+  </p1510:revLst>
+</p1510:revInfo>
+</file>
+
+<file path=ppt/changesInfos/changesInfo1.xml><?xml version="1.0" encoding="utf-8"?>
+<pc:chgInfo xmlns:a="http://schemas.openxmlformats.org/drawingml/2006/main" xmlns:r="http://schemas.openxmlformats.org/officeDocument/2006/relationships" xmlns:ac="http://schemas.microsoft.com/office/drawing/2013/main/command" xmlns:pc="http://schemas.microsoft.com/office/powerpoint/2013/main/command">
+  <pc:docChgLst>
+    <pc:chgData name="Hayden Lamprecht" userId="9117dadff98bc9a8" providerId="LiveId" clId="{75D89BBE-6750-4836-8A6C-3647A355B6D2}"/>
+    <pc:docChg chg="undo custSel addSld delSld modSld">
+      <pc:chgData name="Hayden Lamprecht" userId="9117dadff98bc9a8" providerId="LiveId" clId="{75D89BBE-6750-4836-8A6C-3647A355B6D2}" dt="2026-04-16T12:58:24.365" v="2707" actId="14100"/>
+      <pc:docMkLst>
+        <pc:docMk/>
+      </pc:docMkLst>
+      <pc:sldChg chg="modSp mod">
+        <pc:chgData name="Hayden Lamprecht" userId="9117dadff98bc9a8" providerId="LiveId" clId="{75D89BBE-6750-4836-8A6C-3647A355B6D2}" dt="2026-04-16T03:48:01.374" v="799"/>
+        <pc:sldMkLst>
+          <pc:docMk/>
+          <pc:sldMk cId="2742470569" sldId="256"/>
+        </pc:sldMkLst>
+        <pc:spChg chg="mod">
+          <ac:chgData name="Hayden Lamprecht" userId="9117dadff98bc9a8" providerId="LiveId" clId="{75D89BBE-6750-4836-8A6C-3647A355B6D2}" dt="2026-04-16T03:48:01.374" v="799"/>
+          <ac:spMkLst>
+            <pc:docMk/>
+            <pc:sldMk cId="2742470569" sldId="256"/>
+            <ac:spMk id="2" creationId="{92F4E7CC-F08B-392B-68FA-A0766748A99B}"/>
+          </ac:spMkLst>
+        </pc:spChg>
+        <pc:spChg chg="mod">
+          <ac:chgData name="Hayden Lamprecht" userId="9117dadff98bc9a8" providerId="LiveId" clId="{75D89BBE-6750-4836-8A6C-3647A355B6D2}" dt="2026-04-16T03:48:01.374" v="799"/>
+          <ac:spMkLst>
+            <pc:docMk/>
+            <pc:sldMk cId="2742470569" sldId="256"/>
+            <ac:spMk id="3" creationId="{EE3E2E1F-17B6-67CB-2229-BAF3E1BD2BEB}"/>
+          </ac:spMkLst>
+        </pc:spChg>
+      </pc:sldChg>
+      <pc:sldChg chg="del">
+        <pc:chgData name="Hayden Lamprecht" userId="9117dadff98bc9a8" providerId="LiveId" clId="{75D89BBE-6750-4836-8A6C-3647A355B6D2}" dt="2026-04-16T02:59:44.543" v="671" actId="2696"/>
+        <pc:sldMkLst>
+          <pc:docMk/>
+          <pc:sldMk cId="1119798781" sldId="257"/>
+        </pc:sldMkLst>
+      </pc:sldChg>
+      <pc:sldChg chg="addSp delSp modSp mod setBg">
+        <pc:chgData name="Hayden Lamprecht" userId="9117dadff98bc9a8" providerId="LiveId" clId="{75D89BBE-6750-4836-8A6C-3647A355B6D2}" dt="2026-04-16T07:54:45.989" v="2205" actId="12"/>
+        <pc:sldMkLst>
+          <pc:docMk/>
+          <pc:sldMk cId="3248631073" sldId="258"/>
+        </pc:sldMkLst>
+        <pc:spChg chg="mod">
+          <ac:chgData name="Hayden Lamprecht" userId="9117dadff98bc9a8" providerId="LiveId" clId="{75D89BBE-6750-4836-8A6C-3647A355B6D2}" dt="2026-04-16T03:50:38.284" v="810" actId="26606"/>
+          <ac:spMkLst>
+            <pc:docMk/>
+            <pc:sldMk cId="3248631073" sldId="258"/>
+            <ac:spMk id="2" creationId="{728F59D0-A487-2A87-8FD5-B9BE1C65F0B2}"/>
+          </ac:spMkLst>
+        </pc:spChg>
+        <pc:spChg chg="del">
+          <ac:chgData name="Hayden Lamprecht" userId="9117dadff98bc9a8" providerId="LiveId" clId="{75D89BBE-6750-4836-8A6C-3647A355B6D2}" dt="2026-04-16T03:46:02.334" v="672" actId="931"/>
+          <ac:spMkLst>
+            <pc:docMk/>
+            <pc:sldMk cId="3248631073" sldId="258"/>
+            <ac:spMk id="3" creationId="{FE9D310F-DB9C-9807-4C95-8ED6382226BA}"/>
+          </ac:spMkLst>
+        </pc:spChg>
+        <pc:spChg chg="add mod">
+          <ac:chgData name="Hayden Lamprecht" userId="9117dadff98bc9a8" providerId="LiveId" clId="{75D89BBE-6750-4836-8A6C-3647A355B6D2}" dt="2026-04-16T07:54:45.989" v="2205" actId="12"/>
+          <ac:spMkLst>
+            <pc:docMk/>
+            <pc:sldMk cId="3248631073" sldId="258"/>
+            <ac:spMk id="9" creationId="{7A8C65C0-0960-2909-36FD-96D32B192AAD}"/>
+          </ac:spMkLst>
+        </pc:spChg>
+        <pc:spChg chg="add">
+          <ac:chgData name="Hayden Lamprecht" userId="9117dadff98bc9a8" providerId="LiveId" clId="{75D89BBE-6750-4836-8A6C-3647A355B6D2}" dt="2026-04-16T03:50:38.284" v="810" actId="26606"/>
+          <ac:spMkLst>
+            <pc:docMk/>
+            <pc:sldMk cId="3248631073" sldId="258"/>
+            <ac:spMk id="12" creationId="{44CC594A-A820-450F-B363-C19201FCFEC6}"/>
+          </ac:spMkLst>
+        </pc:spChg>
+        <pc:spChg chg="add">
+          <ac:chgData name="Hayden Lamprecht" userId="9117dadff98bc9a8" providerId="LiveId" clId="{75D89BBE-6750-4836-8A6C-3647A355B6D2}" dt="2026-04-16T03:50:38.284" v="810" actId="26606"/>
+          <ac:spMkLst>
+            <pc:docMk/>
+            <pc:sldMk cId="3248631073" sldId="258"/>
+            <ac:spMk id="14" creationId="{59FAB3DA-E9ED-4574-ABCC-378BC0FF1BBC}"/>
+          </ac:spMkLst>
+        </pc:spChg>
+        <pc:spChg chg="add">
+          <ac:chgData name="Hayden Lamprecht" userId="9117dadff98bc9a8" providerId="LiveId" clId="{75D89BBE-6750-4836-8A6C-3647A355B6D2}" dt="2026-04-16T03:50:38.284" v="810" actId="26606"/>
+          <ac:spMkLst>
+            <pc:docMk/>
+            <pc:sldMk cId="3248631073" sldId="258"/>
+            <ac:spMk id="16" creationId="{53B8D6B0-55D6-48DC-86D8-FD95D5F118AB}"/>
+          </ac:spMkLst>
+        </pc:spChg>
+        <pc:picChg chg="add mod ord">
+          <ac:chgData name="Hayden Lamprecht" userId="9117dadff98bc9a8" providerId="LiveId" clId="{75D89BBE-6750-4836-8A6C-3647A355B6D2}" dt="2026-04-16T03:50:38.284" v="810" actId="26606"/>
+          <ac:picMkLst>
+            <pc:docMk/>
+            <pc:sldMk cId="3248631073" sldId="258"/>
+            <ac:picMk id="5" creationId="{5732D919-61B8-7A2B-8886-7175AA8117C6}"/>
+          </ac:picMkLst>
+        </pc:picChg>
+      </pc:sldChg>
+      <pc:sldChg chg="addSp delSp modSp del mod setBg delDesignElem">
+        <pc:chgData name="Hayden Lamprecht" userId="9117dadff98bc9a8" providerId="LiveId" clId="{75D89BBE-6750-4836-8A6C-3647A355B6D2}" dt="2026-04-16T03:52:46.845" v="939" actId="2696"/>
+        <pc:sldMkLst>
+          <pc:docMk/>
+          <pc:sldMk cId="1230858642" sldId="259"/>
+        </pc:sldMkLst>
+        <pc:spChg chg="mod">
+          <ac:chgData name="Hayden Lamprecht" userId="9117dadff98bc9a8" providerId="LiveId" clId="{75D89BBE-6750-4836-8A6C-3647A355B6D2}" dt="2026-04-16T03:47:37.667" v="793" actId="26606"/>
+          <ac:spMkLst>
+            <pc:docMk/>
+            <pc:sldMk cId="1230858642" sldId="259"/>
+            <ac:spMk id="2" creationId="{60D043DD-537B-260D-EFCD-0B39ED3BBA1B}"/>
+          </ac:spMkLst>
+        </pc:spChg>
+        <pc:spChg chg="mod">
+          <ac:chgData name="Hayden Lamprecht" userId="9117dadff98bc9a8" providerId="LiveId" clId="{75D89BBE-6750-4836-8A6C-3647A355B6D2}" dt="2026-04-16T03:47:37.667" v="793" actId="26606"/>
+          <ac:spMkLst>
+            <pc:docMk/>
+            <pc:sldMk cId="1230858642" sldId="259"/>
+            <ac:spMk id="3" creationId="{2A43364E-4D6A-AD1E-1738-170231C57E31}"/>
+          </ac:spMkLst>
+        </pc:spChg>
+        <pc:spChg chg="add del">
+          <ac:chgData name="Hayden Lamprecht" userId="9117dadff98bc9a8" providerId="LiveId" clId="{75D89BBE-6750-4836-8A6C-3647A355B6D2}" dt="2026-04-16T03:47:41.945" v="795"/>
+          <ac:spMkLst>
+            <pc:docMk/>
+            <pc:sldMk cId="1230858642" sldId="259"/>
+            <ac:spMk id="8" creationId="{907EF6B7-1338-4443-8C46-6A318D952DFD}"/>
+          </ac:spMkLst>
+        </pc:spChg>
+        <pc:spChg chg="add del">
+          <ac:chgData name="Hayden Lamprecht" userId="9117dadff98bc9a8" providerId="LiveId" clId="{75D89BBE-6750-4836-8A6C-3647A355B6D2}" dt="2026-04-16T03:47:41.945" v="795"/>
+          <ac:spMkLst>
+            <pc:docMk/>
+            <pc:sldMk cId="1230858642" sldId="259"/>
+            <ac:spMk id="10" creationId="{DAAE4CDD-124C-4DCF-9584-B6033B545DD5}"/>
+          </ac:spMkLst>
+        </pc:spChg>
+        <pc:spChg chg="add del">
+          <ac:chgData name="Hayden Lamprecht" userId="9117dadff98bc9a8" providerId="LiveId" clId="{75D89BBE-6750-4836-8A6C-3647A355B6D2}" dt="2026-04-16T03:47:41.945" v="795"/>
+          <ac:spMkLst>
+            <pc:docMk/>
+            <pc:sldMk cId="1230858642" sldId="259"/>
+            <ac:spMk id="12" creationId="{081E4A58-353D-44AE-B2FC-2A74E2E400F7}"/>
+          </ac:spMkLst>
+        </pc:spChg>
+      </pc:sldChg>
+      <pc:sldChg chg="addSp delSp modSp mod">
+        <pc:chgData name="Hayden Lamprecht" userId="9117dadff98bc9a8" providerId="LiveId" clId="{75D89BBE-6750-4836-8A6C-3647A355B6D2}" dt="2026-04-16T04:08:35.011" v="1788" actId="14100"/>
+        <pc:sldMkLst>
+          <pc:docMk/>
+          <pc:sldMk cId="2369601210" sldId="260"/>
+        </pc:sldMkLst>
+        <pc:spChg chg="mod">
+          <ac:chgData name="Hayden Lamprecht" userId="9117dadff98bc9a8" providerId="LiveId" clId="{75D89BBE-6750-4836-8A6C-3647A355B6D2}" dt="2026-04-16T03:48:01.374" v="799"/>
+          <ac:spMkLst>
+            <pc:docMk/>
+            <pc:sldMk cId="2369601210" sldId="260"/>
+            <ac:spMk id="2" creationId="{2FA65491-8A39-A081-9C7C-D5E9BEA3CC01}"/>
+          </ac:spMkLst>
+        </pc:spChg>
+        <pc:spChg chg="add del mod">
+          <ac:chgData name="Hayden Lamprecht" userId="9117dadff98bc9a8" providerId="LiveId" clId="{75D89BBE-6750-4836-8A6C-3647A355B6D2}" dt="2026-04-16T04:08:05.883" v="1781" actId="20577"/>
+          <ac:spMkLst>
+            <pc:docMk/>
+            <pc:sldMk cId="2369601210" sldId="260"/>
+            <ac:spMk id="3" creationId="{01F879A1-FBAB-EF81-3FF4-00B54F3DB3AE}"/>
+          </ac:spMkLst>
+        </pc:spChg>
+        <pc:picChg chg="add del mod ord">
+          <ac:chgData name="Hayden Lamprecht" userId="9117dadff98bc9a8" providerId="LiveId" clId="{75D89BBE-6750-4836-8A6C-3647A355B6D2}" dt="2026-04-16T04:07:55.491" v="1741" actId="931"/>
+          <ac:picMkLst>
+            <pc:docMk/>
+            <pc:sldMk cId="2369601210" sldId="260"/>
+            <ac:picMk id="5" creationId="{F0E08EA2-EEF3-2F0A-B2CD-16308ED9F789}"/>
+          </ac:picMkLst>
+        </pc:picChg>
+        <pc:picChg chg="add mod">
+          <ac:chgData name="Hayden Lamprecht" userId="9117dadff98bc9a8" providerId="LiveId" clId="{75D89BBE-6750-4836-8A6C-3647A355B6D2}" dt="2026-04-16T04:08:18.180" v="1784" actId="14100"/>
+          <ac:picMkLst>
+            <pc:docMk/>
+            <pc:sldMk cId="2369601210" sldId="260"/>
+            <ac:picMk id="7" creationId="{E57EF15A-46D8-6E9F-C55E-F8A95BA7F09C}"/>
+          </ac:picMkLst>
+        </pc:picChg>
+        <pc:picChg chg="add mod">
+          <ac:chgData name="Hayden Lamprecht" userId="9117dadff98bc9a8" providerId="LiveId" clId="{75D89BBE-6750-4836-8A6C-3647A355B6D2}" dt="2026-04-16T04:08:35.011" v="1788" actId="14100"/>
+          <ac:picMkLst>
+            <pc:docMk/>
+            <pc:sldMk cId="2369601210" sldId="260"/>
+            <ac:picMk id="9" creationId="{F3115004-6FED-CBFA-51E3-CDD83CF6F24F}"/>
+          </ac:picMkLst>
+        </pc:picChg>
+      </pc:sldChg>
+      <pc:sldChg chg="modSp mod">
+        <pc:chgData name="Hayden Lamprecht" userId="9117dadff98bc9a8" providerId="LiveId" clId="{75D89BBE-6750-4836-8A6C-3647A355B6D2}" dt="2026-04-16T12:26:03.606" v="2695" actId="20577"/>
+        <pc:sldMkLst>
+          <pc:docMk/>
+          <pc:sldMk cId="3913236332" sldId="261"/>
+        </pc:sldMkLst>
+        <pc:spChg chg="mod">
+          <ac:chgData name="Hayden Lamprecht" userId="9117dadff98bc9a8" providerId="LiveId" clId="{75D89BBE-6750-4836-8A6C-3647A355B6D2}" dt="2026-04-16T03:48:01.374" v="799"/>
+          <ac:spMkLst>
+            <pc:docMk/>
+            <pc:sldMk cId="3913236332" sldId="261"/>
+            <ac:spMk id="2" creationId="{8D25F305-94E6-B4C0-A932-B8870117CE83}"/>
+          </ac:spMkLst>
+        </pc:spChg>
+        <pc:spChg chg="mod">
+          <ac:chgData name="Hayden Lamprecht" userId="9117dadff98bc9a8" providerId="LiveId" clId="{75D89BBE-6750-4836-8A6C-3647A355B6D2}" dt="2026-04-16T12:26:03.606" v="2695" actId="20577"/>
+          <ac:spMkLst>
+            <pc:docMk/>
+            <pc:sldMk cId="3913236332" sldId="261"/>
+            <ac:spMk id="3" creationId="{D0FCBE85-DA91-2F1C-890F-5891AFBEEEC3}"/>
+          </ac:spMkLst>
+        </pc:spChg>
+      </pc:sldChg>
+      <pc:sldChg chg="addSp delSp modSp new mod">
+        <pc:chgData name="Hayden Lamprecht" userId="9117dadff98bc9a8" providerId="LiveId" clId="{75D89BBE-6750-4836-8A6C-3647A355B6D2}" dt="2026-04-16T07:54:06.063" v="2190" actId="12"/>
+        <pc:sldMkLst>
+          <pc:docMk/>
+          <pc:sldMk cId="3592681227" sldId="262"/>
+        </pc:sldMkLst>
+        <pc:spChg chg="mod">
+          <ac:chgData name="Hayden Lamprecht" userId="9117dadff98bc9a8" providerId="LiveId" clId="{75D89BBE-6750-4836-8A6C-3647A355B6D2}" dt="2026-04-16T03:48:01.374" v="799"/>
+          <ac:spMkLst>
+            <pc:docMk/>
+            <pc:sldMk cId="3592681227" sldId="262"/>
+            <ac:spMk id="2" creationId="{0458B479-1DFF-090E-AB5E-F6A9FCF7FD10}"/>
+          </ac:spMkLst>
+        </pc:spChg>
+        <pc:spChg chg="mod">
+          <ac:chgData name="Hayden Lamprecht" userId="9117dadff98bc9a8" providerId="LiveId" clId="{75D89BBE-6750-4836-8A6C-3647A355B6D2}" dt="2026-04-16T07:53:24.921" v="2176" actId="20577"/>
+          <ac:spMkLst>
+            <pc:docMk/>
+            <pc:sldMk cId="3592681227" sldId="262"/>
+            <ac:spMk id="3" creationId="{650D4589-F4A6-DA60-0A13-DA40E7FD8D99}"/>
+          </ac:spMkLst>
+        </pc:spChg>
+        <pc:spChg chg="add mod">
+          <ac:chgData name="Hayden Lamprecht" userId="9117dadff98bc9a8" providerId="LiveId" clId="{75D89BBE-6750-4836-8A6C-3647A355B6D2}" dt="2026-04-16T07:54:06.063" v="2190" actId="12"/>
+          <ac:spMkLst>
+            <pc:docMk/>
+            <pc:sldMk cId="3592681227" sldId="262"/>
+            <ac:spMk id="6" creationId="{42C89103-A675-8A71-3A35-CBB42732F3E2}"/>
+          </ac:spMkLst>
+        </pc:spChg>
+        <pc:picChg chg="add del mod">
+          <ac:chgData name="Hayden Lamprecht" userId="9117dadff98bc9a8" providerId="LiveId" clId="{75D89BBE-6750-4836-8A6C-3647A355B6D2}" dt="2026-04-16T02:50:49.452" v="310" actId="21"/>
+          <ac:picMkLst>
+            <pc:docMk/>
+            <pc:sldMk cId="3592681227" sldId="262"/>
+            <ac:picMk id="5" creationId="{D4814FEF-D900-D2D2-CC7E-325E2B4CE4AF}"/>
+          </ac:picMkLst>
+        </pc:picChg>
+      </pc:sldChg>
+      <pc:sldChg chg="modSp new del mod">
+        <pc:chgData name="Hayden Lamprecht" userId="9117dadff98bc9a8" providerId="LiveId" clId="{75D89BBE-6750-4836-8A6C-3647A355B6D2}" dt="2026-04-16T04:10:28.865" v="1797" actId="2696"/>
+        <pc:sldMkLst>
+          <pc:docMk/>
+          <pc:sldMk cId="3648628957" sldId="263"/>
+        </pc:sldMkLst>
+        <pc:spChg chg="mod">
+          <ac:chgData name="Hayden Lamprecht" userId="9117dadff98bc9a8" providerId="LiveId" clId="{75D89BBE-6750-4836-8A6C-3647A355B6D2}" dt="2026-04-16T03:48:01.374" v="799"/>
+          <ac:spMkLst>
+            <pc:docMk/>
+            <pc:sldMk cId="3648628957" sldId="263"/>
+            <ac:spMk id="2" creationId="{3E78241F-4BB9-3295-112D-EAD5412F5D88}"/>
+          </ac:spMkLst>
+        </pc:spChg>
+        <pc:spChg chg="mod">
+          <ac:chgData name="Hayden Lamprecht" userId="9117dadff98bc9a8" providerId="LiveId" clId="{75D89BBE-6750-4836-8A6C-3647A355B6D2}" dt="2026-04-16T03:48:01.374" v="799"/>
+          <ac:spMkLst>
+            <pc:docMk/>
+            <pc:sldMk cId="3648628957" sldId="263"/>
+            <ac:spMk id="3" creationId="{582F0B5F-2E36-B63D-13E5-69273B9BF6D0}"/>
+          </ac:spMkLst>
+        </pc:spChg>
+      </pc:sldChg>
+      <pc:sldChg chg="modSp new del mod">
+        <pc:chgData name="Hayden Lamprecht" userId="9117dadff98bc9a8" providerId="LiveId" clId="{75D89BBE-6750-4836-8A6C-3647A355B6D2}" dt="2026-04-16T03:50:35.015" v="809" actId="2696"/>
+        <pc:sldMkLst>
+          <pc:docMk/>
+          <pc:sldMk cId="3654369269" sldId="264"/>
+        </pc:sldMkLst>
+        <pc:spChg chg="mod">
+          <ac:chgData name="Hayden Lamprecht" userId="9117dadff98bc9a8" providerId="LiveId" clId="{75D89BBE-6750-4836-8A6C-3647A355B6D2}" dt="2026-04-16T03:50:30.739" v="808" actId="20577"/>
+          <ac:spMkLst>
+            <pc:docMk/>
+            <pc:sldMk cId="3654369269" sldId="264"/>
+            <ac:spMk id="2" creationId="{96E337BB-7D38-BDA1-BBFD-7D3DC72F0979}"/>
+          </ac:spMkLst>
+        </pc:spChg>
+      </pc:sldChg>
+      <pc:sldChg chg="addSp delSp modSp new mod">
+        <pc:chgData name="Hayden Lamprecht" userId="9117dadff98bc9a8" providerId="LiveId" clId="{75D89BBE-6750-4836-8A6C-3647A355B6D2}" dt="2026-04-16T07:57:21.931" v="2245" actId="12"/>
+        <pc:sldMkLst>
+          <pc:docMk/>
+          <pc:sldMk cId="3866767092" sldId="264"/>
+        </pc:sldMkLst>
+        <pc:spChg chg="mod">
+          <ac:chgData name="Hayden Lamprecht" userId="9117dadff98bc9a8" providerId="LiveId" clId="{75D89BBE-6750-4836-8A6C-3647A355B6D2}" dt="2026-04-16T03:53:54.856" v="949" actId="20577"/>
+          <ac:spMkLst>
+            <pc:docMk/>
+            <pc:sldMk cId="3866767092" sldId="264"/>
+            <ac:spMk id="2" creationId="{0BE50466-0710-FE7E-DF83-4E9FDF8DCB87}"/>
+          </ac:spMkLst>
+        </pc:spChg>
+        <pc:spChg chg="add del mod">
+          <ac:chgData name="Hayden Lamprecht" userId="9117dadff98bc9a8" providerId="LiveId" clId="{75D89BBE-6750-4836-8A6C-3647A355B6D2}" dt="2026-04-16T07:57:21.931" v="2245" actId="12"/>
+          <ac:spMkLst>
+            <pc:docMk/>
+            <pc:sldMk cId="3866767092" sldId="264"/>
+            <ac:spMk id="3" creationId="{4F2DCBED-85EC-12D7-723B-33B55383CEF3}"/>
+          </ac:spMkLst>
+        </pc:spChg>
+        <pc:spChg chg="add mod">
+          <ac:chgData name="Hayden Lamprecht" userId="9117dadff98bc9a8" providerId="LiveId" clId="{75D89BBE-6750-4836-8A6C-3647A355B6D2}" dt="2026-04-16T07:56:04.155" v="2216" actId="767"/>
+          <ac:spMkLst>
+            <pc:docMk/>
+            <pc:sldMk cId="3866767092" sldId="264"/>
+            <ac:spMk id="4" creationId="{7F27BCBE-D0EF-36D5-4C1E-1AA8A303B1A4}"/>
+          </ac:spMkLst>
+        </pc:spChg>
+        <pc:spChg chg="add mod">
+          <ac:chgData name="Hayden Lamprecht" userId="9117dadff98bc9a8" providerId="LiveId" clId="{75D89BBE-6750-4836-8A6C-3647A355B6D2}" dt="2026-04-16T07:56:00.781" v="2214"/>
+          <ac:spMkLst>
+            <pc:docMk/>
+            <pc:sldMk cId="3866767092" sldId="264"/>
+            <ac:spMk id="5" creationId="{4F2DCBED-85EC-12D7-723B-33B55383CEF3}"/>
+          </ac:spMkLst>
+        </pc:spChg>
+        <pc:spChg chg="add mod">
+          <ac:chgData name="Hayden Lamprecht" userId="9117dadff98bc9a8" providerId="LiveId" clId="{75D89BBE-6750-4836-8A6C-3647A355B6D2}" dt="2026-04-16T07:56:46.705" v="2231" actId="767"/>
+          <ac:spMkLst>
+            <pc:docMk/>
+            <pc:sldMk cId="3866767092" sldId="264"/>
+            <ac:spMk id="6" creationId="{3AAC3C20-43CD-DDBF-34A7-3A701C0E0B3A}"/>
+          </ac:spMkLst>
+        </pc:spChg>
+        <pc:spChg chg="add del mod">
+          <ac:chgData name="Hayden Lamprecht" userId="9117dadff98bc9a8" providerId="LiveId" clId="{75D89BBE-6750-4836-8A6C-3647A355B6D2}" dt="2026-04-16T07:56:45.133" v="2228" actId="21"/>
+          <ac:spMkLst>
+            <pc:docMk/>
+            <pc:sldMk cId="3866767092" sldId="264"/>
+            <ac:spMk id="8" creationId="{B60BA75D-D64F-FACF-4E46-F49A010A00C9}"/>
+          </ac:spMkLst>
+        </pc:spChg>
+      </pc:sldChg>
+      <pc:sldChg chg="modSp new del mod">
+        <pc:chgData name="Hayden Lamprecht" userId="9117dadff98bc9a8" providerId="LiveId" clId="{75D89BBE-6750-4836-8A6C-3647A355B6D2}" dt="2026-04-16T04:01:44.887" v="1431" actId="2696"/>
+        <pc:sldMkLst>
+          <pc:docMk/>
+          <pc:sldMk cId="2287140024" sldId="265"/>
+        </pc:sldMkLst>
+        <pc:spChg chg="mod">
+          <ac:chgData name="Hayden Lamprecht" userId="9117dadff98bc9a8" providerId="LiveId" clId="{75D89BBE-6750-4836-8A6C-3647A355B6D2}" dt="2026-04-16T04:01:24.374" v="1414" actId="20577"/>
+          <ac:spMkLst>
+            <pc:docMk/>
+            <pc:sldMk cId="2287140024" sldId="265"/>
+            <ac:spMk id="2" creationId="{FF165992-C2BE-FDFE-35F5-80CB2A5DE370}"/>
+          </ac:spMkLst>
+        </pc:spChg>
+        <pc:spChg chg="mod">
+          <ac:chgData name="Hayden Lamprecht" userId="9117dadff98bc9a8" providerId="LiveId" clId="{75D89BBE-6750-4836-8A6C-3647A355B6D2}" dt="2026-04-16T04:01:39.432" v="1430" actId="5793"/>
+          <ac:spMkLst>
+            <pc:docMk/>
+            <pc:sldMk cId="2287140024" sldId="265"/>
+            <ac:spMk id="3" creationId="{E9ABC307-25BE-8347-711E-7513F0E9AD47}"/>
+          </ac:spMkLst>
+        </pc:spChg>
+      </pc:sldChg>
+      <pc:sldChg chg="modSp new mod">
+        <pc:chgData name="Hayden Lamprecht" userId="9117dadff98bc9a8" providerId="LiveId" clId="{75D89BBE-6750-4836-8A6C-3647A355B6D2}" dt="2026-04-16T07:57:51.838" v="2250" actId="5793"/>
+        <pc:sldMkLst>
+          <pc:docMk/>
+          <pc:sldMk cId="2993645484" sldId="265"/>
+        </pc:sldMkLst>
+        <pc:spChg chg="mod">
+          <ac:chgData name="Hayden Lamprecht" userId="9117dadff98bc9a8" providerId="LiveId" clId="{75D89BBE-6750-4836-8A6C-3647A355B6D2}" dt="2026-04-16T04:02:23.873" v="1474" actId="20577"/>
+          <ac:spMkLst>
+            <pc:docMk/>
+            <pc:sldMk cId="2993645484" sldId="265"/>
+            <ac:spMk id="2" creationId="{2A0C2966-8802-16C8-9649-211E88D95C31}"/>
+          </ac:spMkLst>
+        </pc:spChg>
+        <pc:spChg chg="mod">
+          <ac:chgData name="Hayden Lamprecht" userId="9117dadff98bc9a8" providerId="LiveId" clId="{75D89BBE-6750-4836-8A6C-3647A355B6D2}" dt="2026-04-16T07:57:51.838" v="2250" actId="5793"/>
+          <ac:spMkLst>
+            <pc:docMk/>
+            <pc:sldMk cId="2993645484" sldId="265"/>
+            <ac:spMk id="3" creationId="{FED01660-A730-845F-A99F-E887C6B66945}"/>
+          </ac:spMkLst>
+        </pc:spChg>
+      </pc:sldChg>
+      <pc:sldChg chg="modSp new del mod">
+        <pc:chgData name="Hayden Lamprecht" userId="9117dadff98bc9a8" providerId="LiveId" clId="{75D89BBE-6750-4836-8A6C-3647A355B6D2}" dt="2026-04-16T04:02:13.292" v="1462" actId="2696"/>
+        <pc:sldMkLst>
+          <pc:docMk/>
+          <pc:sldMk cId="3942778458" sldId="265"/>
+        </pc:sldMkLst>
+        <pc:spChg chg="mod">
+          <ac:chgData name="Hayden Lamprecht" userId="9117dadff98bc9a8" providerId="LiveId" clId="{75D89BBE-6750-4836-8A6C-3647A355B6D2}" dt="2026-04-16T04:02:10.358" v="1461" actId="5793"/>
+          <ac:spMkLst>
+            <pc:docMk/>
+            <pc:sldMk cId="3942778458" sldId="265"/>
+            <ac:spMk id="3" creationId="{78E2B650-901A-268C-05AA-07AE7BDA8AA1}"/>
+          </ac:spMkLst>
+        </pc:spChg>
+      </pc:sldChg>
+      <pc:sldChg chg="addSp delSp modSp new mod">
+        <pc:chgData name="Hayden Lamprecht" userId="9117dadff98bc9a8" providerId="LiveId" clId="{75D89BBE-6750-4836-8A6C-3647A355B6D2}" dt="2026-04-16T08:03:19.737" v="2255" actId="14100"/>
+        <pc:sldMkLst>
+          <pc:docMk/>
+          <pc:sldMk cId="2971251357" sldId="266"/>
+        </pc:sldMkLst>
+        <pc:spChg chg="mod">
+          <ac:chgData name="Hayden Lamprecht" userId="9117dadff98bc9a8" providerId="LiveId" clId="{75D89BBE-6750-4836-8A6C-3647A355B6D2}" dt="2026-04-16T04:09:58.810" v="1793" actId="20577"/>
+          <ac:spMkLst>
+            <pc:docMk/>
+            <pc:sldMk cId="2971251357" sldId="266"/>
+            <ac:spMk id="2" creationId="{9285154A-2727-366B-75DD-2866BE1E4F37}"/>
+          </ac:spMkLst>
+        </pc:spChg>
+        <pc:spChg chg="del">
+          <ac:chgData name="Hayden Lamprecht" userId="9117dadff98bc9a8" providerId="LiveId" clId="{75D89BBE-6750-4836-8A6C-3647A355B6D2}" dt="2026-04-16T05:01:58.207" v="1964" actId="931"/>
+          <ac:spMkLst>
+            <pc:docMk/>
+            <pc:sldMk cId="2971251357" sldId="266"/>
+            <ac:spMk id="3" creationId="{8C4097AA-D228-AB08-9863-D7B2F87E06F2}"/>
+          </ac:spMkLst>
+        </pc:spChg>
+        <pc:spChg chg="add del mod">
+          <ac:chgData name="Hayden Lamprecht" userId="9117dadff98bc9a8" providerId="LiveId" clId="{75D89BBE-6750-4836-8A6C-3647A355B6D2}" dt="2026-04-16T07:52:46.652" v="2169" actId="20577"/>
+          <ac:spMkLst>
+            <pc:docMk/>
+            <pc:sldMk cId="2971251357" sldId="266"/>
+            <ac:spMk id="6" creationId="{556BA39C-51F6-20B0-CAFE-8491FEAC8A93}"/>
+          </ac:spMkLst>
+        </pc:spChg>
+        <pc:spChg chg="add del mod">
+          <ac:chgData name="Hayden Lamprecht" userId="9117dadff98bc9a8" providerId="LiveId" clId="{75D89BBE-6750-4836-8A6C-3647A355B6D2}" dt="2026-04-16T08:03:09.683" v="2252" actId="931"/>
+          <ac:spMkLst>
+            <pc:docMk/>
+            <pc:sldMk cId="2971251357" sldId="266"/>
+            <ac:spMk id="8" creationId="{C2648606-3EF5-EAD1-ACE9-E2FF078EBDF9}"/>
+          </ac:spMkLst>
+        </pc:spChg>
+        <pc:picChg chg="add del mod ord">
+          <ac:chgData name="Hayden Lamprecht" userId="9117dadff98bc9a8" providerId="LiveId" clId="{75D89BBE-6750-4836-8A6C-3647A355B6D2}" dt="2026-04-16T08:01:43.553" v="2251" actId="21"/>
+          <ac:picMkLst>
+            <pc:docMk/>
+            <pc:sldMk cId="2971251357" sldId="266"/>
+            <ac:picMk id="5" creationId="{40C5DB64-2439-293C-4678-A739386C262C}"/>
+          </ac:picMkLst>
+        </pc:picChg>
+        <pc:picChg chg="add mod ord">
+          <ac:chgData name="Hayden Lamprecht" userId="9117dadff98bc9a8" providerId="LiveId" clId="{75D89BBE-6750-4836-8A6C-3647A355B6D2}" dt="2026-04-16T08:03:19.737" v="2255" actId="14100"/>
+          <ac:picMkLst>
+            <pc:docMk/>
+            <pc:sldMk cId="2971251357" sldId="266"/>
+            <ac:picMk id="10" creationId="{12E0BE51-528C-7953-97EA-611ED0601AA1}"/>
+          </ac:picMkLst>
+        </pc:picChg>
+      </pc:sldChg>
+      <pc:sldChg chg="addSp delSp modSp new mod">
+        <pc:chgData name="Hayden Lamprecht" userId="9117dadff98bc9a8" providerId="LiveId" clId="{75D89BBE-6750-4836-8A6C-3647A355B6D2}" dt="2026-04-16T08:04:27.082" v="2370" actId="20577"/>
+        <pc:sldMkLst>
+          <pc:docMk/>
+          <pc:sldMk cId="1261220849" sldId="267"/>
+        </pc:sldMkLst>
+        <pc:spChg chg="mod">
+          <ac:chgData name="Hayden Lamprecht" userId="9117dadff98bc9a8" providerId="LiveId" clId="{75D89BBE-6750-4836-8A6C-3647A355B6D2}" dt="2026-04-16T07:52:59.065" v="2175" actId="20577"/>
+          <ac:spMkLst>
+            <pc:docMk/>
+            <pc:sldMk cId="1261220849" sldId="267"/>
+            <ac:spMk id="2" creationId="{FEAE23C2-AF1E-A4CF-8FA1-9E51CF83BA0A}"/>
+          </ac:spMkLst>
+        </pc:spChg>
+        <pc:spChg chg="del">
+          <ac:chgData name="Hayden Lamprecht" userId="9117dadff98bc9a8" providerId="LiveId" clId="{75D89BBE-6750-4836-8A6C-3647A355B6D2}" dt="2026-04-16T08:03:32.727" v="2256" actId="931"/>
+          <ac:spMkLst>
+            <pc:docMk/>
+            <pc:sldMk cId="1261220849" sldId="267"/>
+            <ac:spMk id="3" creationId="{DD6B979B-84EA-718A-50A4-77E87ECA895E}"/>
+          </ac:spMkLst>
+        </pc:spChg>
+        <pc:spChg chg="add mod">
+          <ac:chgData name="Hayden Lamprecht" userId="9117dadff98bc9a8" providerId="LiveId" clId="{75D89BBE-6750-4836-8A6C-3647A355B6D2}" dt="2026-04-16T08:04:27.082" v="2370" actId="20577"/>
+          <ac:spMkLst>
+            <pc:docMk/>
+            <pc:sldMk cId="1261220849" sldId="267"/>
+            <ac:spMk id="6" creationId="{73169073-2B6E-D87D-0903-40FF8671514D}"/>
+          </ac:spMkLst>
+        </pc:spChg>
+        <pc:picChg chg="add mod ord">
+          <ac:chgData name="Hayden Lamprecht" userId="9117dadff98bc9a8" providerId="LiveId" clId="{75D89BBE-6750-4836-8A6C-3647A355B6D2}" dt="2026-04-16T08:04:11.665" v="2320" actId="14100"/>
+          <ac:picMkLst>
+            <pc:docMk/>
+            <pc:sldMk cId="1261220849" sldId="267"/>
+            <ac:picMk id="5" creationId="{22A4FCD1-5578-1E9A-2259-25CBFCA9D96B}"/>
+          </ac:picMkLst>
+        </pc:picChg>
+      </pc:sldChg>
+      <pc:sldChg chg="addSp delSp modSp new mod">
+        <pc:chgData name="Hayden Lamprecht" userId="9117dadff98bc9a8" providerId="LiveId" clId="{75D89BBE-6750-4836-8A6C-3647A355B6D2}" dt="2026-04-16T12:58:24.365" v="2707" actId="14100"/>
+        <pc:sldMkLst>
+          <pc:docMk/>
+          <pc:sldMk cId="796913952" sldId="268"/>
+        </pc:sldMkLst>
+        <pc:spChg chg="mod">
+          <ac:chgData name="Hayden Lamprecht" userId="9117dadff98bc9a8" providerId="LiveId" clId="{75D89BBE-6750-4836-8A6C-3647A355B6D2}" dt="2026-04-16T12:57:01.631" v="2704" actId="20577"/>
+          <ac:spMkLst>
+            <pc:docMk/>
+            <pc:sldMk cId="796913952" sldId="268"/>
+            <ac:spMk id="2" creationId="{576859A5-071A-913E-3523-C4A63808AF99}"/>
+          </ac:spMkLst>
+        </pc:spChg>
+        <pc:spChg chg="del">
+          <ac:chgData name="Hayden Lamprecht" userId="9117dadff98bc9a8" providerId="LiveId" clId="{75D89BBE-6750-4836-8A6C-3647A355B6D2}" dt="2026-04-16T12:58:18.645" v="2705" actId="931"/>
+          <ac:spMkLst>
+            <pc:docMk/>
+            <pc:sldMk cId="796913952" sldId="268"/>
+            <ac:spMk id="3" creationId="{223DC512-6457-121B-03FE-C0BD0CAB858B}"/>
+          </ac:spMkLst>
+        </pc:spChg>
+        <pc:picChg chg="add mod ord">
+          <ac:chgData name="Hayden Lamprecht" userId="9117dadff98bc9a8" providerId="LiveId" clId="{75D89BBE-6750-4836-8A6C-3647A355B6D2}" dt="2026-04-16T12:58:24.365" v="2707" actId="14100"/>
+          <ac:picMkLst>
+            <pc:docMk/>
+            <pc:sldMk cId="796913952" sldId="268"/>
+            <ac:picMk id="5" creationId="{E2403C3D-5106-61B6-E692-8AA55632B59E}"/>
+          </ac:picMkLst>
+        </pc:picChg>
+      </pc:sldChg>
+    </pc:docChg>
+  </pc:docChgLst>
+</pc:chgInfo>
+</file>
+
+<file path=ppt/notesMasters/notesMaster1.xml><?xml version="1.0" encoding="utf-8"?>
+<p:notesMaster xmlns:a="http://schemas.openxmlformats.org/drawingml/2006/main" xmlns:r="http://schemas.openxmlformats.org/officeDocument/2006/relationships" xmlns:p="http://schemas.openxmlformats.org/presentationml/2006/main">
+  <p:cSld>
+    <p:bg>
+      <p:bgRef idx="1001">
+        <a:schemeClr val="bg1"/>
+      </p:bgRef>
+    </p:bg>
+    <p:spTree>
+      <p:nvGrpSpPr>
+        <p:cNvPr id="1" name=""/>
+        <p:cNvGrpSpPr/>
+        <p:nvPr/>
+      </p:nvGrpSpPr>
+      <p:grpSpPr>
+        <a:xfrm>
+          <a:off x="0" y="0"/>
+          <a:ext cx="0" cy="0"/>
+          <a:chOff x="0" y="0"/>
+          <a:chExt cx="0" cy="0"/>
+        </a:xfrm>
+      </p:grpSpPr>
+      <p:sp>
+        <p:nvSpPr>
+          <p:cNvPr id="2" name="Header Placeholder 1"/>
+          <p:cNvSpPr>
+            <a:spLocks noGrp="1"/>
+          </p:cNvSpPr>
+          <p:nvPr>
+            <p:ph type="hdr" sz="quarter"/>
+          </p:nvPr>
+        </p:nvSpPr>
+        <p:spPr>
+          <a:xfrm>
+            <a:off x="0" y="0"/>
+            <a:ext cx="2971800" cy="458788"/>
+          </a:xfrm>
+          <a:prstGeom prst="rect">
+            <a:avLst/>
+          </a:prstGeom>
+        </p:spPr>
+        <p:txBody>
+          <a:bodyPr vert="horz" lIns="91440" tIns="45720" rIns="91440" bIns="45720" rtlCol="0"/>
+          <a:lstStyle>
+            <a:lvl1pPr algn="l">
+              <a:defRPr sz="1200"/>
+            </a:lvl1pPr>
+          </a:lstStyle>
+          <a:p>
+            <a:endParaRPr lang="en-US"/>
+          </a:p>
+        </p:txBody>
+      </p:sp>
+      <p:sp>
+        <p:nvSpPr>
+          <p:cNvPr id="3" name="Date Placeholder 2"/>
+          <p:cNvSpPr>
+            <a:spLocks noGrp="1"/>
+          </p:cNvSpPr>
+          <p:nvPr>
+            <p:ph type="dt" idx="1"/>
+          </p:nvPr>
+        </p:nvSpPr>
+        <p:spPr>
+          <a:xfrm>
+            <a:off x="3884613" y="0"/>
+            <a:ext cx="2971800" cy="458788"/>
+          </a:xfrm>
+          <a:prstGeom prst="rect">
+            <a:avLst/>
+          </a:prstGeom>
+        </p:spPr>
+        <p:txBody>
+          <a:bodyPr vert="horz" lIns="91440" tIns="45720" rIns="91440" bIns="45720" rtlCol="0"/>
+          <a:lstStyle>
+            <a:lvl1pPr algn="r">
+              <a:defRPr sz="1200"/>
+            </a:lvl1pPr>
+          </a:lstStyle>
+          <a:p>
+            <a:fld id="{A50BB9D2-26B0-4D2B-A108-DD6B4BC080BC}" type="datetimeFigureOut">
+              <a:rPr lang="en-US" smtClean="0"/>
+              <a:t>4/16/2026</a:t>
+            </a:fld>
+            <a:endParaRPr lang="en-US"/>
+          </a:p>
+        </p:txBody>
+      </p:sp>
+      <p:sp>
+        <p:nvSpPr>
+          <p:cNvPr id="4" name="Slide Image Placeholder 3"/>
+          <p:cNvSpPr>
+            <a:spLocks noGrp="1" noRot="1" noChangeAspect="1"/>
+          </p:cNvSpPr>
+          <p:nvPr>
+            <p:ph type="sldImg" idx="2"/>
+          </p:nvPr>
+        </p:nvSpPr>
+        <p:spPr>
+          <a:xfrm>
+            <a:off x="685800" y="1143000"/>
+            <a:ext cx="5486400" cy="3086100"/>
+          </a:xfrm>
+          <a:prstGeom prst="rect">
+            <a:avLst/>
+          </a:prstGeom>
+          <a:noFill/>
+          <a:ln w="12700">
+            <a:solidFill>
+              <a:prstClr val="black"/>
+            </a:solidFill>
+          </a:ln>
+        </p:spPr>
+        <p:txBody>
+          <a:bodyPr vert="horz" lIns="91440" tIns="45720" rIns="91440" bIns="45720" rtlCol="0" anchor="ctr"/>
+          <a:lstStyle/>
+          <a:p>
+            <a:endParaRPr lang="en-US"/>
+          </a:p>
+        </p:txBody>
+      </p:sp>
+      <p:sp>
+        <p:nvSpPr>
+          <p:cNvPr id="5" name="Notes Placeholder 4"/>
+          <p:cNvSpPr>
+            <a:spLocks noGrp="1"/>
+          </p:cNvSpPr>
+          <p:nvPr>
+            <p:ph type="body" sz="quarter" idx="3"/>
+          </p:nvPr>
+        </p:nvSpPr>
+        <p:spPr>
+          <a:xfrm>
+            <a:off x="685800" y="4400550"/>
+            <a:ext cx="5486400" cy="3600450"/>
+          </a:xfrm>
+          <a:prstGeom prst="rect">
+            <a:avLst/>
+          </a:prstGeom>
+        </p:spPr>
+        <p:txBody>
+          <a:bodyPr vert="horz" lIns="91440" tIns="45720" rIns="91440" bIns="45720" rtlCol="0"/>
+          <a:lstStyle/>
+          <a:p>
+            <a:pPr lvl="0"/>
+            <a:r>
+              <a:rPr lang="en-US"/>
+              <a:t>Click to edit Master text styles</a:t>
+            </a:r>
+          </a:p>
+          <a:p>
+            <a:pPr lvl="1"/>
+            <a:r>
+              <a:rPr lang="en-US"/>
+              <a:t>Second level</a:t>
+            </a:r>
+          </a:p>
+          <a:p>
+            <a:pPr lvl="2"/>
+            <a:r>
+              <a:rPr lang="en-US"/>
+              <a:t>Third level</a:t>
+            </a:r>
+          </a:p>
+          <a:p>
+            <a:pPr lvl="3"/>
+            <a:r>
+              <a:rPr lang="en-US"/>
+              <a:t>Fourth level</a:t>
+            </a:r>
+          </a:p>
+          <a:p>
+            <a:pPr lvl="4"/>
+            <a:r>
+              <a:rPr lang="en-US"/>
+              <a:t>Fifth level</a:t>
+            </a:r>
+          </a:p>
+        </p:txBody>
+      </p:sp>
+      <p:sp>
+        <p:nvSpPr>
+          <p:cNvPr id="6" name="Footer Placeholder 5"/>
+          <p:cNvSpPr>
+            <a:spLocks noGrp="1"/>
+          </p:cNvSpPr>
+          <p:nvPr>
+            <p:ph type="ftr" sz="quarter" idx="4"/>
+          </p:nvPr>
+        </p:nvSpPr>
+        <p:spPr>
+          <a:xfrm>
+            <a:off x="0" y="8685213"/>
+            <a:ext cx="2971800" cy="458787"/>
+          </a:xfrm>
+          <a:prstGeom prst="rect">
+            <a:avLst/>
+          </a:prstGeom>
+        </p:spPr>
+        <p:txBody>
+          <a:bodyPr vert="horz" lIns="91440" tIns="45720" rIns="91440" bIns="45720" rtlCol="0" anchor="b"/>
+          <a:lstStyle>
+            <a:lvl1pPr algn="l">
+              <a:defRPr sz="1200"/>
+            </a:lvl1pPr>
+          </a:lstStyle>
+          <a:p>
+            <a:endParaRPr lang="en-US"/>
+          </a:p>
+        </p:txBody>
+      </p:sp>
+      <p:sp>
+        <p:nvSpPr>
+          <p:cNvPr id="7" name="Slide Number Placeholder 6"/>
+          <p:cNvSpPr>
+            <a:spLocks noGrp="1"/>
+          </p:cNvSpPr>
+          <p:nvPr>
+            <p:ph type="sldNum" sz="quarter" idx="5"/>
+          </p:nvPr>
+        </p:nvSpPr>
+        <p:spPr>
+          <a:xfrm>
+            <a:off x="3884613" y="8685213"/>
+            <a:ext cx="2971800" cy="458787"/>
+          </a:xfrm>
+          <a:prstGeom prst="rect">
+            <a:avLst/>
+          </a:prstGeom>
+        </p:spPr>
+        <p:txBody>
+          <a:bodyPr vert="horz" lIns="91440" tIns="45720" rIns="91440" bIns="45720" rtlCol="0" anchor="b"/>
+          <a:lstStyle>
+            <a:lvl1pPr algn="r">
+              <a:defRPr sz="1200"/>
+            </a:lvl1pPr>
+          </a:lstStyle>
+          <a:p>
+            <a:fld id="{EB77F6BB-3E59-4E29-9BFD-F9F7BB7F5D5B}" type="slidenum">
+              <a:rPr lang="en-US" smtClean="0"/>
+              <a:t>‹#›</a:t>
+            </a:fld>
+            <a:endParaRPr lang="en-US"/>
+          </a:p>
+        </p:txBody>
+      </p:sp>
+    </p:spTree>
+    <p:extLst>
+      <p:ext uri="{BB962C8B-B14F-4D97-AF65-F5344CB8AC3E}">
+        <p14:creationId xmlns:p14="http://schemas.microsoft.com/office/powerpoint/2010/main" val="257263662"/>
+      </p:ext>
+    </p:extLst>
+  </p:cSld>
+  <p:clrMap bg1="lt1" tx1="dk1" bg2="lt2" tx2="dk2" accent1="accent1" accent2="accent2" accent3="accent3" accent4="accent4" accent5="accent5" accent6="accent6" hlink="hlink" folHlink="folHlink"/>
+  <p:notesStyle>
+    <a:lvl1pPr marL="0" algn="l" defTabSz="914400" rtl="0" eaLnBrk="1" latinLnBrk="0" hangingPunct="1">
+      <a:defRPr sz="1200" kern="1200">
+        <a:solidFill>
+          <a:schemeClr val="tx1"/>
+        </a:solidFill>
+        <a:latin typeface="+mn-lt"/>
+        <a:ea typeface="+mn-ea"/>
+        <a:cs typeface="+mn-cs"/>
+      </a:defRPr>
+    </a:lvl1pPr>
+    <a:lvl2pPr marL="457200" algn="l" defTabSz="914400" rtl="0" eaLnBrk="1" latinLnBrk="0" hangingPunct="1">
+      <a:defRPr sz="1200" kern="1200">
+        <a:solidFill>
+          <a:schemeClr val="tx1"/>
+        </a:solidFill>
+        <a:latin typeface="+mn-lt"/>
+        <a:ea typeface="+mn-ea"/>
+        <a:cs typeface="+mn-cs"/>
+      </a:defRPr>
+    </a:lvl2pPr>
+    <a:lvl3pPr marL="914400" algn="l" defTabSz="914400" rtl="0" eaLnBrk="1" latinLnBrk="0" hangingPunct="1">
+      <a:defRPr sz="1200" kern="1200">
+        <a:solidFill>
+          <a:schemeClr val="tx1"/>
+        </a:solidFill>
+        <a:latin typeface="+mn-lt"/>
+        <a:ea typeface="+mn-ea"/>
+        <a:cs typeface="+mn-cs"/>
+      </a:defRPr>
+    </a:lvl3pPr>
+    <a:lvl4pPr marL="1371600" algn="l" defTabSz="914400" rtl="0" eaLnBrk="1" latinLnBrk="0" hangingPunct="1">
+      <a:defRPr sz="1200" kern="1200">
+        <a:solidFill>
+          <a:schemeClr val="tx1"/>
+        </a:solidFill>
+        <a:latin typeface="+mn-lt"/>
+        <a:ea typeface="+mn-ea"/>
+        <a:cs typeface="+mn-cs"/>
+      </a:defRPr>
+    </a:lvl4pPr>
+    <a:lvl5pPr marL="1828800" algn="l" defTabSz="914400" rtl="0" eaLnBrk="1" latinLnBrk="0" hangingPunct="1">
+      <a:defRPr sz="1200" kern="1200">
+        <a:solidFill>
+          <a:schemeClr val="tx1"/>
+        </a:solidFill>
+        <a:latin typeface="+mn-lt"/>
+        <a:ea typeface="+mn-ea"/>
+        <a:cs typeface="+mn-cs"/>
+      </a:defRPr>
+    </a:lvl5pPr>
+    <a:lvl6pPr marL="2286000" algn="l" defTabSz="914400" rtl="0" eaLnBrk="1" latinLnBrk="0" hangingPunct="1">
+      <a:defRPr sz="1200" kern="1200">
+        <a:solidFill>
+          <a:schemeClr val="tx1"/>
+        </a:solidFill>
+        <a:latin typeface="+mn-lt"/>
+        <a:ea typeface="+mn-ea"/>
+        <a:cs typeface="+mn-cs"/>
+      </a:defRPr>
+    </a:lvl6pPr>
+    <a:lvl7pPr marL="2743200" algn="l" defTabSz="914400" rtl="0" eaLnBrk="1" latinLnBrk="0" hangingPunct="1">
+      <a:defRPr sz="1200" kern="1200">
+        <a:solidFill>
+          <a:schemeClr val="tx1"/>
+        </a:solidFill>
+        <a:latin typeface="+mn-lt"/>
+        <a:ea typeface="+mn-ea"/>
+        <a:cs typeface="+mn-cs"/>
+      </a:defRPr>
+    </a:lvl7pPr>
+    <a:lvl8pPr marL="3200400" algn="l" defTabSz="914400" rtl="0" eaLnBrk="1" latinLnBrk="0" hangingPunct="1">
+      <a:defRPr sz="1200" kern="1200">
+        <a:solidFill>
+          <a:schemeClr val="tx1"/>
+        </a:solidFill>
+        <a:latin typeface="+mn-lt"/>
+        <a:ea typeface="+mn-ea"/>
+        <a:cs typeface="+mn-cs"/>
+      </a:defRPr>
+    </a:lvl8pPr>
+    <a:lvl9pPr marL="3657600" algn="l" defTabSz="914400" rtl="0" eaLnBrk="1" latinLnBrk="0" hangingPunct="1">
+      <a:defRPr sz="1200" kern="1200">
+        <a:solidFill>
+          <a:schemeClr val="tx1"/>
+        </a:solidFill>
+        <a:latin typeface="+mn-lt"/>
+        <a:ea typeface="+mn-ea"/>
+        <a:cs typeface="+mn-cs"/>
+      </a:defRPr>
+    </a:lvl9pPr>
+  </p:notesStyle>
+</p:notesMaster>
+</file>
+
+<file path=ppt/notesSlides/notesSlide1.xml><?xml version="1.0" encoding="utf-8"?>
+<p:notes xmlns:a="http://schemas.openxmlformats.org/drawingml/2006/main" xmlns:r="http://schemas.openxmlformats.org/officeDocument/2006/relationships" xmlns:p="http://schemas.openxmlformats.org/presentationml/2006/main">
+  <p:cSld>
+    <p:spTree>
+      <p:nvGrpSpPr>
+        <p:cNvPr id="1" name=""/>
+        <p:cNvGrpSpPr/>
+        <p:nvPr/>
+      </p:nvGrpSpPr>
+      <p:grpSpPr>
+        <a:xfrm>
+          <a:off x="0" y="0"/>
+          <a:ext cx="0" cy="0"/>
+          <a:chOff x="0" y="0"/>
+          <a:chExt cx="0" cy="0"/>
+        </a:xfrm>
+      </p:grpSpPr>
+      <p:sp>
+        <p:nvSpPr>
+          <p:cNvPr id="2" name="Slide Image Placeholder 1"/>
+          <p:cNvSpPr>
+            <a:spLocks noGrp="1" noRot="1" noChangeAspect="1"/>
+          </p:cNvSpPr>
+          <p:nvPr>
+            <p:ph type="sldImg"/>
+          </p:nvPr>
+        </p:nvSpPr>
+        <p:spPr/>
+      </p:sp>
+      <p:sp>
+        <p:nvSpPr>
+          <p:cNvPr id="3" name="Notes Placeholder 2"/>
+          <p:cNvSpPr>
+            <a:spLocks noGrp="1"/>
+          </p:cNvSpPr>
+          <p:nvPr>
+            <p:ph type="body" idx="1"/>
+          </p:nvPr>
+        </p:nvSpPr>
+        <p:spPr/>
+        <p:txBody>
+          <a:bodyPr/>
+          <a:lstStyle/>
+          <a:p>
+            <a:endParaRPr lang="en-US" dirty="0"/>
+          </a:p>
+        </p:txBody>
+      </p:sp>
+      <p:sp>
+        <p:nvSpPr>
+          <p:cNvPr id="4" name="Slide Number Placeholder 3"/>
+          <p:cNvSpPr>
+            <a:spLocks noGrp="1"/>
+          </p:cNvSpPr>
+          <p:nvPr>
+            <p:ph type="sldNum" sz="quarter" idx="5"/>
+          </p:nvPr>
+        </p:nvSpPr>
+        <p:spPr/>
+        <p:txBody>
+          <a:bodyPr/>
+          <a:lstStyle/>
+          <a:p>
+            <a:fld id="{EB77F6BB-3E59-4E29-9BFD-F9F7BB7F5D5B}" type="slidenum">
+              <a:rPr lang="en-US" smtClean="0"/>
+              <a:t>5</a:t>
+            </a:fld>
+            <a:endParaRPr lang="en-US"/>
+          </a:p>
+        </p:txBody>
+      </p:sp>
+    </p:spTree>
+    <p:extLst>
+      <p:ext uri="{BB962C8B-B14F-4D97-AF65-F5344CB8AC3E}">
+        <p14:creationId xmlns:p14="http://schemas.microsoft.com/office/powerpoint/2010/main" val="3529227352"/>
+      </p:ext>
+    </p:extLst>
+  </p:cSld>
+  <p:clrMapOvr>
+    <a:masterClrMapping/>
+  </p:clrMapOvr>
+</p:notes>
+</file>
+
 <file path=ppt/slideLayouts/slideLayout1.xml><?xml version="1.0" encoding="utf-8"?>
-<p:sldLayout xmlns:a="http://schemas.openxmlformats.org/drawingml/2006/main" xmlns:r="http://schemas.openxmlformats.org/officeDocument/2006/relationships" xmlns:p="http://schemas.openxmlformats.org/presentationml/2006/main" type="title" preserve="1">
+<p:sldLayout xmlns:a="http://schemas.openxmlformats.org/drawingml/2006/main" xmlns:r="http://schemas.openxmlformats.org/officeDocument/2006/relationships" xmlns:p="http://schemas.openxmlformats.org/presentationml/2006/main" showMasterSp="0" type="title" preserve="1">
   <p:cSld name="Title Slide">
     <p:spTree>
       <p:nvGrpSpPr>
@@ -131,31 +1126,127 @@
       </p:grpSpPr>
       <p:sp>
         <p:nvSpPr>
-          <p:cNvPr id="2" name="Title 1">
-            <a:extLst>
-              <a:ext uri="{FF2B5EF4-FFF2-40B4-BE49-F238E27FC236}">
-                <a16:creationId xmlns:a16="http://schemas.microsoft.com/office/drawing/2014/main" id="{65766640-B346-E7F0-5BA1-AA99856CBB8A}"/>
-              </a:ext>
-            </a:extLst>
-          </p:cNvPr>
-          <p:cNvSpPr>
-            <a:spLocks noGrp="1"/>
-          </p:cNvSpPr>
-          <p:nvPr>
-            <p:ph type="ctrTitle"/>
-          </p:nvPr>
+          <p:cNvPr id="7" name="Rectangle 6"/>
+          <p:cNvSpPr/>
+          <p:nvPr/>
         </p:nvSpPr>
         <p:spPr>
           <a:xfrm>
-            <a:off x="1524000" y="1122363"/>
-            <a:ext cx="9144000" cy="2387600"/>
+            <a:off x="3175" y="6400800"/>
+            <a:ext cx="12188825" cy="457200"/>
+          </a:xfrm>
+          <a:prstGeom prst="rect">
+            <a:avLst/>
+          </a:prstGeom>
+          <a:solidFill>
+            <a:schemeClr val="accent2"/>
+          </a:solidFill>
+          <a:ln>
+            <a:noFill/>
+          </a:ln>
+        </p:spPr>
+        <p:style>
+          <a:lnRef idx="2">
+            <a:schemeClr val="accent1">
+              <a:shade val="50000"/>
+            </a:schemeClr>
+          </a:lnRef>
+          <a:fillRef idx="1">
+            <a:schemeClr val="accent1"/>
+          </a:fillRef>
+          <a:effectRef idx="0">
+            <a:schemeClr val="accent1"/>
+          </a:effectRef>
+          <a:fontRef idx="minor">
+            <a:schemeClr val="lt1"/>
+          </a:fontRef>
+        </p:style>
+        <p:txBody>
+          <a:bodyPr/>
+          <a:lstStyle/>
+          <a:p>
+            <a:endParaRPr lang="en-US"/>
+          </a:p>
+        </p:txBody>
+      </p:sp>
+      <p:sp>
+        <p:nvSpPr>
+          <p:cNvPr id="8" name="Rectangle 7"/>
+          <p:cNvSpPr/>
+          <p:nvPr/>
+        </p:nvSpPr>
+        <p:spPr>
+          <a:xfrm>
+            <a:off x="15" y="6334316"/>
+            <a:ext cx="12188825" cy="64008"/>
+          </a:xfrm>
+          <a:prstGeom prst="rect">
+            <a:avLst/>
+          </a:prstGeom>
+          <a:solidFill>
+            <a:schemeClr val="accent1"/>
+          </a:solidFill>
+          <a:ln>
+            <a:noFill/>
+          </a:ln>
+        </p:spPr>
+        <p:style>
+          <a:lnRef idx="2">
+            <a:schemeClr val="accent1">
+              <a:shade val="50000"/>
+            </a:schemeClr>
+          </a:lnRef>
+          <a:fillRef idx="1">
+            <a:schemeClr val="accent1"/>
+          </a:fillRef>
+          <a:effectRef idx="0">
+            <a:schemeClr val="accent1"/>
+          </a:effectRef>
+          <a:fontRef idx="minor">
+            <a:schemeClr val="lt1"/>
+          </a:fontRef>
+        </p:style>
+        <p:txBody>
+          <a:bodyPr/>
+          <a:lstStyle/>
+          <a:p>
+            <a:endParaRPr lang="en-US"/>
+          </a:p>
+        </p:txBody>
+      </p:sp>
+      <p:sp>
+        <p:nvSpPr>
+          <p:cNvPr id="2" name="Title 1"/>
+          <p:cNvSpPr>
+            <a:spLocks noGrp="1"/>
+          </p:cNvSpPr>
+          <p:nvPr>
+            <p:ph type="ctrTitle"/>
+          </p:nvPr>
+        </p:nvSpPr>
+        <p:spPr>
+          <a:xfrm>
+            <a:off x="1097280" y="758952"/>
+            <a:ext cx="10058400" cy="3566160"/>
           </a:xfrm>
         </p:spPr>
         <p:txBody>
-          <a:bodyPr anchor="b"/>
+          <a:bodyPr anchor="b">
+            <a:normAutofit/>
+          </a:bodyPr>
           <a:lstStyle>
-            <a:lvl1pPr algn="ctr">
-              <a:defRPr sz="6000"/>
+            <a:lvl1pPr algn="l">
+              <a:lnSpc>
+                <a:spcPct val="85000"/>
+              </a:lnSpc>
+              <a:defRPr sz="8000" spc="-50" baseline="0">
+                <a:solidFill>
+                  <a:schemeClr val="tx1">
+                    <a:lumMod val="85000"/>
+                    <a:lumOff val="15000"/>
+                  </a:schemeClr>
+                </a:solidFill>
+              </a:defRPr>
             </a:lvl1pPr>
           </a:lstStyle>
           <a:p>
@@ -163,18 +1254,13 @@
               <a:rPr lang="en-US"/>
               <a:t>Click to edit Master title style</a:t>
             </a:r>
-          </a:p>
-        </p:txBody>
-      </p:sp>
-      <p:sp>
-        <p:nvSpPr>
-          <p:cNvPr id="3" name="Subtitle 2">
-            <a:extLst>
-              <a:ext uri="{FF2B5EF4-FFF2-40B4-BE49-F238E27FC236}">
-                <a16:creationId xmlns:a16="http://schemas.microsoft.com/office/drawing/2014/main" id="{2340989B-5C90-B185-68FE-2CC94B2CD17D}"/>
-              </a:ext>
-            </a:extLst>
-          </p:cNvPr>
+            <a:endParaRPr lang="en-US" dirty="0"/>
+          </a:p>
+        </p:txBody>
+      </p:sp>
+      <p:sp>
+        <p:nvSpPr>
+          <p:cNvPr id="3" name="Subtitle 2"/>
           <p:cNvSpPr>
             <a:spLocks noGrp="1"/>
           </p:cNvSpPr>
@@ -184,48 +1270,55 @@
         </p:nvSpPr>
         <p:spPr>
           <a:xfrm>
-            <a:off x="1524000" y="3602038"/>
-            <a:ext cx="9144000" cy="1655762"/>
+            <a:off x="1100051" y="4455620"/>
+            <a:ext cx="10058400" cy="1143000"/>
           </a:xfrm>
         </p:spPr>
         <p:txBody>
-          <a:bodyPr/>
+          <a:bodyPr lIns="91440" rIns="91440">
+            <a:normAutofit/>
+          </a:bodyPr>
           <a:lstStyle>
-            <a:lvl1pPr marL="0" indent="0" algn="ctr">
+            <a:lvl1pPr marL="0" indent="0" algn="l">
               <a:buNone/>
-              <a:defRPr sz="2400"/>
+              <a:defRPr sz="2400" cap="all" spc="200" baseline="0">
+                <a:solidFill>
+                  <a:schemeClr val="tx2"/>
+                </a:solidFill>
+                <a:latin typeface="+mj-lt"/>
+              </a:defRPr>
             </a:lvl1pPr>
             <a:lvl2pPr marL="457200" indent="0" algn="ctr">
               <a:buNone/>
-              <a:defRPr sz="2000"/>
+              <a:defRPr sz="2400"/>
             </a:lvl2pPr>
             <a:lvl3pPr marL="914400" indent="0" algn="ctr">
               <a:buNone/>
-              <a:defRPr sz="1800"/>
+              <a:defRPr sz="2400"/>
             </a:lvl3pPr>
             <a:lvl4pPr marL="1371600" indent="0" algn="ctr">
               <a:buNone/>
-              <a:defRPr sz="1600"/>
+              <a:defRPr sz="2000"/>
             </a:lvl4pPr>
             <a:lvl5pPr marL="1828800" indent="0" algn="ctr">
               <a:buNone/>
-              <a:defRPr sz="1600"/>
+              <a:defRPr sz="2000"/>
             </a:lvl5pPr>
             <a:lvl6pPr marL="2286000" indent="0" algn="ctr">
               <a:buNone/>
-              <a:defRPr sz="1600"/>
+              <a:defRPr sz="2000"/>
             </a:lvl6pPr>
             <a:lvl7pPr marL="2743200" indent="0" algn="ctr">
               <a:buNone/>
-              <a:defRPr sz="1600"/>
+              <a:defRPr sz="2000"/>
             </a:lvl7pPr>
             <a:lvl8pPr marL="3200400" indent="0" algn="ctr">
               <a:buNone/>
-              <a:defRPr sz="1600"/>
+              <a:defRPr sz="2000"/>
             </a:lvl8pPr>
             <a:lvl9pPr marL="3657600" indent="0" algn="ctr">
               <a:buNone/>
-              <a:defRPr sz="1600"/>
+              <a:defRPr sz="2000"/>
             </a:lvl9pPr>
           </a:lstStyle>
           <a:p>
@@ -233,18 +1326,13 @@
               <a:rPr lang="en-US"/>
               <a:t>Click to edit Master subtitle style</a:t>
             </a:r>
-          </a:p>
-        </p:txBody>
-      </p:sp>
-      <p:sp>
-        <p:nvSpPr>
-          <p:cNvPr id="4" name="Date Placeholder 3">
-            <a:extLst>
-              <a:ext uri="{FF2B5EF4-FFF2-40B4-BE49-F238E27FC236}">
-                <a16:creationId xmlns:a16="http://schemas.microsoft.com/office/drawing/2014/main" id="{A43E099B-C70A-38A9-EE77-60C99E83B2BA}"/>
-              </a:ext>
-            </a:extLst>
-          </p:cNvPr>
+            <a:endParaRPr lang="en-US" dirty="0"/>
+          </a:p>
+        </p:txBody>
+      </p:sp>
+      <p:sp>
+        <p:nvSpPr>
+          <p:cNvPr id="4" name="Date Placeholder 3"/>
           <p:cNvSpPr>
             <a:spLocks noGrp="1"/>
           </p:cNvSpPr>
@@ -259,7 +1347,7 @@
           <a:p>
             <a:fld id="{591881DA-1B4A-4782-A1DD-0FD4E92C2783}" type="datetimeFigureOut">
               <a:rPr lang="en-US" smtClean="0"/>
-              <a:t>4/15/2026</a:t>
+              <a:t>4/16/2026</a:t>
             </a:fld>
             <a:endParaRPr lang="en-US"/>
           </a:p>
@@ -267,13 +1355,7 @@
       </p:sp>
       <p:sp>
         <p:nvSpPr>
-          <p:cNvPr id="5" name="Footer Placeholder 4">
-            <a:extLst>
-              <a:ext uri="{FF2B5EF4-FFF2-40B4-BE49-F238E27FC236}">
-                <a16:creationId xmlns:a16="http://schemas.microsoft.com/office/drawing/2014/main" id="{D181051F-30F7-5007-094D-97773608FB9C}"/>
-              </a:ext>
-            </a:extLst>
-          </p:cNvPr>
+          <p:cNvPr id="5" name="Footer Placeholder 4"/>
           <p:cNvSpPr>
             <a:spLocks noGrp="1"/>
           </p:cNvSpPr>
@@ -292,13 +1374,7 @@
       </p:sp>
       <p:sp>
         <p:nvSpPr>
-          <p:cNvPr id="6" name="Slide Number Placeholder 5">
-            <a:extLst>
-              <a:ext uri="{FF2B5EF4-FFF2-40B4-BE49-F238E27FC236}">
-                <a16:creationId xmlns:a16="http://schemas.microsoft.com/office/drawing/2014/main" id="{0B47A8A6-A3D9-AA0B-93A9-32B714937F6C}"/>
-              </a:ext>
-            </a:extLst>
-          </p:cNvPr>
+          <p:cNvPr id="6" name="Slide Number Placeholder 5"/>
           <p:cNvSpPr>
             <a:spLocks noGrp="1"/>
           </p:cNvSpPr>
@@ -319,10 +1395,48 @@
           </a:p>
         </p:txBody>
       </p:sp>
+      <p:cxnSp>
+        <p:nvCxnSpPr>
+          <p:cNvPr id="9" name="Straight Connector 8"/>
+          <p:cNvCxnSpPr/>
+          <p:nvPr/>
+        </p:nvCxnSpPr>
+        <p:spPr>
+          <a:xfrm>
+            <a:off x="1207658" y="4343400"/>
+            <a:ext cx="9875520" cy="0"/>
+          </a:xfrm>
+          <a:prstGeom prst="line">
+            <a:avLst/>
+          </a:prstGeom>
+          <a:ln w="6350">
+            <a:solidFill>
+              <a:schemeClr val="tx1">
+                <a:lumMod val="50000"/>
+                <a:lumOff val="50000"/>
+              </a:schemeClr>
+            </a:solidFill>
+          </a:ln>
+        </p:spPr>
+        <p:style>
+          <a:lnRef idx="1">
+            <a:schemeClr val="accent1"/>
+          </a:lnRef>
+          <a:fillRef idx="0">
+            <a:schemeClr val="accent1"/>
+          </a:fillRef>
+          <a:effectRef idx="0">
+            <a:schemeClr val="accent1"/>
+          </a:effectRef>
+          <a:fontRef idx="minor">
+            <a:schemeClr val="tx1"/>
+          </a:fontRef>
+        </p:style>
+      </p:cxnSp>
     </p:spTree>
     <p:extLst>
       <p:ext uri="{BB962C8B-B14F-4D97-AF65-F5344CB8AC3E}">
-        <p14:creationId xmlns:p14="http://schemas.microsoft.com/office/powerpoint/2010/main" val="677870067"/>
+        <p14:creationId xmlns:p14="http://schemas.microsoft.com/office/powerpoint/2010/main" val="3188344280"/>
       </p:ext>
     </p:extLst>
   </p:cSld>
@@ -351,13 +1465,7 @@
       </p:grpSpPr>
       <p:sp>
         <p:nvSpPr>
-          <p:cNvPr id="2" name="Title 1">
-            <a:extLst>
-              <a:ext uri="{FF2B5EF4-FFF2-40B4-BE49-F238E27FC236}">
-                <a16:creationId xmlns:a16="http://schemas.microsoft.com/office/drawing/2014/main" id="{F92D87AE-BCC4-2836-7761-BEFFFF61097E}"/>
-              </a:ext>
-            </a:extLst>
-          </p:cNvPr>
+          <p:cNvPr id="2" name="Title 1"/>
           <p:cNvSpPr>
             <a:spLocks noGrp="1"/>
           </p:cNvSpPr>
@@ -374,18 +1482,13 @@
               <a:rPr lang="en-US"/>
               <a:t>Click to edit Master title style</a:t>
             </a:r>
-          </a:p>
-        </p:txBody>
-      </p:sp>
-      <p:sp>
-        <p:nvSpPr>
-          <p:cNvPr id="3" name="Vertical Text Placeholder 2">
-            <a:extLst>
-              <a:ext uri="{FF2B5EF4-FFF2-40B4-BE49-F238E27FC236}">
-                <a16:creationId xmlns:a16="http://schemas.microsoft.com/office/drawing/2014/main" id="{247B7876-C453-B0D3-9251-9FDDAE55FA52}"/>
-              </a:ext>
-            </a:extLst>
-          </p:cNvPr>
+            <a:endParaRPr lang="en-US" dirty="0"/>
+          </a:p>
+        </p:txBody>
+      </p:sp>
+      <p:sp>
+        <p:nvSpPr>
+          <p:cNvPr id="3" name="Vertical Text Placeholder 2"/>
           <p:cNvSpPr>
             <a:spLocks noGrp="1"/>
           </p:cNvSpPr>
@@ -395,7 +1498,7 @@
         </p:nvSpPr>
         <p:spPr/>
         <p:txBody>
-          <a:bodyPr vert="eaVert"/>
+          <a:bodyPr vert="eaVert" lIns="45720" tIns="0" rIns="45720" bIns="0"/>
           <a:lstStyle/>
           <a:p>
             <a:pPr lvl="0"/>
@@ -431,18 +1534,13 @@
               <a:rPr lang="en-US"/>
               <a:t>Fifth level</a:t>
             </a:r>
-          </a:p>
-        </p:txBody>
-      </p:sp>
-      <p:sp>
-        <p:nvSpPr>
-          <p:cNvPr id="4" name="Date Placeholder 3">
-            <a:extLst>
-              <a:ext uri="{FF2B5EF4-FFF2-40B4-BE49-F238E27FC236}">
-                <a16:creationId xmlns:a16="http://schemas.microsoft.com/office/drawing/2014/main" id="{862B6CB0-AA6E-834F-2851-CBE4A0399157}"/>
-              </a:ext>
-            </a:extLst>
-          </p:cNvPr>
+            <a:endParaRPr lang="en-US" dirty="0"/>
+          </a:p>
+        </p:txBody>
+      </p:sp>
+      <p:sp>
+        <p:nvSpPr>
+          <p:cNvPr id="4" name="Date Placeholder 3"/>
           <p:cNvSpPr>
             <a:spLocks noGrp="1"/>
           </p:cNvSpPr>
@@ -457,7 +1555,7 @@
           <a:p>
             <a:fld id="{591881DA-1B4A-4782-A1DD-0FD4E92C2783}" type="datetimeFigureOut">
               <a:rPr lang="en-US" smtClean="0"/>
-              <a:t>4/15/2026</a:t>
+              <a:t>4/16/2026</a:t>
             </a:fld>
             <a:endParaRPr lang="en-US"/>
           </a:p>
@@ -465,13 +1563,7 @@
       </p:sp>
       <p:sp>
         <p:nvSpPr>
-          <p:cNvPr id="5" name="Footer Placeholder 4">
-            <a:extLst>
-              <a:ext uri="{FF2B5EF4-FFF2-40B4-BE49-F238E27FC236}">
-                <a16:creationId xmlns:a16="http://schemas.microsoft.com/office/drawing/2014/main" id="{6FFADD32-8103-F676-7765-DF5D380A76ED}"/>
-              </a:ext>
-            </a:extLst>
-          </p:cNvPr>
+          <p:cNvPr id="5" name="Footer Placeholder 4"/>
           <p:cNvSpPr>
             <a:spLocks noGrp="1"/>
           </p:cNvSpPr>
@@ -490,13 +1582,7 @@
       </p:sp>
       <p:sp>
         <p:nvSpPr>
-          <p:cNvPr id="6" name="Slide Number Placeholder 5">
-            <a:extLst>
-              <a:ext uri="{FF2B5EF4-FFF2-40B4-BE49-F238E27FC236}">
-                <a16:creationId xmlns:a16="http://schemas.microsoft.com/office/drawing/2014/main" id="{B6BFF52D-9346-98A7-9A4B-DB9322123483}"/>
-              </a:ext>
-            </a:extLst>
-          </p:cNvPr>
+          <p:cNvPr id="6" name="Slide Number Placeholder 5"/>
           <p:cNvSpPr>
             <a:spLocks noGrp="1"/>
           </p:cNvSpPr>
@@ -520,7 +1606,7 @@
     </p:spTree>
     <p:extLst>
       <p:ext uri="{BB962C8B-B14F-4D97-AF65-F5344CB8AC3E}">
-        <p14:creationId xmlns:p14="http://schemas.microsoft.com/office/powerpoint/2010/main" val="2034952982"/>
+        <p14:creationId xmlns:p14="http://schemas.microsoft.com/office/powerpoint/2010/main" val="3005180566"/>
       </p:ext>
     </p:extLst>
   </p:cSld>
@@ -531,7 +1617,7 @@
 </file>
 
 <file path=ppt/slideLayouts/slideLayout11.xml><?xml version="1.0" encoding="utf-8"?>
-<p:sldLayout xmlns:a="http://schemas.openxmlformats.org/drawingml/2006/main" xmlns:r="http://schemas.openxmlformats.org/officeDocument/2006/relationships" xmlns:p="http://schemas.openxmlformats.org/presentationml/2006/main" type="vertTitleAndTx" preserve="1">
+<p:sldLayout xmlns:a="http://schemas.openxmlformats.org/drawingml/2006/main" xmlns:r="http://schemas.openxmlformats.org/officeDocument/2006/relationships" xmlns:p="http://schemas.openxmlformats.org/presentationml/2006/main" showMasterSp="0" type="vertTitleAndTx" preserve="1">
   <p:cSld name="Vertical Title and Text">
     <p:spTree>
       <p:nvGrpSpPr>
@@ -549,24 +1635,94 @@
       </p:grpSpPr>
       <p:sp>
         <p:nvSpPr>
-          <p:cNvPr id="2" name="Vertical Title 1">
-            <a:extLst>
-              <a:ext uri="{FF2B5EF4-FFF2-40B4-BE49-F238E27FC236}">
-                <a16:creationId xmlns:a16="http://schemas.microsoft.com/office/drawing/2014/main" id="{0438E35D-692B-230D-3AF4-89A806983F86}"/>
-              </a:ext>
-            </a:extLst>
-          </p:cNvPr>
-          <p:cNvSpPr>
-            <a:spLocks noGrp="1"/>
-          </p:cNvSpPr>
-          <p:nvPr>
-            <p:ph type="title" orient="vert"/>
-          </p:nvPr>
+          <p:cNvPr id="7" name="Rectangle 6"/>
+          <p:cNvSpPr/>
+          <p:nvPr/>
         </p:nvSpPr>
         <p:spPr>
           <a:xfrm>
-            <a:off x="8724900" y="365125"/>
-            <a:ext cx="2628900" cy="5811838"/>
+            <a:off x="3175" y="6400800"/>
+            <a:ext cx="12188825" cy="457200"/>
+          </a:xfrm>
+          <a:prstGeom prst="rect">
+            <a:avLst/>
+          </a:prstGeom>
+          <a:solidFill>
+            <a:schemeClr val="accent2"/>
+          </a:solidFill>
+          <a:ln>
+            <a:noFill/>
+          </a:ln>
+        </p:spPr>
+        <p:style>
+          <a:lnRef idx="2">
+            <a:schemeClr val="accent1">
+              <a:shade val="50000"/>
+            </a:schemeClr>
+          </a:lnRef>
+          <a:fillRef idx="1">
+            <a:schemeClr val="accent1"/>
+          </a:fillRef>
+          <a:effectRef idx="0">
+            <a:schemeClr val="accent1"/>
+          </a:effectRef>
+          <a:fontRef idx="minor">
+            <a:schemeClr val="lt1"/>
+          </a:fontRef>
+        </p:style>
+      </p:sp>
+      <p:sp>
+        <p:nvSpPr>
+          <p:cNvPr id="8" name="Rectangle 7"/>
+          <p:cNvSpPr/>
+          <p:nvPr/>
+        </p:nvSpPr>
+        <p:spPr>
+          <a:xfrm>
+            <a:off x="15" y="6334316"/>
+            <a:ext cx="12188825" cy="64008"/>
+          </a:xfrm>
+          <a:prstGeom prst="rect">
+            <a:avLst/>
+          </a:prstGeom>
+          <a:solidFill>
+            <a:schemeClr val="accent1"/>
+          </a:solidFill>
+          <a:ln>
+            <a:noFill/>
+          </a:ln>
+        </p:spPr>
+        <p:style>
+          <a:lnRef idx="2">
+            <a:schemeClr val="accent1">
+              <a:shade val="50000"/>
+            </a:schemeClr>
+          </a:lnRef>
+          <a:fillRef idx="1">
+            <a:schemeClr val="accent1"/>
+          </a:fillRef>
+          <a:effectRef idx="0">
+            <a:schemeClr val="accent1"/>
+          </a:effectRef>
+          <a:fontRef idx="minor">
+            <a:schemeClr val="lt1"/>
+          </a:fontRef>
+        </p:style>
+      </p:sp>
+      <p:sp>
+        <p:nvSpPr>
+          <p:cNvPr id="2" name="Vertical Title 1"/>
+          <p:cNvSpPr>
+            <a:spLocks noGrp="1"/>
+          </p:cNvSpPr>
+          <p:nvPr>
+            <p:ph type="title" orient="vert"/>
+          </p:nvPr>
+        </p:nvSpPr>
+        <p:spPr>
+          <a:xfrm>
+            <a:off x="8724900" y="414778"/>
+            <a:ext cx="2628900" cy="5757421"/>
           </a:xfrm>
         </p:spPr>
         <p:txBody>
@@ -577,18 +1733,13 @@
               <a:rPr lang="en-US"/>
               <a:t>Click to edit Master title style</a:t>
             </a:r>
-          </a:p>
-        </p:txBody>
-      </p:sp>
-      <p:sp>
-        <p:nvSpPr>
-          <p:cNvPr id="3" name="Vertical Text Placeholder 2">
-            <a:extLst>
-              <a:ext uri="{FF2B5EF4-FFF2-40B4-BE49-F238E27FC236}">
-                <a16:creationId xmlns:a16="http://schemas.microsoft.com/office/drawing/2014/main" id="{E93F22D0-B373-ED4A-58DA-9EAADE6A097A}"/>
-              </a:ext>
-            </a:extLst>
-          </p:cNvPr>
+            <a:endParaRPr lang="en-US" dirty="0"/>
+          </a:p>
+        </p:txBody>
+      </p:sp>
+      <p:sp>
+        <p:nvSpPr>
+          <p:cNvPr id="3" name="Vertical Text Placeholder 2"/>
           <p:cNvSpPr>
             <a:spLocks noGrp="1"/>
           </p:cNvSpPr>
@@ -598,12 +1749,12 @@
         </p:nvSpPr>
         <p:spPr>
           <a:xfrm>
-            <a:off x="838200" y="365125"/>
-            <a:ext cx="7734300" cy="5811838"/>
+            <a:off x="838200" y="414778"/>
+            <a:ext cx="7734300" cy="5757422"/>
           </a:xfrm>
         </p:spPr>
         <p:txBody>
-          <a:bodyPr vert="eaVert"/>
+          <a:bodyPr vert="eaVert" lIns="45720" tIns="0" rIns="45720" bIns="0"/>
           <a:lstStyle/>
           <a:p>
             <a:pPr lvl="0"/>
@@ -639,18 +1790,13 @@
               <a:rPr lang="en-US"/>
               <a:t>Fifth level</a:t>
             </a:r>
-          </a:p>
-        </p:txBody>
-      </p:sp>
-      <p:sp>
-        <p:nvSpPr>
-          <p:cNvPr id="4" name="Date Placeholder 3">
-            <a:extLst>
-              <a:ext uri="{FF2B5EF4-FFF2-40B4-BE49-F238E27FC236}">
-                <a16:creationId xmlns:a16="http://schemas.microsoft.com/office/drawing/2014/main" id="{61843A28-6FE7-DF9C-C1B6-92B215BCAC4E}"/>
-              </a:ext>
-            </a:extLst>
-          </p:cNvPr>
+            <a:endParaRPr lang="en-US" dirty="0"/>
+          </a:p>
+        </p:txBody>
+      </p:sp>
+      <p:sp>
+        <p:nvSpPr>
+          <p:cNvPr id="4" name="Date Placeholder 3"/>
           <p:cNvSpPr>
             <a:spLocks noGrp="1"/>
           </p:cNvSpPr>
@@ -665,7 +1811,7 @@
           <a:p>
             <a:fld id="{591881DA-1B4A-4782-A1DD-0FD4E92C2783}" type="datetimeFigureOut">
               <a:rPr lang="en-US" smtClean="0"/>
-              <a:t>4/15/2026</a:t>
+              <a:t>4/16/2026</a:t>
             </a:fld>
             <a:endParaRPr lang="en-US"/>
           </a:p>
@@ -673,13 +1819,7 @@
       </p:sp>
       <p:sp>
         <p:nvSpPr>
-          <p:cNvPr id="5" name="Footer Placeholder 4">
-            <a:extLst>
-              <a:ext uri="{FF2B5EF4-FFF2-40B4-BE49-F238E27FC236}">
-                <a16:creationId xmlns:a16="http://schemas.microsoft.com/office/drawing/2014/main" id="{2ABAE18F-B1C6-2BB8-60CE-7C4E8346D7E3}"/>
-              </a:ext>
-            </a:extLst>
-          </p:cNvPr>
+          <p:cNvPr id="5" name="Footer Placeholder 4"/>
           <p:cNvSpPr>
             <a:spLocks noGrp="1"/>
           </p:cNvSpPr>
@@ -698,13 +1838,7 @@
       </p:sp>
       <p:sp>
         <p:nvSpPr>
-          <p:cNvPr id="6" name="Slide Number Placeholder 5">
-            <a:extLst>
-              <a:ext uri="{FF2B5EF4-FFF2-40B4-BE49-F238E27FC236}">
-                <a16:creationId xmlns:a16="http://schemas.microsoft.com/office/drawing/2014/main" id="{84AF779F-E91D-1444-F0C1-E9723C5924F1}"/>
-              </a:ext>
-            </a:extLst>
-          </p:cNvPr>
+          <p:cNvPr id="6" name="Slide Number Placeholder 5"/>
           <p:cNvSpPr>
             <a:spLocks noGrp="1"/>
           </p:cNvSpPr>
@@ -728,7 +1862,7 @@
     </p:spTree>
     <p:extLst>
       <p:ext uri="{BB962C8B-B14F-4D97-AF65-F5344CB8AC3E}">
-        <p14:creationId xmlns:p14="http://schemas.microsoft.com/office/powerpoint/2010/main" val="2827797401"/>
+        <p14:creationId xmlns:p14="http://schemas.microsoft.com/office/powerpoint/2010/main" val="3377601121"/>
       </p:ext>
     </p:extLst>
   </p:cSld>
@@ -757,13 +1891,7 @@
       </p:grpSpPr>
       <p:sp>
         <p:nvSpPr>
-          <p:cNvPr id="2" name="Title 1">
-            <a:extLst>
-              <a:ext uri="{FF2B5EF4-FFF2-40B4-BE49-F238E27FC236}">
-                <a16:creationId xmlns:a16="http://schemas.microsoft.com/office/drawing/2014/main" id="{E2CFB9AB-F3F4-440F-0D9C-DFA0AF25D17B}"/>
-              </a:ext>
-            </a:extLst>
-          </p:cNvPr>
+          <p:cNvPr id="2" name="Title 1"/>
           <p:cNvSpPr>
             <a:spLocks noGrp="1"/>
           </p:cNvSpPr>
@@ -774,24 +1902,23 @@
         <p:spPr/>
         <p:txBody>
           <a:bodyPr/>
-          <a:lstStyle/>
+          <a:lstStyle>
+            <a:lvl1pPr marL="0">
+              <a:defRPr/>
+            </a:lvl1pPr>
+          </a:lstStyle>
           <a:p>
             <a:r>
               <a:rPr lang="en-US"/>
               <a:t>Click to edit Master title style</a:t>
             </a:r>
-          </a:p>
-        </p:txBody>
-      </p:sp>
-      <p:sp>
-        <p:nvSpPr>
-          <p:cNvPr id="3" name="Content Placeholder 2">
-            <a:extLst>
-              <a:ext uri="{FF2B5EF4-FFF2-40B4-BE49-F238E27FC236}">
-                <a16:creationId xmlns:a16="http://schemas.microsoft.com/office/drawing/2014/main" id="{6DD37A56-938E-755C-A322-FD95DCD2DEA1}"/>
-              </a:ext>
-            </a:extLst>
-          </p:cNvPr>
+            <a:endParaRPr lang="en-US" dirty="0"/>
+          </a:p>
+        </p:txBody>
+      </p:sp>
+      <p:sp>
+        <p:nvSpPr>
+          <p:cNvPr id="3" name="Content Placeholder 2"/>
           <p:cNvSpPr>
             <a:spLocks noGrp="1"/>
           </p:cNvSpPr>
@@ -837,18 +1964,13 @@
               <a:rPr lang="en-US"/>
               <a:t>Fifth level</a:t>
             </a:r>
-          </a:p>
-        </p:txBody>
-      </p:sp>
-      <p:sp>
-        <p:nvSpPr>
-          <p:cNvPr id="4" name="Date Placeholder 3">
-            <a:extLst>
-              <a:ext uri="{FF2B5EF4-FFF2-40B4-BE49-F238E27FC236}">
-                <a16:creationId xmlns:a16="http://schemas.microsoft.com/office/drawing/2014/main" id="{EE8660B7-BC0D-D396-D97C-05C685B50C42}"/>
-              </a:ext>
-            </a:extLst>
-          </p:cNvPr>
+            <a:endParaRPr lang="en-US" dirty="0"/>
+          </a:p>
+        </p:txBody>
+      </p:sp>
+      <p:sp>
+        <p:nvSpPr>
+          <p:cNvPr id="4" name="Date Placeholder 3"/>
           <p:cNvSpPr>
             <a:spLocks noGrp="1"/>
           </p:cNvSpPr>
@@ -863,7 +1985,7 @@
           <a:p>
             <a:fld id="{591881DA-1B4A-4782-A1DD-0FD4E92C2783}" type="datetimeFigureOut">
               <a:rPr lang="en-US" smtClean="0"/>
-              <a:t>4/15/2026</a:t>
+              <a:t>4/16/2026</a:t>
             </a:fld>
             <a:endParaRPr lang="en-US"/>
           </a:p>
@@ -871,13 +1993,7 @@
       </p:sp>
       <p:sp>
         <p:nvSpPr>
-          <p:cNvPr id="5" name="Footer Placeholder 4">
-            <a:extLst>
-              <a:ext uri="{FF2B5EF4-FFF2-40B4-BE49-F238E27FC236}">
-                <a16:creationId xmlns:a16="http://schemas.microsoft.com/office/drawing/2014/main" id="{DB13350E-8035-7C69-088B-12F88C2EFAD9}"/>
-              </a:ext>
-            </a:extLst>
-          </p:cNvPr>
+          <p:cNvPr id="5" name="Footer Placeholder 4"/>
           <p:cNvSpPr>
             <a:spLocks noGrp="1"/>
           </p:cNvSpPr>
@@ -896,13 +2012,7 @@
       </p:sp>
       <p:sp>
         <p:nvSpPr>
-          <p:cNvPr id="6" name="Slide Number Placeholder 5">
-            <a:extLst>
-              <a:ext uri="{FF2B5EF4-FFF2-40B4-BE49-F238E27FC236}">
-                <a16:creationId xmlns:a16="http://schemas.microsoft.com/office/drawing/2014/main" id="{378734B0-90E1-E5A6-6F2E-EE39995D3011}"/>
-              </a:ext>
-            </a:extLst>
-          </p:cNvPr>
+          <p:cNvPr id="6" name="Slide Number Placeholder 5"/>
           <p:cNvSpPr>
             <a:spLocks noGrp="1"/>
           </p:cNvSpPr>
@@ -926,7 +2036,7 @@
     </p:spTree>
     <p:extLst>
       <p:ext uri="{BB962C8B-B14F-4D97-AF65-F5344CB8AC3E}">
-        <p14:creationId xmlns:p14="http://schemas.microsoft.com/office/powerpoint/2010/main" val="3824754064"/>
+        <p14:creationId xmlns:p14="http://schemas.microsoft.com/office/powerpoint/2010/main" val="407599946"/>
       </p:ext>
     </p:extLst>
   </p:cSld>
@@ -937,8 +2047,16 @@
 </file>
 
 <file path=ppt/slideLayouts/slideLayout3.xml><?xml version="1.0" encoding="utf-8"?>
-<p:sldLayout xmlns:a="http://schemas.openxmlformats.org/drawingml/2006/main" xmlns:r="http://schemas.openxmlformats.org/officeDocument/2006/relationships" xmlns:p="http://schemas.openxmlformats.org/presentationml/2006/main" type="secHead" preserve="1">
+<p:sldLayout xmlns:a="http://schemas.openxmlformats.org/drawingml/2006/main" xmlns:r="http://schemas.openxmlformats.org/officeDocument/2006/relationships" xmlns:p="http://schemas.openxmlformats.org/presentationml/2006/main" showMasterSp="0" type="secHead" preserve="1">
   <p:cSld name="Section Header">
+    <p:bg>
+      <p:bgPr>
+        <a:solidFill>
+          <a:schemeClr val="bg1"/>
+        </a:solidFill>
+        <a:effectLst/>
+      </p:bgPr>
+    </p:bg>
     <p:spTree>
       <p:nvGrpSpPr>
         <p:cNvPr id="1" name=""/>
@@ -955,152 +2073,230 @@
       </p:grpSpPr>
       <p:sp>
         <p:nvSpPr>
-          <p:cNvPr id="2" name="Title 1">
-            <a:extLst>
-              <a:ext uri="{FF2B5EF4-FFF2-40B4-BE49-F238E27FC236}">
-                <a16:creationId xmlns:a16="http://schemas.microsoft.com/office/drawing/2014/main" id="{5F2F6A68-CFC2-EE05-F0C7-4500BFC95612}"/>
-              </a:ext>
-            </a:extLst>
-          </p:cNvPr>
-          <p:cNvSpPr>
-            <a:spLocks noGrp="1"/>
-          </p:cNvSpPr>
-          <p:nvPr>
-            <p:ph type="title"/>
-          </p:nvPr>
+          <p:cNvPr id="7" name="Rectangle 6"/>
+          <p:cNvSpPr/>
+          <p:nvPr/>
         </p:nvSpPr>
         <p:spPr>
           <a:xfrm>
-            <a:off x="831850" y="1709738"/>
-            <a:ext cx="10515600" cy="2852737"/>
+            <a:off x="3175" y="6400800"/>
+            <a:ext cx="12188825" cy="457200"/>
+          </a:xfrm>
+          <a:prstGeom prst="rect">
+            <a:avLst/>
+          </a:prstGeom>
+          <a:solidFill>
+            <a:schemeClr val="accent2"/>
+          </a:solidFill>
+          <a:ln>
+            <a:noFill/>
+          </a:ln>
+        </p:spPr>
+        <p:style>
+          <a:lnRef idx="2">
+            <a:schemeClr val="accent1">
+              <a:shade val="50000"/>
+            </a:schemeClr>
+          </a:lnRef>
+          <a:fillRef idx="1">
+            <a:schemeClr val="accent1"/>
+          </a:fillRef>
+          <a:effectRef idx="0">
+            <a:schemeClr val="accent1"/>
+          </a:effectRef>
+          <a:fontRef idx="minor">
+            <a:schemeClr val="lt1"/>
+          </a:fontRef>
+        </p:style>
+      </p:sp>
+      <p:sp>
+        <p:nvSpPr>
+          <p:cNvPr id="8" name="Rectangle 7"/>
+          <p:cNvSpPr/>
+          <p:nvPr/>
+        </p:nvSpPr>
+        <p:spPr>
+          <a:xfrm>
+            <a:off x="15" y="6334316"/>
+            <a:ext cx="12188825" cy="64008"/>
+          </a:xfrm>
+          <a:prstGeom prst="rect">
+            <a:avLst/>
+          </a:prstGeom>
+          <a:solidFill>
+            <a:schemeClr val="accent1"/>
+          </a:solidFill>
+          <a:ln>
+            <a:noFill/>
+          </a:ln>
+        </p:spPr>
+        <p:style>
+          <a:lnRef idx="2">
+            <a:schemeClr val="accent1">
+              <a:shade val="50000"/>
+            </a:schemeClr>
+          </a:lnRef>
+          <a:fillRef idx="1">
+            <a:schemeClr val="accent1"/>
+          </a:fillRef>
+          <a:effectRef idx="0">
+            <a:schemeClr val="accent1"/>
+          </a:effectRef>
+          <a:fontRef idx="minor">
+            <a:schemeClr val="lt1"/>
+          </a:fontRef>
+        </p:style>
+      </p:sp>
+      <p:sp>
+        <p:nvSpPr>
+          <p:cNvPr id="2" name="Title 1"/>
+          <p:cNvSpPr>
+            <a:spLocks noGrp="1"/>
+          </p:cNvSpPr>
+          <p:nvPr>
+            <p:ph type="title"/>
+          </p:nvPr>
+        </p:nvSpPr>
+        <p:spPr>
+          <a:xfrm>
+            <a:off x="1097280" y="758952"/>
+            <a:ext cx="10058400" cy="3566160"/>
           </a:xfrm>
         </p:spPr>
         <p:txBody>
-          <a:bodyPr anchor="b"/>
+          <a:bodyPr anchor="b" anchorCtr="0">
+            <a:normAutofit/>
+          </a:bodyPr>
           <a:lstStyle>
             <a:lvl1pPr>
-              <a:defRPr sz="6000"/>
-            </a:lvl1pPr>
-          </a:lstStyle>
-          <a:p>
-            <a:r>
-              <a:rPr lang="en-US"/>
-              <a:t>Click to edit Master title style</a:t>
-            </a:r>
-          </a:p>
-        </p:txBody>
-      </p:sp>
-      <p:sp>
-        <p:nvSpPr>
-          <p:cNvPr id="3" name="Text Placeholder 2">
-            <a:extLst>
-              <a:ext uri="{FF2B5EF4-FFF2-40B4-BE49-F238E27FC236}">
-                <a16:creationId xmlns:a16="http://schemas.microsoft.com/office/drawing/2014/main" id="{F2840FDE-4C13-FD1D-FA11-94C447FA7331}"/>
-              </a:ext>
-            </a:extLst>
-          </p:cNvPr>
-          <p:cNvSpPr>
-            <a:spLocks noGrp="1"/>
-          </p:cNvSpPr>
-          <p:nvPr>
-            <p:ph type="body" idx="1"/>
-          </p:nvPr>
-        </p:nvSpPr>
-        <p:spPr>
-          <a:xfrm>
-            <a:off x="831850" y="4589463"/>
-            <a:ext cx="10515600" cy="1500187"/>
-          </a:xfrm>
-        </p:spPr>
-        <p:txBody>
-          <a:bodyPr/>
-          <a:lstStyle>
-            <a:lvl1pPr marL="0" indent="0">
-              <a:buNone/>
-              <a:defRPr sz="2400">
+              <a:lnSpc>
+                <a:spcPct val="85000"/>
+              </a:lnSpc>
+              <a:defRPr sz="8000" b="0">
                 <a:solidFill>
                   <a:schemeClr val="tx1">
-                    <a:tint val="82000"/>
+                    <a:lumMod val="85000"/>
+                    <a:lumOff val="15000"/>
                   </a:schemeClr>
                 </a:solidFill>
               </a:defRPr>
             </a:lvl1pPr>
+          </a:lstStyle>
+          <a:p>
+            <a:r>
+              <a:rPr lang="en-US"/>
+              <a:t>Click to edit Master title style</a:t>
+            </a:r>
+            <a:endParaRPr lang="en-US" dirty="0"/>
+          </a:p>
+        </p:txBody>
+      </p:sp>
+      <p:sp>
+        <p:nvSpPr>
+          <p:cNvPr id="3" name="Text Placeholder 2"/>
+          <p:cNvSpPr>
+            <a:spLocks noGrp="1"/>
+          </p:cNvSpPr>
+          <p:nvPr>
+            <p:ph type="body" idx="1"/>
+          </p:nvPr>
+        </p:nvSpPr>
+        <p:spPr>
+          <a:xfrm>
+            <a:off x="1097280" y="4453128"/>
+            <a:ext cx="10058400" cy="1143000"/>
+          </a:xfrm>
+        </p:spPr>
+        <p:txBody>
+          <a:bodyPr lIns="91440" rIns="91440" anchor="t" anchorCtr="0">
+            <a:normAutofit/>
+          </a:bodyPr>
+          <a:lstStyle>
+            <a:lvl1pPr marL="0" indent="0">
+              <a:buNone/>
+              <a:defRPr sz="2400" cap="all" spc="200" baseline="0">
+                <a:solidFill>
+                  <a:schemeClr val="tx2"/>
+                </a:solidFill>
+                <a:latin typeface="+mj-lt"/>
+              </a:defRPr>
+            </a:lvl1pPr>
             <a:lvl2pPr marL="457200" indent="0">
               <a:buNone/>
-              <a:defRPr sz="2000">
+              <a:defRPr sz="1800">
                 <a:solidFill>
                   <a:schemeClr val="tx1">
-                    <a:tint val="82000"/>
+                    <a:tint val="75000"/>
                   </a:schemeClr>
                 </a:solidFill>
               </a:defRPr>
             </a:lvl2pPr>
             <a:lvl3pPr marL="914400" indent="0">
               <a:buNone/>
-              <a:defRPr sz="1800">
+              <a:defRPr sz="1600">
                 <a:solidFill>
                   <a:schemeClr val="tx1">
-                    <a:tint val="82000"/>
+                    <a:tint val="75000"/>
                   </a:schemeClr>
                 </a:solidFill>
               </a:defRPr>
             </a:lvl3pPr>
             <a:lvl4pPr marL="1371600" indent="0">
               <a:buNone/>
-              <a:defRPr sz="1600">
+              <a:defRPr sz="1400">
                 <a:solidFill>
                   <a:schemeClr val="tx1">
-                    <a:tint val="82000"/>
+                    <a:tint val="75000"/>
                   </a:schemeClr>
                 </a:solidFill>
               </a:defRPr>
             </a:lvl4pPr>
             <a:lvl5pPr marL="1828800" indent="0">
               <a:buNone/>
-              <a:defRPr sz="1600">
+              <a:defRPr sz="1400">
                 <a:solidFill>
                   <a:schemeClr val="tx1">
-                    <a:tint val="82000"/>
+                    <a:tint val="75000"/>
                   </a:schemeClr>
                 </a:solidFill>
               </a:defRPr>
             </a:lvl5pPr>
             <a:lvl6pPr marL="2286000" indent="0">
               <a:buNone/>
-              <a:defRPr sz="1600">
+              <a:defRPr sz="1400">
                 <a:solidFill>
                   <a:schemeClr val="tx1">
-                    <a:tint val="82000"/>
+                    <a:tint val="75000"/>
                   </a:schemeClr>
                 </a:solidFill>
               </a:defRPr>
             </a:lvl6pPr>
             <a:lvl7pPr marL="2743200" indent="0">
               <a:buNone/>
-              <a:defRPr sz="1600">
+              <a:defRPr sz="1400">
                 <a:solidFill>
                   <a:schemeClr val="tx1">
-                    <a:tint val="82000"/>
+                    <a:tint val="75000"/>
                   </a:schemeClr>
                 </a:solidFill>
               </a:defRPr>
             </a:lvl7pPr>
             <a:lvl8pPr marL="3200400" indent="0">
               <a:buNone/>
-              <a:defRPr sz="1600">
+              <a:defRPr sz="1400">
                 <a:solidFill>
                   <a:schemeClr val="tx1">
-                    <a:tint val="82000"/>
+                    <a:tint val="75000"/>
                   </a:schemeClr>
                 </a:solidFill>
               </a:defRPr>
             </a:lvl8pPr>
             <a:lvl9pPr marL="3657600" indent="0">
               <a:buNone/>
-              <a:defRPr sz="1600">
+              <a:defRPr sz="1400">
                 <a:solidFill>
                   <a:schemeClr val="tx1">
-                    <a:tint val="82000"/>
+                    <a:tint val="75000"/>
                   </a:schemeClr>
                 </a:solidFill>
               </a:defRPr>
@@ -1117,13 +2313,7 @@
       </p:sp>
       <p:sp>
         <p:nvSpPr>
-          <p:cNvPr id="4" name="Date Placeholder 3">
-            <a:extLst>
-              <a:ext uri="{FF2B5EF4-FFF2-40B4-BE49-F238E27FC236}">
-                <a16:creationId xmlns:a16="http://schemas.microsoft.com/office/drawing/2014/main" id="{E17F032C-CA9B-193F-442C-971D47058EFC}"/>
-              </a:ext>
-            </a:extLst>
-          </p:cNvPr>
+          <p:cNvPr id="4" name="Date Placeholder 3"/>
           <p:cNvSpPr>
             <a:spLocks noGrp="1"/>
           </p:cNvSpPr>
@@ -1138,7 +2328,7 @@
           <a:p>
             <a:fld id="{591881DA-1B4A-4782-A1DD-0FD4E92C2783}" type="datetimeFigureOut">
               <a:rPr lang="en-US" smtClean="0"/>
-              <a:t>4/15/2026</a:t>
+              <a:t>4/16/2026</a:t>
             </a:fld>
             <a:endParaRPr lang="en-US"/>
           </a:p>
@@ -1146,13 +2336,7 @@
       </p:sp>
       <p:sp>
         <p:nvSpPr>
-          <p:cNvPr id="5" name="Footer Placeholder 4">
-            <a:extLst>
-              <a:ext uri="{FF2B5EF4-FFF2-40B4-BE49-F238E27FC236}">
-                <a16:creationId xmlns:a16="http://schemas.microsoft.com/office/drawing/2014/main" id="{BE5AE02B-F1F8-1956-5948-4A45EF28EEB5}"/>
-              </a:ext>
-            </a:extLst>
-          </p:cNvPr>
+          <p:cNvPr id="5" name="Footer Placeholder 4"/>
           <p:cNvSpPr>
             <a:spLocks noGrp="1"/>
           </p:cNvSpPr>
@@ -1171,13 +2355,7 @@
       </p:sp>
       <p:sp>
         <p:nvSpPr>
-          <p:cNvPr id="6" name="Slide Number Placeholder 5">
-            <a:extLst>
-              <a:ext uri="{FF2B5EF4-FFF2-40B4-BE49-F238E27FC236}">
-                <a16:creationId xmlns:a16="http://schemas.microsoft.com/office/drawing/2014/main" id="{DFDA773C-0477-4BDD-ED8A-F5AE687175E7}"/>
-              </a:ext>
-            </a:extLst>
-          </p:cNvPr>
+          <p:cNvPr id="6" name="Slide Number Placeholder 5"/>
           <p:cNvSpPr>
             <a:spLocks noGrp="1"/>
           </p:cNvSpPr>
@@ -1198,10 +2376,48 @@
           </a:p>
         </p:txBody>
       </p:sp>
+      <p:cxnSp>
+        <p:nvCxnSpPr>
+          <p:cNvPr id="9" name="Straight Connector 8"/>
+          <p:cNvCxnSpPr/>
+          <p:nvPr/>
+        </p:nvCxnSpPr>
+        <p:spPr>
+          <a:xfrm>
+            <a:off x="1207658" y="4343400"/>
+            <a:ext cx="9875520" cy="0"/>
+          </a:xfrm>
+          <a:prstGeom prst="line">
+            <a:avLst/>
+          </a:prstGeom>
+          <a:ln w="6350">
+            <a:solidFill>
+              <a:schemeClr val="tx1">
+                <a:lumMod val="50000"/>
+                <a:lumOff val="50000"/>
+              </a:schemeClr>
+            </a:solidFill>
+          </a:ln>
+        </p:spPr>
+        <p:style>
+          <a:lnRef idx="1">
+            <a:schemeClr val="accent1"/>
+          </a:lnRef>
+          <a:fillRef idx="0">
+            <a:schemeClr val="accent1"/>
+          </a:fillRef>
+          <a:effectRef idx="0">
+            <a:schemeClr val="accent1"/>
+          </a:effectRef>
+          <a:fontRef idx="minor">
+            <a:schemeClr val="tx1"/>
+          </a:fontRef>
+        </p:style>
+      </p:cxnSp>
     </p:spTree>
     <p:extLst>
       <p:ext uri="{BB962C8B-B14F-4D97-AF65-F5344CB8AC3E}">
-        <p14:creationId xmlns:p14="http://schemas.microsoft.com/office/powerpoint/2010/main" val="3385168365"/>
+        <p14:creationId xmlns:p14="http://schemas.microsoft.com/office/powerpoint/2010/main" val="3285761050"/>
       </p:ext>
     </p:extLst>
   </p:cSld>
@@ -1230,13 +2446,7 @@
       </p:grpSpPr>
       <p:sp>
         <p:nvSpPr>
-          <p:cNvPr id="2" name="Title 1">
-            <a:extLst>
-              <a:ext uri="{FF2B5EF4-FFF2-40B4-BE49-F238E27FC236}">
-                <a16:creationId xmlns:a16="http://schemas.microsoft.com/office/drawing/2014/main" id="{DD93494B-1472-6471-05F4-FE64AAAEA967}"/>
-              </a:ext>
-            </a:extLst>
-          </p:cNvPr>
+          <p:cNvPr id="8" name="Title 7"/>
           <p:cNvSpPr>
             <a:spLocks noGrp="1"/>
           </p:cNvSpPr>
@@ -1244,7 +2454,12 @@
             <p:ph type="title"/>
           </p:nvPr>
         </p:nvSpPr>
-        <p:spPr/>
+        <p:spPr>
+          <a:xfrm>
+            <a:off x="1097280" y="286603"/>
+            <a:ext cx="10058400" cy="1450757"/>
+          </a:xfrm>
+        </p:spPr>
         <p:txBody>
           <a:bodyPr/>
           <a:lstStyle/>
@@ -1253,18 +2468,13 @@
               <a:rPr lang="en-US"/>
               <a:t>Click to edit Master title style</a:t>
             </a:r>
-          </a:p>
-        </p:txBody>
-      </p:sp>
-      <p:sp>
-        <p:nvSpPr>
-          <p:cNvPr id="3" name="Content Placeholder 2">
-            <a:extLst>
-              <a:ext uri="{FF2B5EF4-FFF2-40B4-BE49-F238E27FC236}">
-                <a16:creationId xmlns:a16="http://schemas.microsoft.com/office/drawing/2014/main" id="{5C8A566E-B10D-0817-4943-93E0613C03F6}"/>
-              </a:ext>
-            </a:extLst>
-          </p:cNvPr>
+            <a:endParaRPr lang="en-US" dirty="0"/>
+          </a:p>
+        </p:txBody>
+      </p:sp>
+      <p:sp>
+        <p:nvSpPr>
+          <p:cNvPr id="3" name="Content Placeholder 2"/>
           <p:cNvSpPr>
             <a:spLocks noGrp="1"/>
           </p:cNvSpPr>
@@ -1274,8 +2484,8 @@
         </p:nvSpPr>
         <p:spPr>
           <a:xfrm>
-            <a:off x="838200" y="1825625"/>
-            <a:ext cx="5181600" cy="4351338"/>
+            <a:off x="1097279" y="1845734"/>
+            <a:ext cx="4937760" cy="4023360"/>
           </a:xfrm>
         </p:spPr>
         <p:txBody>
@@ -1315,18 +2525,13 @@
               <a:rPr lang="en-US"/>
               <a:t>Fifth level</a:t>
             </a:r>
-          </a:p>
-        </p:txBody>
-      </p:sp>
-      <p:sp>
-        <p:nvSpPr>
-          <p:cNvPr id="4" name="Content Placeholder 3">
-            <a:extLst>
-              <a:ext uri="{FF2B5EF4-FFF2-40B4-BE49-F238E27FC236}">
-                <a16:creationId xmlns:a16="http://schemas.microsoft.com/office/drawing/2014/main" id="{3EB5F9F3-D5BD-8CF1-F51F-57378931875B}"/>
-              </a:ext>
-            </a:extLst>
-          </p:cNvPr>
+            <a:endParaRPr lang="en-US" dirty="0"/>
+          </a:p>
+        </p:txBody>
+      </p:sp>
+      <p:sp>
+        <p:nvSpPr>
+          <p:cNvPr id="4" name="Content Placeholder 3"/>
           <p:cNvSpPr>
             <a:spLocks noGrp="1"/>
           </p:cNvSpPr>
@@ -1336,8 +2541,8 @@
         </p:nvSpPr>
         <p:spPr>
           <a:xfrm>
-            <a:off x="6172200" y="1825625"/>
-            <a:ext cx="5181600" cy="4351338"/>
+            <a:off x="6217920" y="1845735"/>
+            <a:ext cx="4937760" cy="4023360"/>
           </a:xfrm>
         </p:spPr>
         <p:txBody>
@@ -1377,18 +2582,13 @@
               <a:rPr lang="en-US"/>
               <a:t>Fifth level</a:t>
             </a:r>
-          </a:p>
-        </p:txBody>
-      </p:sp>
-      <p:sp>
-        <p:nvSpPr>
-          <p:cNvPr id="5" name="Date Placeholder 4">
-            <a:extLst>
-              <a:ext uri="{FF2B5EF4-FFF2-40B4-BE49-F238E27FC236}">
-                <a16:creationId xmlns:a16="http://schemas.microsoft.com/office/drawing/2014/main" id="{1A84DB3F-24F1-E1F6-559C-230CAED6D346}"/>
-              </a:ext>
-            </a:extLst>
-          </p:cNvPr>
+            <a:endParaRPr lang="en-US" dirty="0"/>
+          </a:p>
+        </p:txBody>
+      </p:sp>
+      <p:sp>
+        <p:nvSpPr>
+          <p:cNvPr id="5" name="Date Placeholder 4"/>
           <p:cNvSpPr>
             <a:spLocks noGrp="1"/>
           </p:cNvSpPr>
@@ -1403,7 +2603,7 @@
           <a:p>
             <a:fld id="{591881DA-1B4A-4782-A1DD-0FD4E92C2783}" type="datetimeFigureOut">
               <a:rPr lang="en-US" smtClean="0"/>
-              <a:t>4/15/2026</a:t>
+              <a:t>4/16/2026</a:t>
             </a:fld>
             <a:endParaRPr lang="en-US"/>
           </a:p>
@@ -1411,13 +2611,7 @@
       </p:sp>
       <p:sp>
         <p:nvSpPr>
-          <p:cNvPr id="6" name="Footer Placeholder 5">
-            <a:extLst>
-              <a:ext uri="{FF2B5EF4-FFF2-40B4-BE49-F238E27FC236}">
-                <a16:creationId xmlns:a16="http://schemas.microsoft.com/office/drawing/2014/main" id="{A7663153-1303-1D83-5496-322AD13B8226}"/>
-              </a:ext>
-            </a:extLst>
-          </p:cNvPr>
+          <p:cNvPr id="6" name="Footer Placeholder 5"/>
           <p:cNvSpPr>
             <a:spLocks noGrp="1"/>
           </p:cNvSpPr>
@@ -1436,13 +2630,7 @@
       </p:sp>
       <p:sp>
         <p:nvSpPr>
-          <p:cNvPr id="7" name="Slide Number Placeholder 6">
-            <a:extLst>
-              <a:ext uri="{FF2B5EF4-FFF2-40B4-BE49-F238E27FC236}">
-                <a16:creationId xmlns:a16="http://schemas.microsoft.com/office/drawing/2014/main" id="{A468D71C-412F-DA48-5FAD-950D67B095BC}"/>
-              </a:ext>
-            </a:extLst>
-          </p:cNvPr>
+          <p:cNvPr id="7" name="Slide Number Placeholder 6"/>
           <p:cNvSpPr>
             <a:spLocks noGrp="1"/>
           </p:cNvSpPr>
@@ -1466,7 +2654,7 @@
     </p:spTree>
     <p:extLst>
       <p:ext uri="{BB962C8B-B14F-4D97-AF65-F5344CB8AC3E}">
-        <p14:creationId xmlns:p14="http://schemas.microsoft.com/office/powerpoint/2010/main" val="1414647265"/>
+        <p14:creationId xmlns:p14="http://schemas.microsoft.com/office/powerpoint/2010/main" val="2766162687"/>
       </p:ext>
     </p:extLst>
   </p:cSld>
@@ -1495,13 +2683,7 @@
       </p:grpSpPr>
       <p:sp>
         <p:nvSpPr>
-          <p:cNvPr id="2" name="Title 1">
-            <a:extLst>
-              <a:ext uri="{FF2B5EF4-FFF2-40B4-BE49-F238E27FC236}">
-                <a16:creationId xmlns:a16="http://schemas.microsoft.com/office/drawing/2014/main" id="{31B07125-0424-2E45-987E-1FBFCAD85899}"/>
-              </a:ext>
-            </a:extLst>
-          </p:cNvPr>
+          <p:cNvPr id="10" name="Title 9"/>
           <p:cNvSpPr>
             <a:spLocks noGrp="1"/>
           </p:cNvSpPr>
@@ -1511,8 +2693,8 @@
         </p:nvSpPr>
         <p:spPr>
           <a:xfrm>
-            <a:off x="839788" y="365125"/>
-            <a:ext cx="10515600" cy="1325563"/>
+            <a:off x="1097280" y="286603"/>
+            <a:ext cx="10058400" cy="1450757"/>
           </a:xfrm>
         </p:spPr>
         <p:txBody>
@@ -1523,18 +2705,13 @@
               <a:rPr lang="en-US"/>
               <a:t>Click to edit Master title style</a:t>
             </a:r>
-          </a:p>
-        </p:txBody>
-      </p:sp>
-      <p:sp>
-        <p:nvSpPr>
-          <p:cNvPr id="3" name="Text Placeholder 2">
-            <a:extLst>
-              <a:ext uri="{FF2B5EF4-FFF2-40B4-BE49-F238E27FC236}">
-                <a16:creationId xmlns:a16="http://schemas.microsoft.com/office/drawing/2014/main" id="{DC383090-A6BC-0A96-49E7-B615519EDC87}"/>
-              </a:ext>
-            </a:extLst>
-          </p:cNvPr>
+            <a:endParaRPr lang="en-US" dirty="0"/>
+          </a:p>
+        </p:txBody>
+      </p:sp>
+      <p:sp>
+        <p:nvSpPr>
+          <p:cNvPr id="3" name="Text Placeholder 2"/>
           <p:cNvSpPr>
             <a:spLocks noGrp="1"/>
           </p:cNvSpPr>
@@ -1544,16 +2721,22 @@
         </p:nvSpPr>
         <p:spPr>
           <a:xfrm>
-            <a:off x="839788" y="1681163"/>
-            <a:ext cx="5157787" cy="823912"/>
+            <a:off x="1097280" y="1846052"/>
+            <a:ext cx="4937760" cy="736282"/>
           </a:xfrm>
         </p:spPr>
         <p:txBody>
-          <a:bodyPr anchor="b"/>
+          <a:bodyPr lIns="91440" rIns="91440" anchor="ctr">
+            <a:normAutofit/>
+          </a:bodyPr>
           <a:lstStyle>
             <a:lvl1pPr marL="0" indent="0">
               <a:buNone/>
-              <a:defRPr sz="2400" b="1"/>
+              <a:defRPr sz="2000" b="0" cap="all" baseline="0">
+                <a:solidFill>
+                  <a:schemeClr val="tx2"/>
+                </a:solidFill>
+              </a:defRPr>
             </a:lvl1pPr>
             <a:lvl2pPr marL="457200" indent="0">
               <a:buNone/>
@@ -1599,13 +2782,7 @@
       </p:sp>
       <p:sp>
         <p:nvSpPr>
-          <p:cNvPr id="4" name="Content Placeholder 3">
-            <a:extLst>
-              <a:ext uri="{FF2B5EF4-FFF2-40B4-BE49-F238E27FC236}">
-                <a16:creationId xmlns:a16="http://schemas.microsoft.com/office/drawing/2014/main" id="{5C14C024-2318-9578-5B17-10A4DA41D15C}"/>
-              </a:ext>
-            </a:extLst>
-          </p:cNvPr>
+          <p:cNvPr id="4" name="Content Placeholder 3"/>
           <p:cNvSpPr>
             <a:spLocks noGrp="1"/>
           </p:cNvSpPr>
@@ -1615,8 +2792,8 @@
         </p:nvSpPr>
         <p:spPr>
           <a:xfrm>
-            <a:off x="839788" y="2505075"/>
-            <a:ext cx="5157787" cy="3684588"/>
+            <a:off x="1097280" y="2582334"/>
+            <a:ext cx="4937760" cy="3378200"/>
           </a:xfrm>
         </p:spPr>
         <p:txBody>
@@ -1656,18 +2833,13 @@
               <a:rPr lang="en-US"/>
               <a:t>Fifth level</a:t>
             </a:r>
-          </a:p>
-        </p:txBody>
-      </p:sp>
-      <p:sp>
-        <p:nvSpPr>
-          <p:cNvPr id="5" name="Text Placeholder 4">
-            <a:extLst>
-              <a:ext uri="{FF2B5EF4-FFF2-40B4-BE49-F238E27FC236}">
-                <a16:creationId xmlns:a16="http://schemas.microsoft.com/office/drawing/2014/main" id="{5AB33104-EF4F-46CE-0132-88282D350165}"/>
-              </a:ext>
-            </a:extLst>
-          </p:cNvPr>
+            <a:endParaRPr lang="en-US" dirty="0"/>
+          </a:p>
+        </p:txBody>
+      </p:sp>
+      <p:sp>
+        <p:nvSpPr>
+          <p:cNvPr id="5" name="Text Placeholder 4"/>
           <p:cNvSpPr>
             <a:spLocks noGrp="1"/>
           </p:cNvSpPr>
@@ -1677,16 +2849,22 @@
         </p:nvSpPr>
         <p:spPr>
           <a:xfrm>
-            <a:off x="6172200" y="1681163"/>
-            <a:ext cx="5183188" cy="823912"/>
+            <a:off x="6217920" y="1846052"/>
+            <a:ext cx="4937760" cy="736282"/>
           </a:xfrm>
         </p:spPr>
         <p:txBody>
-          <a:bodyPr anchor="b"/>
+          <a:bodyPr lIns="91440" rIns="91440" anchor="ctr">
+            <a:normAutofit/>
+          </a:bodyPr>
           <a:lstStyle>
             <a:lvl1pPr marL="0" indent="0">
               <a:buNone/>
-              <a:defRPr sz="2400" b="1"/>
+              <a:defRPr sz="2000" b="0" cap="all" baseline="0">
+                <a:solidFill>
+                  <a:schemeClr val="tx2"/>
+                </a:solidFill>
+              </a:defRPr>
             </a:lvl1pPr>
             <a:lvl2pPr marL="457200" indent="0">
               <a:buNone/>
@@ -1732,13 +2910,7 @@
       </p:sp>
       <p:sp>
         <p:nvSpPr>
-          <p:cNvPr id="6" name="Content Placeholder 5">
-            <a:extLst>
-              <a:ext uri="{FF2B5EF4-FFF2-40B4-BE49-F238E27FC236}">
-                <a16:creationId xmlns:a16="http://schemas.microsoft.com/office/drawing/2014/main" id="{5EDB949E-8B6C-6D54-8017-FC0C01B26F95}"/>
-              </a:ext>
-            </a:extLst>
-          </p:cNvPr>
+          <p:cNvPr id="6" name="Content Placeholder 5"/>
           <p:cNvSpPr>
             <a:spLocks noGrp="1"/>
           </p:cNvSpPr>
@@ -1748,8 +2920,8 @@
         </p:nvSpPr>
         <p:spPr>
           <a:xfrm>
-            <a:off x="6172200" y="2505075"/>
-            <a:ext cx="5183188" cy="3684588"/>
+            <a:off x="6217920" y="2582334"/>
+            <a:ext cx="4937760" cy="3378200"/>
           </a:xfrm>
         </p:spPr>
         <p:txBody>
@@ -1789,18 +2961,13 @@
               <a:rPr lang="en-US"/>
               <a:t>Fifth level</a:t>
             </a:r>
-          </a:p>
-        </p:txBody>
-      </p:sp>
-      <p:sp>
-        <p:nvSpPr>
-          <p:cNvPr id="7" name="Date Placeholder 6">
-            <a:extLst>
-              <a:ext uri="{FF2B5EF4-FFF2-40B4-BE49-F238E27FC236}">
-                <a16:creationId xmlns:a16="http://schemas.microsoft.com/office/drawing/2014/main" id="{484B373A-37AB-3326-848C-70FD062CF679}"/>
-              </a:ext>
-            </a:extLst>
-          </p:cNvPr>
+            <a:endParaRPr lang="en-US" dirty="0"/>
+          </a:p>
+        </p:txBody>
+      </p:sp>
+      <p:sp>
+        <p:nvSpPr>
+          <p:cNvPr id="7" name="Date Placeholder 6"/>
           <p:cNvSpPr>
             <a:spLocks noGrp="1"/>
           </p:cNvSpPr>
@@ -1815,7 +2982,7 @@
           <a:p>
             <a:fld id="{591881DA-1B4A-4782-A1DD-0FD4E92C2783}" type="datetimeFigureOut">
               <a:rPr lang="en-US" smtClean="0"/>
-              <a:t>4/15/2026</a:t>
+              <a:t>4/16/2026</a:t>
             </a:fld>
             <a:endParaRPr lang="en-US"/>
           </a:p>
@@ -1823,13 +2990,7 @@
       </p:sp>
       <p:sp>
         <p:nvSpPr>
-          <p:cNvPr id="8" name="Footer Placeholder 7">
-            <a:extLst>
-              <a:ext uri="{FF2B5EF4-FFF2-40B4-BE49-F238E27FC236}">
-                <a16:creationId xmlns:a16="http://schemas.microsoft.com/office/drawing/2014/main" id="{37E0C780-E81E-0B2B-160B-1CE95EF28E04}"/>
-              </a:ext>
-            </a:extLst>
-          </p:cNvPr>
+          <p:cNvPr id="8" name="Footer Placeholder 7"/>
           <p:cNvSpPr>
             <a:spLocks noGrp="1"/>
           </p:cNvSpPr>
@@ -1848,13 +3009,7 @@
       </p:sp>
       <p:sp>
         <p:nvSpPr>
-          <p:cNvPr id="9" name="Slide Number Placeholder 8">
-            <a:extLst>
-              <a:ext uri="{FF2B5EF4-FFF2-40B4-BE49-F238E27FC236}">
-                <a16:creationId xmlns:a16="http://schemas.microsoft.com/office/drawing/2014/main" id="{6FDAE9BE-72DB-BAD5-DF6E-FDF1D190E342}"/>
-              </a:ext>
-            </a:extLst>
-          </p:cNvPr>
+          <p:cNvPr id="9" name="Slide Number Placeholder 8"/>
           <p:cNvSpPr>
             <a:spLocks noGrp="1"/>
           </p:cNvSpPr>
@@ -1878,7 +3033,7 @@
     </p:spTree>
     <p:extLst>
       <p:ext uri="{BB962C8B-B14F-4D97-AF65-F5344CB8AC3E}">
-        <p14:creationId xmlns:p14="http://schemas.microsoft.com/office/powerpoint/2010/main" val="620407865"/>
+        <p14:creationId xmlns:p14="http://schemas.microsoft.com/office/powerpoint/2010/main" val="2433956124"/>
       </p:ext>
     </p:extLst>
   </p:cSld>
@@ -1907,13 +3062,7 @@
       </p:grpSpPr>
       <p:sp>
         <p:nvSpPr>
-          <p:cNvPr id="2" name="Title 1">
-            <a:extLst>
-              <a:ext uri="{FF2B5EF4-FFF2-40B4-BE49-F238E27FC236}">
-                <a16:creationId xmlns:a16="http://schemas.microsoft.com/office/drawing/2014/main" id="{7974C4E6-FB7A-C65E-DEA7-432C6FF38E8E}"/>
-              </a:ext>
-            </a:extLst>
-          </p:cNvPr>
+          <p:cNvPr id="2" name="Title 1"/>
           <p:cNvSpPr>
             <a:spLocks noGrp="1"/>
           </p:cNvSpPr>
@@ -1930,18 +3079,13 @@
               <a:rPr lang="en-US"/>
               <a:t>Click to edit Master title style</a:t>
             </a:r>
-          </a:p>
-        </p:txBody>
-      </p:sp>
-      <p:sp>
-        <p:nvSpPr>
-          <p:cNvPr id="3" name="Date Placeholder 2">
-            <a:extLst>
-              <a:ext uri="{FF2B5EF4-FFF2-40B4-BE49-F238E27FC236}">
-                <a16:creationId xmlns:a16="http://schemas.microsoft.com/office/drawing/2014/main" id="{3E1CAD1B-AAB0-BD22-69C2-B170A1921527}"/>
-              </a:ext>
-            </a:extLst>
-          </p:cNvPr>
+            <a:endParaRPr lang="en-US" dirty="0"/>
+          </a:p>
+        </p:txBody>
+      </p:sp>
+      <p:sp>
+        <p:nvSpPr>
+          <p:cNvPr id="3" name="Date Placeholder 2"/>
           <p:cNvSpPr>
             <a:spLocks noGrp="1"/>
           </p:cNvSpPr>
@@ -1956,7 +3100,7 @@
           <a:p>
             <a:fld id="{591881DA-1B4A-4782-A1DD-0FD4E92C2783}" type="datetimeFigureOut">
               <a:rPr lang="en-US" smtClean="0"/>
-              <a:t>4/15/2026</a:t>
+              <a:t>4/16/2026</a:t>
             </a:fld>
             <a:endParaRPr lang="en-US"/>
           </a:p>
@@ -1964,13 +3108,7 @@
       </p:sp>
       <p:sp>
         <p:nvSpPr>
-          <p:cNvPr id="4" name="Footer Placeholder 3">
-            <a:extLst>
-              <a:ext uri="{FF2B5EF4-FFF2-40B4-BE49-F238E27FC236}">
-                <a16:creationId xmlns:a16="http://schemas.microsoft.com/office/drawing/2014/main" id="{5A9BC8FA-8F51-7833-4065-805B31778DB9}"/>
-              </a:ext>
-            </a:extLst>
-          </p:cNvPr>
+          <p:cNvPr id="4" name="Footer Placeholder 3"/>
           <p:cNvSpPr>
             <a:spLocks noGrp="1"/>
           </p:cNvSpPr>
@@ -1989,13 +3127,7 @@
       </p:sp>
       <p:sp>
         <p:nvSpPr>
-          <p:cNvPr id="5" name="Slide Number Placeholder 4">
-            <a:extLst>
-              <a:ext uri="{FF2B5EF4-FFF2-40B4-BE49-F238E27FC236}">
-                <a16:creationId xmlns:a16="http://schemas.microsoft.com/office/drawing/2014/main" id="{4491C7D0-756E-33E9-DA45-7F24B7759BA4}"/>
-              </a:ext>
-            </a:extLst>
-          </p:cNvPr>
+          <p:cNvPr id="5" name="Slide Number Placeholder 4"/>
           <p:cNvSpPr>
             <a:spLocks noGrp="1"/>
           </p:cNvSpPr>
@@ -2019,7 +3151,7 @@
     </p:spTree>
     <p:extLst>
       <p:ext uri="{BB962C8B-B14F-4D97-AF65-F5344CB8AC3E}">
-        <p14:creationId xmlns:p14="http://schemas.microsoft.com/office/powerpoint/2010/main" val="2427618100"/>
+        <p14:creationId xmlns:p14="http://schemas.microsoft.com/office/powerpoint/2010/main" val="961347437"/>
       </p:ext>
     </p:extLst>
   </p:cSld>
@@ -2030,7 +3162,7 @@
 </file>
 
 <file path=ppt/slideLayouts/slideLayout7.xml><?xml version="1.0" encoding="utf-8"?>
-<p:sldLayout xmlns:a="http://schemas.openxmlformats.org/drawingml/2006/main" xmlns:r="http://schemas.openxmlformats.org/officeDocument/2006/relationships" xmlns:p="http://schemas.openxmlformats.org/presentationml/2006/main" type="blank" preserve="1">
+<p:sldLayout xmlns:a="http://schemas.openxmlformats.org/drawingml/2006/main" xmlns:r="http://schemas.openxmlformats.org/officeDocument/2006/relationships" xmlns:p="http://schemas.openxmlformats.org/presentationml/2006/main" showMasterSp="0" type="blank" preserve="1">
   <p:cSld name="Blank">
     <p:spTree>
       <p:nvGrpSpPr>
@@ -2048,13 +3180,83 @@
       </p:grpSpPr>
       <p:sp>
         <p:nvSpPr>
-          <p:cNvPr id="2" name="Date Placeholder 1">
-            <a:extLst>
-              <a:ext uri="{FF2B5EF4-FFF2-40B4-BE49-F238E27FC236}">
-                <a16:creationId xmlns:a16="http://schemas.microsoft.com/office/drawing/2014/main" id="{24333875-F7AF-BD7C-24B3-B417DE1F049A}"/>
-              </a:ext>
-            </a:extLst>
-          </p:cNvPr>
+          <p:cNvPr id="5" name="Rectangle 4"/>
+          <p:cNvSpPr/>
+          <p:nvPr/>
+        </p:nvSpPr>
+        <p:spPr>
+          <a:xfrm>
+            <a:off x="3175" y="6400800"/>
+            <a:ext cx="12188825" cy="457200"/>
+          </a:xfrm>
+          <a:prstGeom prst="rect">
+            <a:avLst/>
+          </a:prstGeom>
+          <a:solidFill>
+            <a:schemeClr val="accent2"/>
+          </a:solidFill>
+          <a:ln>
+            <a:noFill/>
+          </a:ln>
+        </p:spPr>
+        <p:style>
+          <a:lnRef idx="2">
+            <a:schemeClr val="accent1">
+              <a:shade val="50000"/>
+            </a:schemeClr>
+          </a:lnRef>
+          <a:fillRef idx="1">
+            <a:schemeClr val="accent1"/>
+          </a:fillRef>
+          <a:effectRef idx="0">
+            <a:schemeClr val="accent1"/>
+          </a:effectRef>
+          <a:fontRef idx="minor">
+            <a:schemeClr val="lt1"/>
+          </a:fontRef>
+        </p:style>
+      </p:sp>
+      <p:sp>
+        <p:nvSpPr>
+          <p:cNvPr id="6" name="Rectangle 5"/>
+          <p:cNvSpPr/>
+          <p:nvPr/>
+        </p:nvSpPr>
+        <p:spPr>
+          <a:xfrm>
+            <a:off x="15" y="6334316"/>
+            <a:ext cx="12188825" cy="64008"/>
+          </a:xfrm>
+          <a:prstGeom prst="rect">
+            <a:avLst/>
+          </a:prstGeom>
+          <a:solidFill>
+            <a:schemeClr val="accent1"/>
+          </a:solidFill>
+          <a:ln>
+            <a:noFill/>
+          </a:ln>
+        </p:spPr>
+        <p:style>
+          <a:lnRef idx="2">
+            <a:schemeClr val="accent1">
+              <a:shade val="50000"/>
+            </a:schemeClr>
+          </a:lnRef>
+          <a:fillRef idx="1">
+            <a:schemeClr val="accent1"/>
+          </a:fillRef>
+          <a:effectRef idx="0">
+            <a:schemeClr val="accent1"/>
+          </a:effectRef>
+          <a:fontRef idx="minor">
+            <a:schemeClr val="lt1"/>
+          </a:fontRef>
+        </p:style>
+      </p:sp>
+      <p:sp>
+        <p:nvSpPr>
+          <p:cNvPr id="7" name="Date Placeholder 6"/>
           <p:cNvSpPr>
             <a:spLocks noGrp="1"/>
           </p:cNvSpPr>
@@ -2069,7 +3271,7 @@
           <a:p>
             <a:fld id="{591881DA-1B4A-4782-A1DD-0FD4E92C2783}" type="datetimeFigureOut">
               <a:rPr lang="en-US" smtClean="0"/>
-              <a:t>4/15/2026</a:t>
+              <a:t>4/16/2026</a:t>
             </a:fld>
             <a:endParaRPr lang="en-US"/>
           </a:p>
@@ -2077,13 +3279,7 @@
       </p:sp>
       <p:sp>
         <p:nvSpPr>
-          <p:cNvPr id="3" name="Footer Placeholder 2">
-            <a:extLst>
-              <a:ext uri="{FF2B5EF4-FFF2-40B4-BE49-F238E27FC236}">
-                <a16:creationId xmlns:a16="http://schemas.microsoft.com/office/drawing/2014/main" id="{184398C1-8123-339C-AAA7-9858051A3382}"/>
-              </a:ext>
-            </a:extLst>
-          </p:cNvPr>
+          <p:cNvPr id="8" name="Footer Placeholder 7"/>
           <p:cNvSpPr>
             <a:spLocks noGrp="1"/>
           </p:cNvSpPr>
@@ -2094,7 +3290,15 @@
         <p:spPr/>
         <p:txBody>
           <a:bodyPr/>
-          <a:lstStyle/>
+          <a:lstStyle>
+            <a:lvl1pPr>
+              <a:defRPr>
+                <a:solidFill>
+                  <a:srgbClr val="FFFFFF"/>
+                </a:solidFill>
+              </a:defRPr>
+            </a:lvl1pPr>
+          </a:lstStyle>
           <a:p>
             <a:endParaRPr lang="en-US"/>
           </a:p>
@@ -2102,13 +3306,7 @@
       </p:sp>
       <p:sp>
         <p:nvSpPr>
-          <p:cNvPr id="4" name="Slide Number Placeholder 3">
-            <a:extLst>
-              <a:ext uri="{FF2B5EF4-FFF2-40B4-BE49-F238E27FC236}">
-                <a16:creationId xmlns:a16="http://schemas.microsoft.com/office/drawing/2014/main" id="{8714D8D2-1177-C90F-0D0F-640C2A05BD6B}"/>
-              </a:ext>
-            </a:extLst>
-          </p:cNvPr>
+          <p:cNvPr id="9" name="Slide Number Placeholder 8"/>
           <p:cNvSpPr>
             <a:spLocks noGrp="1"/>
           </p:cNvSpPr>
@@ -2132,7 +3330,7 @@
     </p:spTree>
     <p:extLst>
       <p:ext uri="{BB962C8B-B14F-4D97-AF65-F5344CB8AC3E}">
-        <p14:creationId xmlns:p14="http://schemas.microsoft.com/office/powerpoint/2010/main" val="3012213056"/>
+        <p14:creationId xmlns:p14="http://schemas.microsoft.com/office/powerpoint/2010/main" val="3166987803"/>
       </p:ext>
     </p:extLst>
   </p:cSld>
@@ -2143,7 +3341,7 @@
 </file>
 
 <file path=ppt/slideLayouts/slideLayout8.xml><?xml version="1.0" encoding="utf-8"?>
-<p:sldLayout xmlns:a="http://schemas.openxmlformats.org/drawingml/2006/main" xmlns:r="http://schemas.openxmlformats.org/officeDocument/2006/relationships" xmlns:p="http://schemas.openxmlformats.org/presentationml/2006/main" type="objTx" preserve="1">
+<p:sldLayout xmlns:a="http://schemas.openxmlformats.org/drawingml/2006/main" xmlns:r="http://schemas.openxmlformats.org/officeDocument/2006/relationships" xmlns:p="http://schemas.openxmlformats.org/presentationml/2006/main" showMasterSp="0" type="objTx" preserve="1">
   <p:cSld name="Content with Caption">
     <p:spTree>
       <p:nvGrpSpPr>
@@ -2161,31 +3359,107 @@
       </p:grpSpPr>
       <p:sp>
         <p:nvSpPr>
-          <p:cNvPr id="2" name="Title 1">
-            <a:extLst>
-              <a:ext uri="{FF2B5EF4-FFF2-40B4-BE49-F238E27FC236}">
-                <a16:creationId xmlns:a16="http://schemas.microsoft.com/office/drawing/2014/main" id="{13D41C4C-6B15-60C2-199E-57A123CC49FA}"/>
-              </a:ext>
-            </a:extLst>
-          </p:cNvPr>
-          <p:cNvSpPr>
-            <a:spLocks noGrp="1"/>
-          </p:cNvSpPr>
-          <p:nvPr>
-            <p:ph type="title"/>
-          </p:nvPr>
+          <p:cNvPr id="8" name="Rectangle 7"/>
+          <p:cNvSpPr/>
+          <p:nvPr/>
         </p:nvSpPr>
         <p:spPr>
           <a:xfrm>
-            <a:off x="839788" y="457200"/>
-            <a:ext cx="3932237" cy="1600200"/>
+            <a:off x="16" y="0"/>
+            <a:ext cx="4050791" cy="6858000"/>
+          </a:xfrm>
+          <a:prstGeom prst="rect">
+            <a:avLst/>
+          </a:prstGeom>
+          <a:solidFill>
+            <a:schemeClr val="accent2"/>
+          </a:solidFill>
+          <a:ln>
+            <a:noFill/>
+          </a:ln>
+        </p:spPr>
+        <p:style>
+          <a:lnRef idx="2">
+            <a:schemeClr val="accent1">
+              <a:shade val="50000"/>
+            </a:schemeClr>
+          </a:lnRef>
+          <a:fillRef idx="1">
+            <a:schemeClr val="accent1"/>
+          </a:fillRef>
+          <a:effectRef idx="0">
+            <a:schemeClr val="accent1"/>
+          </a:effectRef>
+          <a:fontRef idx="minor">
+            <a:schemeClr val="lt1"/>
+          </a:fontRef>
+        </p:style>
+      </p:sp>
+      <p:sp>
+        <p:nvSpPr>
+          <p:cNvPr id="9" name="Rectangle 8"/>
+          <p:cNvSpPr/>
+          <p:nvPr/>
+        </p:nvSpPr>
+        <p:spPr>
+          <a:xfrm>
+            <a:off x="4040071" y="0"/>
+            <a:ext cx="64008" cy="6858000"/>
+          </a:xfrm>
+          <a:prstGeom prst="rect">
+            <a:avLst/>
+          </a:prstGeom>
+          <a:solidFill>
+            <a:schemeClr val="accent1"/>
+          </a:solidFill>
+          <a:ln>
+            <a:noFill/>
+          </a:ln>
+        </p:spPr>
+        <p:style>
+          <a:lnRef idx="2">
+            <a:schemeClr val="accent1">
+              <a:shade val="50000"/>
+            </a:schemeClr>
+          </a:lnRef>
+          <a:fillRef idx="1">
+            <a:schemeClr val="accent1"/>
+          </a:fillRef>
+          <a:effectRef idx="0">
+            <a:schemeClr val="accent1"/>
+          </a:effectRef>
+          <a:fontRef idx="minor">
+            <a:schemeClr val="lt1"/>
+          </a:fontRef>
+        </p:style>
+      </p:sp>
+      <p:sp>
+        <p:nvSpPr>
+          <p:cNvPr id="2" name="Title 1"/>
+          <p:cNvSpPr>
+            <a:spLocks noGrp="1"/>
+          </p:cNvSpPr>
+          <p:nvPr>
+            <p:ph type="title"/>
+          </p:nvPr>
+        </p:nvSpPr>
+        <p:spPr>
+          <a:xfrm>
+            <a:off x="457200" y="594359"/>
+            <a:ext cx="3200400" cy="2286000"/>
           </a:xfrm>
         </p:spPr>
         <p:txBody>
-          <a:bodyPr anchor="b"/>
+          <a:bodyPr anchor="b">
+            <a:normAutofit/>
+          </a:bodyPr>
           <a:lstStyle>
             <a:lvl1pPr>
-              <a:defRPr sz="3200"/>
+              <a:defRPr sz="3600" b="0">
+                <a:solidFill>
+                  <a:srgbClr val="FFFFFF"/>
+                </a:solidFill>
+              </a:defRPr>
             </a:lvl1pPr>
           </a:lstStyle>
           <a:p>
@@ -2193,18 +3467,13 @@
               <a:rPr lang="en-US"/>
               <a:t>Click to edit Master title style</a:t>
             </a:r>
-          </a:p>
-        </p:txBody>
-      </p:sp>
-      <p:sp>
-        <p:nvSpPr>
-          <p:cNvPr id="3" name="Content Placeholder 2">
-            <a:extLst>
-              <a:ext uri="{FF2B5EF4-FFF2-40B4-BE49-F238E27FC236}">
-                <a16:creationId xmlns:a16="http://schemas.microsoft.com/office/drawing/2014/main" id="{6F71F802-AF37-9DAB-5003-E7986549A0C2}"/>
-              </a:ext>
-            </a:extLst>
-          </p:cNvPr>
+            <a:endParaRPr lang="en-US" dirty="0"/>
+          </a:p>
+        </p:txBody>
+      </p:sp>
+      <p:sp>
+        <p:nvSpPr>
+          <p:cNvPr id="3" name="Content Placeholder 2"/>
           <p:cNvSpPr>
             <a:spLocks noGrp="1"/>
           </p:cNvSpPr>
@@ -2214,223 +3483,208 @@
         </p:nvSpPr>
         <p:spPr>
           <a:xfrm>
-            <a:off x="5183188" y="987425"/>
-            <a:ext cx="6172200" cy="4873625"/>
+            <a:off x="4800600" y="731520"/>
+            <a:ext cx="6492240" cy="5257800"/>
           </a:xfrm>
         </p:spPr>
+        <p:txBody>
+          <a:bodyPr/>
+          <a:lstStyle/>
+          <a:p>
+            <a:pPr lvl="0"/>
+            <a:r>
+              <a:rPr lang="en-US"/>
+              <a:t>Click to edit Master text styles</a:t>
+            </a:r>
+          </a:p>
+          <a:p>
+            <a:pPr lvl="1"/>
+            <a:r>
+              <a:rPr lang="en-US"/>
+              <a:t>Second level</a:t>
+            </a:r>
+          </a:p>
+          <a:p>
+            <a:pPr lvl="2"/>
+            <a:r>
+              <a:rPr lang="en-US"/>
+              <a:t>Third level</a:t>
+            </a:r>
+          </a:p>
+          <a:p>
+            <a:pPr lvl="3"/>
+            <a:r>
+              <a:rPr lang="en-US"/>
+              <a:t>Fourth level</a:t>
+            </a:r>
+          </a:p>
+          <a:p>
+            <a:pPr lvl="4"/>
+            <a:r>
+              <a:rPr lang="en-US"/>
+              <a:t>Fifth level</a:t>
+            </a:r>
+            <a:endParaRPr lang="en-US" dirty="0"/>
+          </a:p>
+        </p:txBody>
+      </p:sp>
+      <p:sp>
+        <p:nvSpPr>
+          <p:cNvPr id="4" name="Text Placeholder 3"/>
+          <p:cNvSpPr>
+            <a:spLocks noGrp="1"/>
+          </p:cNvSpPr>
+          <p:nvPr>
+            <p:ph type="body" sz="half" idx="2"/>
+          </p:nvPr>
+        </p:nvSpPr>
+        <p:spPr>
+          <a:xfrm>
+            <a:off x="457200" y="2926080"/>
+            <a:ext cx="3200400" cy="3379124"/>
+          </a:xfrm>
+        </p:spPr>
+        <p:txBody>
+          <a:bodyPr lIns="91440" rIns="91440">
+            <a:normAutofit/>
+          </a:bodyPr>
+          <a:lstStyle>
+            <a:lvl1pPr marL="0" indent="0">
+              <a:buNone/>
+              <a:defRPr sz="1500">
+                <a:solidFill>
+                  <a:srgbClr val="FFFFFF"/>
+                </a:solidFill>
+              </a:defRPr>
+            </a:lvl1pPr>
+            <a:lvl2pPr marL="457200" indent="0">
+              <a:buNone/>
+              <a:defRPr sz="1200"/>
+            </a:lvl2pPr>
+            <a:lvl3pPr marL="914400" indent="0">
+              <a:buNone/>
+              <a:defRPr sz="1000"/>
+            </a:lvl3pPr>
+            <a:lvl4pPr marL="1371600" indent="0">
+              <a:buNone/>
+              <a:defRPr sz="900"/>
+            </a:lvl4pPr>
+            <a:lvl5pPr marL="1828800" indent="0">
+              <a:buNone/>
+              <a:defRPr sz="900"/>
+            </a:lvl5pPr>
+            <a:lvl6pPr marL="2286000" indent="0">
+              <a:buNone/>
+              <a:defRPr sz="900"/>
+            </a:lvl6pPr>
+            <a:lvl7pPr marL="2743200" indent="0">
+              <a:buNone/>
+              <a:defRPr sz="900"/>
+            </a:lvl7pPr>
+            <a:lvl8pPr marL="3200400" indent="0">
+              <a:buNone/>
+              <a:defRPr sz="900"/>
+            </a:lvl8pPr>
+            <a:lvl9pPr marL="3657600" indent="0">
+              <a:buNone/>
+              <a:defRPr sz="900"/>
+            </a:lvl9pPr>
+          </a:lstStyle>
+          <a:p>
+            <a:pPr lvl="0"/>
+            <a:r>
+              <a:rPr lang="en-US"/>
+              <a:t>Click to edit Master text styles</a:t>
+            </a:r>
+          </a:p>
+        </p:txBody>
+      </p:sp>
+      <p:sp>
+        <p:nvSpPr>
+          <p:cNvPr id="5" name="Date Placeholder 4"/>
+          <p:cNvSpPr>
+            <a:spLocks noGrp="1"/>
+          </p:cNvSpPr>
+          <p:nvPr>
+            <p:ph type="dt" sz="half" idx="10"/>
+          </p:nvPr>
+        </p:nvSpPr>
+        <p:spPr>
+          <a:xfrm>
+            <a:off x="465512" y="6459785"/>
+            <a:ext cx="2618510" cy="365125"/>
+          </a:xfrm>
+        </p:spPr>
+        <p:txBody>
+          <a:bodyPr/>
+          <a:lstStyle>
+            <a:lvl1pPr algn="l">
+              <a:defRPr/>
+            </a:lvl1pPr>
+          </a:lstStyle>
+          <a:p>
+            <a:fld id="{591881DA-1B4A-4782-A1DD-0FD4E92C2783}" type="datetimeFigureOut">
+              <a:rPr lang="en-US" smtClean="0"/>
+              <a:t>4/16/2026</a:t>
+            </a:fld>
+            <a:endParaRPr lang="en-US"/>
+          </a:p>
+        </p:txBody>
+      </p:sp>
+      <p:sp>
+        <p:nvSpPr>
+          <p:cNvPr id="6" name="Footer Placeholder 5"/>
+          <p:cNvSpPr>
+            <a:spLocks noGrp="1"/>
+          </p:cNvSpPr>
+          <p:nvPr>
+            <p:ph type="ftr" sz="quarter" idx="11"/>
+          </p:nvPr>
+        </p:nvSpPr>
+        <p:spPr>
+          <a:xfrm>
+            <a:off x="4800600" y="6459785"/>
+            <a:ext cx="4648200" cy="365125"/>
+          </a:xfrm>
+        </p:spPr>
+        <p:txBody>
+          <a:bodyPr/>
+          <a:lstStyle>
+            <a:lvl1pPr algn="l">
+              <a:defRPr>
+                <a:solidFill>
+                  <a:schemeClr val="tx2"/>
+                </a:solidFill>
+              </a:defRPr>
+            </a:lvl1pPr>
+          </a:lstStyle>
+          <a:p>
+            <a:endParaRPr lang="en-US"/>
+          </a:p>
+        </p:txBody>
+      </p:sp>
+      <p:sp>
+        <p:nvSpPr>
+          <p:cNvPr id="7" name="Slide Number Placeholder 6"/>
+          <p:cNvSpPr>
+            <a:spLocks noGrp="1"/>
+          </p:cNvSpPr>
+          <p:nvPr>
+            <p:ph type="sldNum" sz="quarter" idx="12"/>
+          </p:nvPr>
+        </p:nvSpPr>
+        <p:spPr/>
         <p:txBody>
           <a:bodyPr/>
           <a:lstStyle>
             <a:lvl1pPr>
-              <a:defRPr sz="3200"/>
+              <a:defRPr>
+                <a:solidFill>
+                  <a:schemeClr val="tx2"/>
+                </a:solidFill>
+              </a:defRPr>
             </a:lvl1pPr>
-            <a:lvl2pPr>
-              <a:defRPr sz="2800"/>
-            </a:lvl2pPr>
-            <a:lvl3pPr>
-              <a:defRPr sz="2400"/>
-            </a:lvl3pPr>
-            <a:lvl4pPr>
-              <a:defRPr sz="2000"/>
-            </a:lvl4pPr>
-            <a:lvl5pPr>
-              <a:defRPr sz="2000"/>
-            </a:lvl5pPr>
-            <a:lvl6pPr>
-              <a:defRPr sz="2000"/>
-            </a:lvl6pPr>
-            <a:lvl7pPr>
-              <a:defRPr sz="2000"/>
-            </a:lvl7pPr>
-            <a:lvl8pPr>
-              <a:defRPr sz="2000"/>
-            </a:lvl8pPr>
-            <a:lvl9pPr>
-              <a:defRPr sz="2000"/>
-            </a:lvl9pPr>
           </a:lstStyle>
-          <a:p>
-            <a:pPr lvl="0"/>
-            <a:r>
-              <a:rPr lang="en-US"/>
-              <a:t>Click to edit Master text styles</a:t>
-            </a:r>
-          </a:p>
-          <a:p>
-            <a:pPr lvl="1"/>
-            <a:r>
-              <a:rPr lang="en-US"/>
-              <a:t>Second level</a:t>
-            </a:r>
-          </a:p>
-          <a:p>
-            <a:pPr lvl="2"/>
-            <a:r>
-              <a:rPr lang="en-US"/>
-              <a:t>Third level</a:t>
-            </a:r>
-          </a:p>
-          <a:p>
-            <a:pPr lvl="3"/>
-            <a:r>
-              <a:rPr lang="en-US"/>
-              <a:t>Fourth level</a:t>
-            </a:r>
-          </a:p>
-          <a:p>
-            <a:pPr lvl="4"/>
-            <a:r>
-              <a:rPr lang="en-US"/>
-              <a:t>Fifth level</a:t>
-            </a:r>
-          </a:p>
-        </p:txBody>
-      </p:sp>
-      <p:sp>
-        <p:nvSpPr>
-          <p:cNvPr id="4" name="Text Placeholder 3">
-            <a:extLst>
-              <a:ext uri="{FF2B5EF4-FFF2-40B4-BE49-F238E27FC236}">
-                <a16:creationId xmlns:a16="http://schemas.microsoft.com/office/drawing/2014/main" id="{2796B8C0-768B-CABB-5FF5-D8359E415F5D}"/>
-              </a:ext>
-            </a:extLst>
-          </p:cNvPr>
-          <p:cNvSpPr>
-            <a:spLocks noGrp="1"/>
-          </p:cNvSpPr>
-          <p:nvPr>
-            <p:ph type="body" sz="half" idx="2"/>
-          </p:nvPr>
-        </p:nvSpPr>
-        <p:spPr>
-          <a:xfrm>
-            <a:off x="839788" y="2057400"/>
-            <a:ext cx="3932237" cy="3811588"/>
-          </a:xfrm>
-        </p:spPr>
-        <p:txBody>
-          <a:bodyPr/>
-          <a:lstStyle>
-            <a:lvl1pPr marL="0" indent="0">
-              <a:buNone/>
-              <a:defRPr sz="1600"/>
-            </a:lvl1pPr>
-            <a:lvl2pPr marL="457200" indent="0">
-              <a:buNone/>
-              <a:defRPr sz="1400"/>
-            </a:lvl2pPr>
-            <a:lvl3pPr marL="914400" indent="0">
-              <a:buNone/>
-              <a:defRPr sz="1200"/>
-            </a:lvl3pPr>
-            <a:lvl4pPr marL="1371600" indent="0">
-              <a:buNone/>
-              <a:defRPr sz="1000"/>
-            </a:lvl4pPr>
-            <a:lvl5pPr marL="1828800" indent="0">
-              <a:buNone/>
-              <a:defRPr sz="1000"/>
-            </a:lvl5pPr>
-            <a:lvl6pPr marL="2286000" indent="0">
-              <a:buNone/>
-              <a:defRPr sz="1000"/>
-            </a:lvl6pPr>
-            <a:lvl7pPr marL="2743200" indent="0">
-              <a:buNone/>
-              <a:defRPr sz="1000"/>
-            </a:lvl7pPr>
-            <a:lvl8pPr marL="3200400" indent="0">
-              <a:buNone/>
-              <a:defRPr sz="1000"/>
-            </a:lvl8pPr>
-            <a:lvl9pPr marL="3657600" indent="0">
-              <a:buNone/>
-              <a:defRPr sz="1000"/>
-            </a:lvl9pPr>
-          </a:lstStyle>
-          <a:p>
-            <a:pPr lvl="0"/>
-            <a:r>
-              <a:rPr lang="en-US"/>
-              <a:t>Click to edit Master text styles</a:t>
-            </a:r>
-          </a:p>
-        </p:txBody>
-      </p:sp>
-      <p:sp>
-        <p:nvSpPr>
-          <p:cNvPr id="5" name="Date Placeholder 4">
-            <a:extLst>
-              <a:ext uri="{FF2B5EF4-FFF2-40B4-BE49-F238E27FC236}">
-                <a16:creationId xmlns:a16="http://schemas.microsoft.com/office/drawing/2014/main" id="{BBEECF8A-F467-74B8-E412-39C49997EB08}"/>
-              </a:ext>
-            </a:extLst>
-          </p:cNvPr>
-          <p:cNvSpPr>
-            <a:spLocks noGrp="1"/>
-          </p:cNvSpPr>
-          <p:nvPr>
-            <p:ph type="dt" sz="half" idx="10"/>
-          </p:nvPr>
-        </p:nvSpPr>
-        <p:spPr/>
-        <p:txBody>
-          <a:bodyPr/>
-          <a:lstStyle/>
-          <a:p>
-            <a:fld id="{591881DA-1B4A-4782-A1DD-0FD4E92C2783}" type="datetimeFigureOut">
-              <a:rPr lang="en-US" smtClean="0"/>
-              <a:t>4/15/2026</a:t>
-            </a:fld>
-            <a:endParaRPr lang="en-US"/>
-          </a:p>
-        </p:txBody>
-      </p:sp>
-      <p:sp>
-        <p:nvSpPr>
-          <p:cNvPr id="6" name="Footer Placeholder 5">
-            <a:extLst>
-              <a:ext uri="{FF2B5EF4-FFF2-40B4-BE49-F238E27FC236}">
-                <a16:creationId xmlns:a16="http://schemas.microsoft.com/office/drawing/2014/main" id="{3823354F-C0EB-EE03-81D9-27BE55DED8C2}"/>
-              </a:ext>
-            </a:extLst>
-          </p:cNvPr>
-          <p:cNvSpPr>
-            <a:spLocks noGrp="1"/>
-          </p:cNvSpPr>
-          <p:nvPr>
-            <p:ph type="ftr" sz="quarter" idx="11"/>
-          </p:nvPr>
-        </p:nvSpPr>
-        <p:spPr/>
-        <p:txBody>
-          <a:bodyPr/>
-          <a:lstStyle/>
-          <a:p>
-            <a:endParaRPr lang="en-US"/>
-          </a:p>
-        </p:txBody>
-      </p:sp>
-      <p:sp>
-        <p:nvSpPr>
-          <p:cNvPr id="7" name="Slide Number Placeholder 6">
-            <a:extLst>
-              <a:ext uri="{FF2B5EF4-FFF2-40B4-BE49-F238E27FC236}">
-                <a16:creationId xmlns:a16="http://schemas.microsoft.com/office/drawing/2014/main" id="{B2CFDBAA-F68C-9C26-71C3-85C56C9840BC}"/>
-              </a:ext>
-            </a:extLst>
-          </p:cNvPr>
-          <p:cNvSpPr>
-            <a:spLocks noGrp="1"/>
-          </p:cNvSpPr>
-          <p:nvPr>
-            <p:ph type="sldNum" sz="quarter" idx="12"/>
-          </p:nvPr>
-        </p:nvSpPr>
-        <p:spPr/>
-        <p:txBody>
-          <a:bodyPr/>
-          <a:lstStyle/>
           <a:p>
             <a:fld id="{45EDAB7F-79F4-4E77-BC8F-83D49FC90478}" type="slidenum">
               <a:rPr lang="en-US" smtClean="0"/>
@@ -2443,7 +3697,7 @@
     </p:spTree>
     <p:extLst>
       <p:ext uri="{BB962C8B-B14F-4D97-AF65-F5344CB8AC3E}">
-        <p14:creationId xmlns:p14="http://schemas.microsoft.com/office/powerpoint/2010/main" val="2559135421"/>
+        <p14:creationId xmlns:p14="http://schemas.microsoft.com/office/powerpoint/2010/main" val="120987737"/>
       </p:ext>
     </p:extLst>
   </p:cSld>
@@ -2454,7 +3708,7 @@
 </file>
 
 <file path=ppt/slideLayouts/slideLayout9.xml><?xml version="1.0" encoding="utf-8"?>
-<p:sldLayout xmlns:a="http://schemas.openxmlformats.org/drawingml/2006/main" xmlns:r="http://schemas.openxmlformats.org/officeDocument/2006/relationships" xmlns:p="http://schemas.openxmlformats.org/presentationml/2006/main" type="picTx" preserve="1">
+<p:sldLayout xmlns:a="http://schemas.openxmlformats.org/drawingml/2006/main" xmlns:r="http://schemas.openxmlformats.org/officeDocument/2006/relationships" xmlns:p="http://schemas.openxmlformats.org/presentationml/2006/main" showMasterSp="0" type="picTx" preserve="1">
   <p:cSld name="Picture with Caption">
     <p:spTree>
       <p:nvGrpSpPr>
@@ -2472,31 +3726,107 @@
       </p:grpSpPr>
       <p:sp>
         <p:nvSpPr>
-          <p:cNvPr id="2" name="Title 1">
-            <a:extLst>
-              <a:ext uri="{FF2B5EF4-FFF2-40B4-BE49-F238E27FC236}">
-                <a16:creationId xmlns:a16="http://schemas.microsoft.com/office/drawing/2014/main" id="{85F7A96B-3E20-1037-FE06-B1F6D8F34EED}"/>
-              </a:ext>
-            </a:extLst>
-          </p:cNvPr>
-          <p:cNvSpPr>
-            <a:spLocks noGrp="1"/>
-          </p:cNvSpPr>
-          <p:nvPr>
-            <p:ph type="title"/>
-          </p:nvPr>
+          <p:cNvPr id="8" name="Rectangle 7"/>
+          <p:cNvSpPr/>
+          <p:nvPr/>
         </p:nvSpPr>
         <p:spPr>
           <a:xfrm>
-            <a:off x="839788" y="457200"/>
-            <a:ext cx="3932237" cy="1600200"/>
+            <a:off x="0" y="4953000"/>
+            <a:ext cx="12188825" cy="1905000"/>
+          </a:xfrm>
+          <a:prstGeom prst="rect">
+            <a:avLst/>
+          </a:prstGeom>
+          <a:solidFill>
+            <a:schemeClr val="accent2"/>
+          </a:solidFill>
+          <a:ln>
+            <a:noFill/>
+          </a:ln>
+        </p:spPr>
+        <p:style>
+          <a:lnRef idx="2">
+            <a:schemeClr val="accent1">
+              <a:shade val="50000"/>
+            </a:schemeClr>
+          </a:lnRef>
+          <a:fillRef idx="1">
+            <a:schemeClr val="accent1"/>
+          </a:fillRef>
+          <a:effectRef idx="0">
+            <a:schemeClr val="accent1"/>
+          </a:effectRef>
+          <a:fontRef idx="minor">
+            <a:schemeClr val="lt1"/>
+          </a:fontRef>
+        </p:style>
+      </p:sp>
+      <p:sp>
+        <p:nvSpPr>
+          <p:cNvPr id="9" name="Rectangle 8"/>
+          <p:cNvSpPr/>
+          <p:nvPr/>
+        </p:nvSpPr>
+        <p:spPr>
+          <a:xfrm>
+            <a:off x="15" y="4915076"/>
+            <a:ext cx="12188825" cy="64008"/>
+          </a:xfrm>
+          <a:prstGeom prst="rect">
+            <a:avLst/>
+          </a:prstGeom>
+          <a:solidFill>
+            <a:schemeClr val="accent1"/>
+          </a:solidFill>
+          <a:ln>
+            <a:noFill/>
+          </a:ln>
+        </p:spPr>
+        <p:style>
+          <a:lnRef idx="2">
+            <a:schemeClr val="accent1">
+              <a:shade val="50000"/>
+            </a:schemeClr>
+          </a:lnRef>
+          <a:fillRef idx="1">
+            <a:schemeClr val="accent1"/>
+          </a:fillRef>
+          <a:effectRef idx="0">
+            <a:schemeClr val="accent1"/>
+          </a:effectRef>
+          <a:fontRef idx="minor">
+            <a:schemeClr val="lt1"/>
+          </a:fontRef>
+        </p:style>
+      </p:sp>
+      <p:sp>
+        <p:nvSpPr>
+          <p:cNvPr id="2" name="Title 1"/>
+          <p:cNvSpPr>
+            <a:spLocks noGrp="1"/>
+          </p:cNvSpPr>
+          <p:nvPr>
+            <p:ph type="title"/>
+          </p:nvPr>
+        </p:nvSpPr>
+        <p:spPr>
+          <a:xfrm>
+            <a:off x="1097280" y="5074920"/>
+            <a:ext cx="10113264" cy="822960"/>
           </a:xfrm>
         </p:spPr>
         <p:txBody>
-          <a:bodyPr anchor="b"/>
+          <a:bodyPr lIns="91440" tIns="0" rIns="91440" bIns="0" anchor="b">
+            <a:noAutofit/>
+          </a:bodyPr>
           <a:lstStyle>
             <a:lvl1pPr>
-              <a:defRPr sz="3200"/>
+              <a:defRPr sz="3600" b="0">
+                <a:solidFill>
+                  <a:srgbClr val="FFFFFF"/>
+                </a:solidFill>
+              </a:defRPr>
             </a:lvl1pPr>
           </a:lstStyle>
           <a:p>
@@ -2504,20 +3834,15 @@
               <a:rPr lang="en-US"/>
               <a:t>Click to edit Master title style</a:t>
             </a:r>
-          </a:p>
-        </p:txBody>
-      </p:sp>
-      <p:sp>
-        <p:nvSpPr>
-          <p:cNvPr id="3" name="Picture Placeholder 2">
-            <a:extLst>
-              <a:ext uri="{FF2B5EF4-FFF2-40B4-BE49-F238E27FC236}">
-                <a16:creationId xmlns:a16="http://schemas.microsoft.com/office/drawing/2014/main" id="{A3112221-A202-C60E-CEF5-71CDBAA7FD04}"/>
-              </a:ext>
-            </a:extLst>
-          </p:cNvPr>
-          <p:cNvSpPr>
-            <a:spLocks noGrp="1"/>
+            <a:endParaRPr lang="en-US" dirty="0"/>
+          </a:p>
+        </p:txBody>
+      </p:sp>
+      <p:sp>
+        <p:nvSpPr>
+          <p:cNvPr id="3" name="Picture Placeholder 2"/>
+          <p:cNvSpPr>
+            <a:spLocks noGrp="1" noChangeAspect="1"/>
           </p:cNvSpPr>
           <p:nvPr>
             <p:ph type="pic" idx="1"/>
@@ -2525,16 +3850,26 @@
         </p:nvSpPr>
         <p:spPr>
           <a:xfrm>
-            <a:off x="5183188" y="987425"/>
-            <a:ext cx="6172200" cy="4873625"/>
+            <a:off x="15" y="0"/>
+            <a:ext cx="12191985" cy="4915076"/>
           </a:xfrm>
+          <a:blipFill>
+            <a:blip r:embed="rId2"/>
+            <a:stretch>
+              <a:fillRect/>
+            </a:stretch>
+          </a:blipFill>
         </p:spPr>
         <p:txBody>
-          <a:bodyPr/>
+          <a:bodyPr lIns="457200" tIns="457200" anchor="t"/>
           <a:lstStyle>
             <a:lvl1pPr marL="0" indent="0">
               <a:buNone/>
-              <a:defRPr sz="3200"/>
+              <a:defRPr sz="3200">
+                <a:solidFill>
+                  <a:schemeClr val="bg1"/>
+                </a:solidFill>
+              </a:defRPr>
             </a:lvl1pPr>
             <a:lvl2pPr marL="457200" indent="0">
               <a:buNone/>
@@ -2570,19 +3905,17 @@
             </a:lvl9pPr>
           </a:lstStyle>
           <a:p>
-            <a:endParaRPr lang="en-US"/>
-          </a:p>
-        </p:txBody>
-      </p:sp>
-      <p:sp>
-        <p:nvSpPr>
-          <p:cNvPr id="4" name="Text Placeholder 3">
-            <a:extLst>
-              <a:ext uri="{FF2B5EF4-FFF2-40B4-BE49-F238E27FC236}">
-                <a16:creationId xmlns:a16="http://schemas.microsoft.com/office/drawing/2014/main" id="{D1153FFC-5A5F-9B1F-B688-448E3EF14FE2}"/>
-              </a:ext>
-            </a:extLst>
-          </p:cNvPr>
+            <a:r>
+              <a:rPr lang="en-US"/>
+              <a:t>Click icon to add picture</a:t>
+            </a:r>
+            <a:endParaRPr lang="en-US" dirty="0"/>
+          </a:p>
+        </p:txBody>
+      </p:sp>
+      <p:sp>
+        <p:nvSpPr>
+          <p:cNvPr id="4" name="Text Placeholder 3"/>
           <p:cNvSpPr>
             <a:spLocks noGrp="1"/>
           </p:cNvSpPr>
@@ -2592,48 +3925,60 @@
         </p:nvSpPr>
         <p:spPr>
           <a:xfrm>
-            <a:off x="839788" y="2057400"/>
-            <a:ext cx="3932237" cy="3811588"/>
+            <a:off x="1097280" y="5907023"/>
+            <a:ext cx="10113264" cy="594360"/>
           </a:xfrm>
         </p:spPr>
         <p:txBody>
-          <a:bodyPr/>
+          <a:bodyPr lIns="91440" tIns="0" rIns="91440" bIns="0">
+            <a:normAutofit/>
+          </a:bodyPr>
           <a:lstStyle>
             <a:lvl1pPr marL="0" indent="0">
+              <a:spcBef>
+                <a:spcPts val="0"/>
+              </a:spcBef>
+              <a:spcAft>
+                <a:spcPts val="600"/>
+              </a:spcAft>
               <a:buNone/>
-              <a:defRPr sz="1600"/>
+              <a:defRPr sz="1500">
+                <a:solidFill>
+                  <a:srgbClr val="FFFFFF"/>
+                </a:solidFill>
+              </a:defRPr>
             </a:lvl1pPr>
             <a:lvl2pPr marL="457200" indent="0">
               <a:buNone/>
-              <a:defRPr sz="1400"/>
+              <a:defRPr sz="1200"/>
             </a:lvl2pPr>
             <a:lvl3pPr marL="914400" indent="0">
               <a:buNone/>
-              <a:defRPr sz="1200"/>
+              <a:defRPr sz="1000"/>
             </a:lvl3pPr>
             <a:lvl4pPr marL="1371600" indent="0">
               <a:buNone/>
-              <a:defRPr sz="1000"/>
+              <a:defRPr sz="900"/>
             </a:lvl4pPr>
             <a:lvl5pPr marL="1828800" indent="0">
               <a:buNone/>
-              <a:defRPr sz="1000"/>
+              <a:defRPr sz="900"/>
             </a:lvl5pPr>
             <a:lvl6pPr marL="2286000" indent="0">
               <a:buNone/>
-              <a:defRPr sz="1000"/>
+              <a:defRPr sz="900"/>
             </a:lvl6pPr>
             <a:lvl7pPr marL="2743200" indent="0">
               <a:buNone/>
-              <a:defRPr sz="1000"/>
+              <a:defRPr sz="900"/>
             </a:lvl7pPr>
             <a:lvl8pPr marL="3200400" indent="0">
               <a:buNone/>
-              <a:defRPr sz="1000"/>
+              <a:defRPr sz="900"/>
             </a:lvl8pPr>
             <a:lvl9pPr marL="3657600" indent="0">
               <a:buNone/>
-              <a:defRPr sz="1000"/>
+              <a:defRPr sz="900"/>
             </a:lvl9pPr>
           </a:lstStyle>
           <a:p>
@@ -2647,13 +3992,7 @@
       </p:sp>
       <p:sp>
         <p:nvSpPr>
-          <p:cNvPr id="5" name="Date Placeholder 4">
-            <a:extLst>
-              <a:ext uri="{FF2B5EF4-FFF2-40B4-BE49-F238E27FC236}">
-                <a16:creationId xmlns:a16="http://schemas.microsoft.com/office/drawing/2014/main" id="{9B92F8D0-221E-26CF-3ECB-734C5CDD92A6}"/>
-              </a:ext>
-            </a:extLst>
-          </p:cNvPr>
+          <p:cNvPr id="5" name="Date Placeholder 4"/>
           <p:cNvSpPr>
             <a:spLocks noGrp="1"/>
           </p:cNvSpPr>
@@ -2668,7 +4007,7 @@
           <a:p>
             <a:fld id="{591881DA-1B4A-4782-A1DD-0FD4E92C2783}" type="datetimeFigureOut">
               <a:rPr lang="en-US" smtClean="0"/>
-              <a:t>4/15/2026</a:t>
+              <a:t>4/16/2026</a:t>
             </a:fld>
             <a:endParaRPr lang="en-US"/>
           </a:p>
@@ -2676,13 +4015,7 @@
       </p:sp>
       <p:sp>
         <p:nvSpPr>
-          <p:cNvPr id="6" name="Footer Placeholder 5">
-            <a:extLst>
-              <a:ext uri="{FF2B5EF4-FFF2-40B4-BE49-F238E27FC236}">
-                <a16:creationId xmlns:a16="http://schemas.microsoft.com/office/drawing/2014/main" id="{312A70F6-E396-94F3-0D1F-0571AB8EAA9A}"/>
-              </a:ext>
-            </a:extLst>
-          </p:cNvPr>
+          <p:cNvPr id="6" name="Footer Placeholder 5"/>
           <p:cNvSpPr>
             <a:spLocks noGrp="1"/>
           </p:cNvSpPr>
@@ -2701,13 +4034,7 @@
       </p:sp>
       <p:sp>
         <p:nvSpPr>
-          <p:cNvPr id="7" name="Slide Number Placeholder 6">
-            <a:extLst>
-              <a:ext uri="{FF2B5EF4-FFF2-40B4-BE49-F238E27FC236}">
-                <a16:creationId xmlns:a16="http://schemas.microsoft.com/office/drawing/2014/main" id="{46745548-789C-DA27-22DF-812F4B22E2D2}"/>
-              </a:ext>
-            </a:extLst>
-          </p:cNvPr>
+          <p:cNvPr id="7" name="Slide Number Placeholder 6"/>
           <p:cNvSpPr>
             <a:spLocks noGrp="1"/>
           </p:cNvSpPr>
@@ -2731,7 +4058,7 @@
     </p:spTree>
     <p:extLst>
       <p:ext uri="{BB962C8B-B14F-4D97-AF65-F5344CB8AC3E}">
-        <p14:creationId xmlns:p14="http://schemas.microsoft.com/office/powerpoint/2010/main" val="3769416882"/>
+        <p14:creationId xmlns:p14="http://schemas.microsoft.com/office/powerpoint/2010/main" val="772695178"/>
       </p:ext>
     </p:extLst>
   </p:cSld>
@@ -2765,31 +4092,115 @@
       </p:grpSpPr>
       <p:sp>
         <p:nvSpPr>
-          <p:cNvPr id="2" name="Title Placeholder 1">
-            <a:extLst>
-              <a:ext uri="{FF2B5EF4-FFF2-40B4-BE49-F238E27FC236}">
-                <a16:creationId xmlns:a16="http://schemas.microsoft.com/office/drawing/2014/main" id="{8FB986B9-CE4E-2253-C86D-A0E447103A39}"/>
-              </a:ext>
-            </a:extLst>
-          </p:cNvPr>
-          <p:cNvSpPr>
-            <a:spLocks noGrp="1"/>
-          </p:cNvSpPr>
-          <p:nvPr>
-            <p:ph type="title"/>
-          </p:nvPr>
+          <p:cNvPr id="7" name="Rectangle 6"/>
+          <p:cNvSpPr/>
+          <p:nvPr/>
         </p:nvSpPr>
         <p:spPr>
           <a:xfrm>
-            <a:off x="838200" y="365125"/>
-            <a:ext cx="10515600" cy="1325563"/>
+            <a:off x="1" y="6400800"/>
+            <a:ext cx="12192000" cy="457200"/>
+          </a:xfrm>
+          <a:prstGeom prst="rect">
+            <a:avLst/>
+          </a:prstGeom>
+          <a:solidFill>
+            <a:schemeClr val="accent2"/>
+          </a:solidFill>
+          <a:ln>
+            <a:noFill/>
+          </a:ln>
+        </p:spPr>
+        <p:style>
+          <a:lnRef idx="2">
+            <a:schemeClr val="accent1">
+              <a:shade val="50000"/>
+            </a:schemeClr>
+          </a:lnRef>
+          <a:fillRef idx="1">
+            <a:schemeClr val="accent1"/>
+          </a:fillRef>
+          <a:effectRef idx="0">
+            <a:schemeClr val="accent1"/>
+          </a:effectRef>
+          <a:fontRef idx="minor">
+            <a:schemeClr val="lt1"/>
+          </a:fontRef>
+        </p:style>
+        <p:txBody>
+          <a:bodyPr/>
+          <a:lstStyle/>
+          <a:p>
+            <a:endParaRPr lang="en-US"/>
+          </a:p>
+        </p:txBody>
+      </p:sp>
+      <p:sp>
+        <p:nvSpPr>
+          <p:cNvPr id="9" name="Rectangle 8"/>
+          <p:cNvSpPr/>
+          <p:nvPr/>
+        </p:nvSpPr>
+        <p:spPr>
+          <a:xfrm>
+            <a:off x="0" y="6334316"/>
+            <a:ext cx="12192001" cy="65998"/>
+          </a:xfrm>
+          <a:prstGeom prst="rect">
+            <a:avLst/>
+          </a:prstGeom>
+          <a:solidFill>
+            <a:schemeClr val="accent1"/>
+          </a:solidFill>
+          <a:ln>
+            <a:noFill/>
+          </a:ln>
+        </p:spPr>
+        <p:style>
+          <a:lnRef idx="2">
+            <a:schemeClr val="accent1">
+              <a:shade val="50000"/>
+            </a:schemeClr>
+          </a:lnRef>
+          <a:fillRef idx="1">
+            <a:schemeClr val="accent1"/>
+          </a:fillRef>
+          <a:effectRef idx="0">
+            <a:schemeClr val="accent1"/>
+          </a:effectRef>
+          <a:fontRef idx="minor">
+            <a:schemeClr val="lt1"/>
+          </a:fontRef>
+        </p:style>
+        <p:txBody>
+          <a:bodyPr/>
+          <a:lstStyle/>
+          <a:p>
+            <a:endParaRPr lang="en-US"/>
+          </a:p>
+        </p:txBody>
+      </p:sp>
+      <p:sp>
+        <p:nvSpPr>
+          <p:cNvPr id="2" name="Title Placeholder 1"/>
+          <p:cNvSpPr>
+            <a:spLocks noGrp="1"/>
+          </p:cNvSpPr>
+          <p:nvPr>
+            <p:ph type="title"/>
+          </p:nvPr>
+        </p:nvSpPr>
+        <p:spPr>
+          <a:xfrm>
+            <a:off x="1097280" y="286603"/>
+            <a:ext cx="10058400" cy="1450757"/>
           </a:xfrm>
           <a:prstGeom prst="rect">
             <a:avLst/>
           </a:prstGeom>
         </p:spPr>
         <p:txBody>
-          <a:bodyPr vert="horz" lIns="91440" tIns="45720" rIns="91440" bIns="45720" rtlCol="0" anchor="ctr">
+          <a:bodyPr vert="horz" lIns="91440" tIns="45720" rIns="91440" bIns="45720" rtlCol="0" anchor="b">
             <a:normAutofit/>
           </a:bodyPr>
           <a:lstStyle/>
@@ -2798,18 +4209,13 @@
               <a:rPr lang="en-US"/>
               <a:t>Click to edit Master title style</a:t>
             </a:r>
-          </a:p>
-        </p:txBody>
-      </p:sp>
-      <p:sp>
-        <p:nvSpPr>
-          <p:cNvPr id="3" name="Text Placeholder 2">
-            <a:extLst>
-              <a:ext uri="{FF2B5EF4-FFF2-40B4-BE49-F238E27FC236}">
-                <a16:creationId xmlns:a16="http://schemas.microsoft.com/office/drawing/2014/main" id="{D32A068B-8041-8FCD-0D07-BBA194D16079}"/>
-              </a:ext>
-            </a:extLst>
-          </p:cNvPr>
+            <a:endParaRPr lang="en-US" dirty="0"/>
+          </a:p>
+        </p:txBody>
+      </p:sp>
+      <p:sp>
+        <p:nvSpPr>
+          <p:cNvPr id="3" name="Text Placeholder 2"/>
           <p:cNvSpPr>
             <a:spLocks noGrp="1"/>
           </p:cNvSpPr>
@@ -2819,15 +4225,15 @@
         </p:nvSpPr>
         <p:spPr>
           <a:xfrm>
-            <a:off x="838200" y="1825625"/>
-            <a:ext cx="10515600" cy="4351338"/>
+            <a:off x="1097280" y="1845734"/>
+            <a:ext cx="10058400" cy="4023360"/>
           </a:xfrm>
           <a:prstGeom prst="rect">
             <a:avLst/>
           </a:prstGeom>
         </p:spPr>
         <p:txBody>
-          <a:bodyPr vert="horz" lIns="91440" tIns="45720" rIns="91440" bIns="45720" rtlCol="0">
+          <a:bodyPr vert="horz" lIns="0" tIns="45720" rIns="0" bIns="45720" rtlCol="0">
             <a:normAutofit/>
           </a:bodyPr>
           <a:lstStyle/>
@@ -2865,18 +4271,13 @@
               <a:rPr lang="en-US"/>
               <a:t>Fifth level</a:t>
             </a:r>
-          </a:p>
-        </p:txBody>
-      </p:sp>
-      <p:sp>
-        <p:nvSpPr>
-          <p:cNvPr id="4" name="Date Placeholder 3">
-            <a:extLst>
-              <a:ext uri="{FF2B5EF4-FFF2-40B4-BE49-F238E27FC236}">
-                <a16:creationId xmlns:a16="http://schemas.microsoft.com/office/drawing/2014/main" id="{32A7AC8E-131C-46A9-3BF8-0F1EE6E97139}"/>
-              </a:ext>
-            </a:extLst>
-          </p:cNvPr>
+            <a:endParaRPr lang="en-US" dirty="0"/>
+          </a:p>
+        </p:txBody>
+      </p:sp>
+      <p:sp>
+        <p:nvSpPr>
+          <p:cNvPr id="4" name="Date Placeholder 3"/>
           <p:cNvSpPr>
             <a:spLocks noGrp="1"/>
           </p:cNvSpPr>
@@ -2886,8 +4287,8 @@
         </p:nvSpPr>
         <p:spPr>
           <a:xfrm>
-            <a:off x="838200" y="6356350"/>
-            <a:ext cx="2743200" cy="365125"/>
+            <a:off x="1097280" y="6459785"/>
+            <a:ext cx="2472271" cy="365125"/>
           </a:xfrm>
           <a:prstGeom prst="rect">
             <a:avLst/>
@@ -2897,11 +4298,9 @@
           <a:bodyPr vert="horz" lIns="91440" tIns="45720" rIns="91440" bIns="45720" rtlCol="0" anchor="ctr"/>
           <a:lstStyle>
             <a:lvl1pPr algn="l">
-              <a:defRPr sz="1200">
+              <a:defRPr sz="900">
                 <a:solidFill>
-                  <a:schemeClr val="tx1">
-                    <a:tint val="82000"/>
-                  </a:schemeClr>
+                  <a:srgbClr val="FFFFFF"/>
                 </a:solidFill>
               </a:defRPr>
             </a:lvl1pPr>
@@ -2909,7 +4308,7 @@
           <a:p>
             <a:fld id="{591881DA-1B4A-4782-A1DD-0FD4E92C2783}" type="datetimeFigureOut">
               <a:rPr lang="en-US" smtClean="0"/>
-              <a:t>4/15/2026</a:t>
+              <a:t>4/16/2026</a:t>
             </a:fld>
             <a:endParaRPr lang="en-US"/>
           </a:p>
@@ -2917,13 +4316,7 @@
       </p:sp>
       <p:sp>
         <p:nvSpPr>
-          <p:cNvPr id="5" name="Footer Placeholder 4">
-            <a:extLst>
-              <a:ext uri="{FF2B5EF4-FFF2-40B4-BE49-F238E27FC236}">
-                <a16:creationId xmlns:a16="http://schemas.microsoft.com/office/drawing/2014/main" id="{92C928B2-6457-1DDF-1E1E-C5E3F808894A}"/>
-              </a:ext>
-            </a:extLst>
-          </p:cNvPr>
+          <p:cNvPr id="5" name="Footer Placeholder 4"/>
           <p:cNvSpPr>
             <a:spLocks noGrp="1"/>
           </p:cNvSpPr>
@@ -2933,8 +4326,8 @@
         </p:nvSpPr>
         <p:spPr>
           <a:xfrm>
-            <a:off x="4038600" y="6356350"/>
-            <a:ext cx="4114800" cy="365125"/>
+            <a:off x="3686185" y="6459785"/>
+            <a:ext cx="4822804" cy="365125"/>
           </a:xfrm>
           <a:prstGeom prst="rect">
             <a:avLst/>
@@ -2944,11 +4337,9 @@
           <a:bodyPr vert="horz" lIns="91440" tIns="45720" rIns="91440" bIns="45720" rtlCol="0" anchor="ctr"/>
           <a:lstStyle>
             <a:lvl1pPr algn="ctr">
-              <a:defRPr sz="1200">
+              <a:defRPr sz="900" cap="all" baseline="0">
                 <a:solidFill>
-                  <a:schemeClr val="tx1">
-                    <a:tint val="82000"/>
-                  </a:schemeClr>
+                  <a:srgbClr val="FFFFFF"/>
                 </a:solidFill>
               </a:defRPr>
             </a:lvl1pPr>
@@ -2960,13 +4351,7 @@
       </p:sp>
       <p:sp>
         <p:nvSpPr>
-          <p:cNvPr id="6" name="Slide Number Placeholder 5">
-            <a:extLst>
-              <a:ext uri="{FF2B5EF4-FFF2-40B4-BE49-F238E27FC236}">
-                <a16:creationId xmlns:a16="http://schemas.microsoft.com/office/drawing/2014/main" id="{865980EC-13B1-9A6D-5354-7B57C365254D}"/>
-              </a:ext>
-            </a:extLst>
-          </p:cNvPr>
+          <p:cNvPr id="6" name="Slide Number Placeholder 5"/>
           <p:cNvSpPr>
             <a:spLocks noGrp="1"/>
           </p:cNvSpPr>
@@ -2976,8 +4361,8 @@
         </p:nvSpPr>
         <p:spPr>
           <a:xfrm>
-            <a:off x="8610600" y="6356350"/>
-            <a:ext cx="2743200" cy="365125"/>
+            <a:off x="9900458" y="6459785"/>
+            <a:ext cx="1312025" cy="365125"/>
           </a:xfrm>
           <a:prstGeom prst="rect">
             <a:avLst/>
@@ -2987,11 +4372,9 @@
           <a:bodyPr vert="horz" lIns="91440" tIns="45720" rIns="91440" bIns="45720" rtlCol="0" anchor="ctr"/>
           <a:lstStyle>
             <a:lvl1pPr algn="r">
-              <a:defRPr sz="1200">
+              <a:defRPr sz="1050">
                 <a:solidFill>
-                  <a:schemeClr val="tx1">
-                    <a:tint val="82000"/>
-                  </a:schemeClr>
+                  <a:srgbClr val="FFFFFF"/>
                 </a:solidFill>
               </a:defRPr>
             </a:lvl1pPr>
@@ -3005,40 +4388,81 @@
           </a:p>
         </p:txBody>
       </p:sp>
+      <p:cxnSp>
+        <p:nvCxnSpPr>
+          <p:cNvPr id="10" name="Straight Connector 9"/>
+          <p:cNvCxnSpPr/>
+          <p:nvPr/>
+        </p:nvCxnSpPr>
+        <p:spPr>
+          <a:xfrm>
+            <a:off x="1193532" y="1737845"/>
+            <a:ext cx="9966960" cy="0"/>
+          </a:xfrm>
+          <a:prstGeom prst="line">
+            <a:avLst/>
+          </a:prstGeom>
+          <a:ln w="6350">
+            <a:solidFill>
+              <a:schemeClr val="tx1">
+                <a:lumMod val="50000"/>
+                <a:lumOff val="50000"/>
+              </a:schemeClr>
+            </a:solidFill>
+          </a:ln>
+        </p:spPr>
+        <p:style>
+          <a:lnRef idx="1">
+            <a:schemeClr val="accent1"/>
+          </a:lnRef>
+          <a:fillRef idx="0">
+            <a:schemeClr val="accent1"/>
+          </a:fillRef>
+          <a:effectRef idx="0">
+            <a:schemeClr val="accent1"/>
+          </a:effectRef>
+          <a:fontRef idx="minor">
+            <a:schemeClr val="tx1"/>
+          </a:fontRef>
+        </p:style>
+      </p:cxnSp>
     </p:spTree>
     <p:extLst>
       <p:ext uri="{BB962C8B-B14F-4D97-AF65-F5344CB8AC3E}">
-        <p14:creationId xmlns:p14="http://schemas.microsoft.com/office/powerpoint/2010/main" val="3376992891"/>
+        <p14:creationId xmlns:p14="http://schemas.microsoft.com/office/powerpoint/2010/main" val="1279336008"/>
       </p:ext>
     </p:extLst>
   </p:cSld>
   <p:clrMap bg1="lt1" tx1="dk1" bg2="lt2" tx2="dk2" accent1="accent1" accent2="accent2" accent3="accent3" accent4="accent4" accent5="accent5" accent6="accent6" hlink="hlink" folHlink="folHlink"/>
   <p:sldLayoutIdLst>
-    <p:sldLayoutId id="2147483649" r:id="rId1"/>
-    <p:sldLayoutId id="2147483650" r:id="rId2"/>
-    <p:sldLayoutId id="2147483651" r:id="rId3"/>
-    <p:sldLayoutId id="2147483652" r:id="rId4"/>
-    <p:sldLayoutId id="2147483653" r:id="rId5"/>
-    <p:sldLayoutId id="2147483654" r:id="rId6"/>
-    <p:sldLayoutId id="2147483655" r:id="rId7"/>
-    <p:sldLayoutId id="2147483656" r:id="rId8"/>
-    <p:sldLayoutId id="2147483657" r:id="rId9"/>
-    <p:sldLayoutId id="2147483658" r:id="rId10"/>
-    <p:sldLayoutId id="2147483659" r:id="rId11"/>
+    <p:sldLayoutId id="2147483685" r:id="rId1"/>
+    <p:sldLayoutId id="2147483686" r:id="rId2"/>
+    <p:sldLayoutId id="2147483687" r:id="rId3"/>
+    <p:sldLayoutId id="2147483688" r:id="rId4"/>
+    <p:sldLayoutId id="2147483689" r:id="rId5"/>
+    <p:sldLayoutId id="2147483690" r:id="rId6"/>
+    <p:sldLayoutId id="2147483691" r:id="rId7"/>
+    <p:sldLayoutId id="2147483692" r:id="rId8"/>
+    <p:sldLayoutId id="2147483693" r:id="rId9"/>
+    <p:sldLayoutId id="2147483694" r:id="rId10"/>
+    <p:sldLayoutId id="2147483695" r:id="rId11"/>
   </p:sldLayoutIdLst>
   <p:txStyles>
     <p:titleStyle>
       <a:lvl1pPr algn="l" defTabSz="914400" rtl="0" eaLnBrk="1" latinLnBrk="0" hangingPunct="1">
         <a:lnSpc>
-          <a:spcPct val="90000"/>
+          <a:spcPct val="85000"/>
         </a:lnSpc>
         <a:spcBef>
           <a:spcPct val="0"/>
         </a:spcBef>
         <a:buNone/>
-        <a:defRPr sz="4400" kern="1200">
+        <a:defRPr sz="4800" kern="1200" spc="-50" baseline="0">
           <a:solidFill>
-            <a:schemeClr val="tx1"/>
+            <a:schemeClr val="tx1">
+              <a:lumMod val="75000"/>
+              <a:lumOff val="25000"/>
+            </a:schemeClr>
           </a:solidFill>
           <a:latin typeface="+mj-lt"/>
           <a:ea typeface="+mj-ea"/>
@@ -3047,162 +4471,244 @@
       </a:lvl1pPr>
     </p:titleStyle>
     <p:bodyStyle>
-      <a:lvl1pPr marL="228600" indent="-228600" algn="l" defTabSz="914400" rtl="0" eaLnBrk="1" latinLnBrk="0" hangingPunct="1">
+      <a:lvl1pPr marL="91440" indent="-91440" algn="l" defTabSz="914400" rtl="0" eaLnBrk="1" latinLnBrk="0" hangingPunct="1">
         <a:lnSpc>
           <a:spcPct val="90000"/>
         </a:lnSpc>
         <a:spcBef>
-          <a:spcPts val="1000"/>
+          <a:spcPts val="1200"/>
         </a:spcBef>
-        <a:buFont typeface="Arial" panose="020B0604020202020204" pitchFamily="34" charset="0"/>
-        <a:buChar char="•"/>
-        <a:defRPr sz="2800" kern="1200">
+        <a:spcAft>
+          <a:spcPts val="200"/>
+        </a:spcAft>
+        <a:buClr>
+          <a:schemeClr val="accent1"/>
+        </a:buClr>
+        <a:buSzPct val="100000"/>
+        <a:buFont typeface="Calibri" panose="020F0502020204030204" pitchFamily="34" charset="0"/>
+        <a:buChar char=" "/>
+        <a:defRPr sz="2000" kern="1200">
           <a:solidFill>
-            <a:schemeClr val="tx1"/>
+            <a:schemeClr val="tx1">
+              <a:lumMod val="75000"/>
+              <a:lumOff val="25000"/>
+            </a:schemeClr>
           </a:solidFill>
           <a:latin typeface="+mn-lt"/>
           <a:ea typeface="+mn-ea"/>
           <a:cs typeface="+mn-cs"/>
         </a:defRPr>
       </a:lvl1pPr>
-      <a:lvl2pPr marL="685800" indent="-228600" algn="l" defTabSz="914400" rtl="0" eaLnBrk="1" latinLnBrk="0" hangingPunct="1">
+      <a:lvl2pPr marL="384048" indent="-182880" algn="l" defTabSz="914400" rtl="0" eaLnBrk="1" latinLnBrk="0" hangingPunct="1">
         <a:lnSpc>
           <a:spcPct val="90000"/>
         </a:lnSpc>
         <a:spcBef>
-          <a:spcPts val="500"/>
+          <a:spcPts val="200"/>
         </a:spcBef>
-        <a:buFont typeface="Arial" panose="020B0604020202020204" pitchFamily="34" charset="0"/>
-        <a:buChar char="•"/>
-        <a:defRPr sz="2400" kern="1200">
+        <a:spcAft>
+          <a:spcPts val="400"/>
+        </a:spcAft>
+        <a:buClr>
+          <a:schemeClr val="accent1"/>
+        </a:buClr>
+        <a:buFont typeface="Calibri" pitchFamily="34" charset="0"/>
+        <a:buChar char="◦"/>
+        <a:defRPr sz="1800" kern="1200">
           <a:solidFill>
-            <a:schemeClr val="tx1"/>
+            <a:schemeClr val="tx1">
+              <a:lumMod val="75000"/>
+              <a:lumOff val="25000"/>
+            </a:schemeClr>
           </a:solidFill>
           <a:latin typeface="+mn-lt"/>
           <a:ea typeface="+mn-ea"/>
           <a:cs typeface="+mn-cs"/>
         </a:defRPr>
       </a:lvl2pPr>
-      <a:lvl3pPr marL="1143000" indent="-228600" algn="l" defTabSz="914400" rtl="0" eaLnBrk="1" latinLnBrk="0" hangingPunct="1">
+      <a:lvl3pPr marL="566928" indent="-182880" algn="l" defTabSz="914400" rtl="0" eaLnBrk="1" latinLnBrk="0" hangingPunct="1">
         <a:lnSpc>
           <a:spcPct val="90000"/>
         </a:lnSpc>
         <a:spcBef>
-          <a:spcPts val="500"/>
+          <a:spcPts val="200"/>
         </a:spcBef>
-        <a:buFont typeface="Arial" panose="020B0604020202020204" pitchFamily="34" charset="0"/>
-        <a:buChar char="•"/>
-        <a:defRPr sz="2000" kern="1200">
+        <a:spcAft>
+          <a:spcPts val="400"/>
+        </a:spcAft>
+        <a:buClr>
+          <a:schemeClr val="accent1"/>
+        </a:buClr>
+        <a:buFont typeface="Calibri" pitchFamily="34" charset="0"/>
+        <a:buChar char="◦"/>
+        <a:defRPr sz="1400" kern="1200">
           <a:solidFill>
-            <a:schemeClr val="tx1"/>
+            <a:schemeClr val="tx1">
+              <a:lumMod val="75000"/>
+              <a:lumOff val="25000"/>
+            </a:schemeClr>
           </a:solidFill>
           <a:latin typeface="+mn-lt"/>
           <a:ea typeface="+mn-ea"/>
           <a:cs typeface="+mn-cs"/>
         </a:defRPr>
       </a:lvl3pPr>
-      <a:lvl4pPr marL="1600200" indent="-228600" algn="l" defTabSz="914400" rtl="0" eaLnBrk="1" latinLnBrk="0" hangingPunct="1">
+      <a:lvl4pPr marL="749808" indent="-182880" algn="l" defTabSz="914400" rtl="0" eaLnBrk="1" latinLnBrk="0" hangingPunct="1">
         <a:lnSpc>
           <a:spcPct val="90000"/>
         </a:lnSpc>
         <a:spcBef>
-          <a:spcPts val="500"/>
+          <a:spcPts val="200"/>
         </a:spcBef>
-        <a:buFont typeface="Arial" panose="020B0604020202020204" pitchFamily="34" charset="0"/>
-        <a:buChar char="•"/>
-        <a:defRPr sz="1800" kern="1200">
+        <a:spcAft>
+          <a:spcPts val="400"/>
+        </a:spcAft>
+        <a:buClr>
+          <a:schemeClr val="accent1"/>
+        </a:buClr>
+        <a:buFont typeface="Calibri" pitchFamily="34" charset="0"/>
+        <a:buChar char="◦"/>
+        <a:defRPr sz="1400" kern="1200">
           <a:solidFill>
-            <a:schemeClr val="tx1"/>
+            <a:schemeClr val="tx1">
+              <a:lumMod val="75000"/>
+              <a:lumOff val="25000"/>
+            </a:schemeClr>
           </a:solidFill>
           <a:latin typeface="+mn-lt"/>
           <a:ea typeface="+mn-ea"/>
           <a:cs typeface="+mn-cs"/>
         </a:defRPr>
       </a:lvl4pPr>
-      <a:lvl5pPr marL="2057400" indent="-228600" algn="l" defTabSz="914400" rtl="0" eaLnBrk="1" latinLnBrk="0" hangingPunct="1">
+      <a:lvl5pPr marL="932688" indent="-182880" algn="l" defTabSz="914400" rtl="0" eaLnBrk="1" latinLnBrk="0" hangingPunct="1">
         <a:lnSpc>
           <a:spcPct val="90000"/>
         </a:lnSpc>
         <a:spcBef>
-          <a:spcPts val="500"/>
+          <a:spcPts val="200"/>
         </a:spcBef>
-        <a:buFont typeface="Arial" panose="020B0604020202020204" pitchFamily="34" charset="0"/>
-        <a:buChar char="•"/>
-        <a:defRPr sz="1800" kern="1200">
+        <a:spcAft>
+          <a:spcPts val="400"/>
+        </a:spcAft>
+        <a:buClr>
+          <a:schemeClr val="accent1"/>
+        </a:buClr>
+        <a:buFont typeface="Calibri" pitchFamily="34" charset="0"/>
+        <a:buChar char="◦"/>
+        <a:defRPr sz="1400" kern="1200">
           <a:solidFill>
-            <a:schemeClr val="tx1"/>
+            <a:schemeClr val="tx1">
+              <a:lumMod val="75000"/>
+              <a:lumOff val="25000"/>
+            </a:schemeClr>
           </a:solidFill>
           <a:latin typeface="+mn-lt"/>
           <a:ea typeface="+mn-ea"/>
           <a:cs typeface="+mn-cs"/>
         </a:defRPr>
       </a:lvl5pPr>
-      <a:lvl6pPr marL="2514600" indent="-228600" algn="l" defTabSz="914400" rtl="0" eaLnBrk="1" latinLnBrk="0" hangingPunct="1">
+      <a:lvl6pPr marL="1100000" indent="-228600" algn="l" defTabSz="914400" rtl="0" eaLnBrk="1" latinLnBrk="0" hangingPunct="1">
         <a:lnSpc>
           <a:spcPct val="90000"/>
         </a:lnSpc>
         <a:spcBef>
-          <a:spcPts val="500"/>
+          <a:spcPts val="200"/>
         </a:spcBef>
-        <a:buFont typeface="Arial" panose="020B0604020202020204" pitchFamily="34" charset="0"/>
-        <a:buChar char="•"/>
-        <a:defRPr sz="1800" kern="1200">
+        <a:spcAft>
+          <a:spcPts val="400"/>
+        </a:spcAft>
+        <a:buClr>
+          <a:schemeClr val="accent1"/>
+        </a:buClr>
+        <a:buFont typeface="Calibri" pitchFamily="34" charset="0"/>
+        <a:buChar char="◦"/>
+        <a:defRPr sz="1400" kern="1200">
           <a:solidFill>
-            <a:schemeClr val="tx1"/>
+            <a:schemeClr val="tx1">
+              <a:lumMod val="75000"/>
+              <a:lumOff val="25000"/>
+            </a:schemeClr>
           </a:solidFill>
           <a:latin typeface="+mn-lt"/>
           <a:ea typeface="+mn-ea"/>
           <a:cs typeface="+mn-cs"/>
         </a:defRPr>
       </a:lvl6pPr>
-      <a:lvl7pPr marL="2971800" indent="-228600" algn="l" defTabSz="914400" rtl="0" eaLnBrk="1" latinLnBrk="0" hangingPunct="1">
+      <a:lvl7pPr marL="1300000" indent="-228600" algn="l" defTabSz="914400" rtl="0" eaLnBrk="1" latinLnBrk="0" hangingPunct="1">
         <a:lnSpc>
           <a:spcPct val="90000"/>
         </a:lnSpc>
         <a:spcBef>
-          <a:spcPts val="500"/>
+          <a:spcPts val="200"/>
         </a:spcBef>
-        <a:buFont typeface="Arial" panose="020B0604020202020204" pitchFamily="34" charset="0"/>
-        <a:buChar char="•"/>
-        <a:defRPr sz="1800" kern="1200">
+        <a:spcAft>
+          <a:spcPts val="400"/>
+        </a:spcAft>
+        <a:buClr>
+          <a:schemeClr val="accent1"/>
+        </a:buClr>
+        <a:buFont typeface="Calibri" pitchFamily="34" charset="0"/>
+        <a:buChar char="◦"/>
+        <a:defRPr sz="1400" kern="1200">
           <a:solidFill>
-            <a:schemeClr val="tx1"/>
+            <a:schemeClr val="tx1">
+              <a:lumMod val="75000"/>
+              <a:lumOff val="25000"/>
+            </a:schemeClr>
           </a:solidFill>
           <a:latin typeface="+mn-lt"/>
           <a:ea typeface="+mn-ea"/>
           <a:cs typeface="+mn-cs"/>
         </a:defRPr>
       </a:lvl7pPr>
-      <a:lvl8pPr marL="3429000" indent="-228600" algn="l" defTabSz="914400" rtl="0" eaLnBrk="1" latinLnBrk="0" hangingPunct="1">
+      <a:lvl8pPr marL="1500000" indent="-228600" algn="l" defTabSz="914400" rtl="0" eaLnBrk="1" latinLnBrk="0" hangingPunct="1">
         <a:lnSpc>
           <a:spcPct val="90000"/>
         </a:lnSpc>
         <a:spcBef>
-          <a:spcPts val="500"/>
+          <a:spcPts val="200"/>
         </a:spcBef>
-        <a:buFont typeface="Arial" panose="020B0604020202020204" pitchFamily="34" charset="0"/>
-        <a:buChar char="•"/>
-        <a:defRPr sz="1800" kern="1200">
+        <a:spcAft>
+          <a:spcPts val="400"/>
+        </a:spcAft>
+        <a:buClr>
+          <a:schemeClr val="accent1"/>
+        </a:buClr>
+        <a:buFont typeface="Calibri" pitchFamily="34" charset="0"/>
+        <a:buChar char="◦"/>
+        <a:defRPr sz="1400" kern="1200">
           <a:solidFill>
-            <a:schemeClr val="tx1"/>
+            <a:schemeClr val="tx1">
+              <a:lumMod val="75000"/>
+              <a:lumOff val="25000"/>
+            </a:schemeClr>
           </a:solidFill>
           <a:latin typeface="+mn-lt"/>
           <a:ea typeface="+mn-ea"/>
           <a:cs typeface="+mn-cs"/>
         </a:defRPr>
       </a:lvl8pPr>
-      <a:lvl9pPr marL="3886200" indent="-228600" algn="l" defTabSz="914400" rtl="0" eaLnBrk="1" latinLnBrk="0" hangingPunct="1">
+      <a:lvl9pPr marL="1700000" indent="-228600" algn="l" defTabSz="914400" rtl="0" eaLnBrk="1" latinLnBrk="0" hangingPunct="1">
         <a:lnSpc>
           <a:spcPct val="90000"/>
         </a:lnSpc>
         <a:spcBef>
-          <a:spcPts val="500"/>
+          <a:spcPts val="200"/>
         </a:spcBef>
-        <a:buFont typeface="Arial" panose="020B0604020202020204" pitchFamily="34" charset="0"/>
-        <a:buChar char="•"/>
-        <a:defRPr sz="1800" kern="1200">
+        <a:spcAft>
+          <a:spcPts val="400"/>
+        </a:spcAft>
+        <a:buClr>
+          <a:schemeClr val="accent1"/>
+        </a:buClr>
+        <a:buFont typeface="Calibri" pitchFamily="34" charset="0"/>
+        <a:buChar char="◦"/>
+        <a:defRPr sz="1400" kern="1200">
           <a:solidFill>
-            <a:schemeClr val="tx1"/>
+            <a:schemeClr val="tx1">
+              <a:lumMod val="75000"/>
+              <a:lumOff val="25000"/>
+            </a:schemeClr>
           </a:solidFill>
           <a:latin typeface="+mn-lt"/>
           <a:ea typeface="+mn-ea"/>
@@ -3344,10 +4850,15 @@
         </p:nvSpPr>
         <p:spPr/>
         <p:txBody>
-          <a:bodyPr/>
-          <a:lstStyle/>
-          <a:p>
-            <a:endParaRPr lang="en-US"/>
+          <a:bodyPr>
+            <a:normAutofit/>
+          </a:bodyPr>
+          <a:lstStyle/>
+          <a:p>
+            <a:r>
+              <a:rPr lang="en-US" dirty="0"/>
+              <a:t>What does it take to get in the MLB Hall of Fame?</a:t>
+            </a:r>
           </a:p>
         </p:txBody>
       </p:sp>
@@ -3372,7 +4883,10 @@
           <a:bodyPr/>
           <a:lstStyle/>
           <a:p>
-            <a:endParaRPr lang="en-US"/>
+            <a:r>
+              <a:rPr lang="en-US" dirty="0"/>
+              <a:t>By Hayden Lamprecht</a:t>
+            </a:r>
           </a:p>
         </p:txBody>
       </p:sp>
@@ -3380,6 +4894,174 @@
     <p:extLst>
       <p:ext uri="{BB962C8B-B14F-4D97-AF65-F5344CB8AC3E}">
         <p14:creationId xmlns:p14="http://schemas.microsoft.com/office/powerpoint/2010/main" val="2742470569"/>
+      </p:ext>
+    </p:extLst>
+  </p:cSld>
+  <p:clrMapOvr>
+    <a:masterClrMapping/>
+  </p:clrMapOvr>
+</p:sld>
+</file>
+
+<file path=ppt/slides/slide10.xml><?xml version="1.0" encoding="utf-8"?>
+<p:sld xmlns:a="http://schemas.openxmlformats.org/drawingml/2006/main" xmlns:r="http://schemas.openxmlformats.org/officeDocument/2006/relationships" xmlns:p="http://schemas.openxmlformats.org/presentationml/2006/main">
+  <p:cSld>
+    <p:spTree>
+      <p:nvGrpSpPr>
+        <p:cNvPr id="1" name=""/>
+        <p:cNvGrpSpPr/>
+        <p:nvPr/>
+      </p:nvGrpSpPr>
+      <p:grpSpPr>
+        <a:xfrm>
+          <a:off x="0" y="0"/>
+          <a:ext cx="0" cy="0"/>
+          <a:chOff x="0" y="0"/>
+          <a:chExt cx="0" cy="0"/>
+        </a:xfrm>
+      </p:grpSpPr>
+      <p:sp>
+        <p:nvSpPr>
+          <p:cNvPr id="2" name="Title 1">
+            <a:extLst>
+              <a:ext uri="{FF2B5EF4-FFF2-40B4-BE49-F238E27FC236}">
+                <a16:creationId xmlns:a16="http://schemas.microsoft.com/office/drawing/2014/main" id="{8D25F305-94E6-B4C0-A932-B8870117CE83}"/>
+              </a:ext>
+            </a:extLst>
+          </p:cNvPr>
+          <p:cNvSpPr>
+            <a:spLocks noGrp="1"/>
+          </p:cNvSpPr>
+          <p:nvPr>
+            <p:ph type="title"/>
+          </p:nvPr>
+        </p:nvSpPr>
+        <p:spPr/>
+        <p:txBody>
+          <a:bodyPr/>
+          <a:lstStyle/>
+          <a:p>
+            <a:r>
+              <a:rPr lang="en-US" dirty="0"/>
+              <a:t>Critical thoughts</a:t>
+            </a:r>
+          </a:p>
+        </p:txBody>
+      </p:sp>
+      <p:sp>
+        <p:nvSpPr>
+          <p:cNvPr id="3" name="Content Placeholder 2">
+            <a:extLst>
+              <a:ext uri="{FF2B5EF4-FFF2-40B4-BE49-F238E27FC236}">
+                <a16:creationId xmlns:a16="http://schemas.microsoft.com/office/drawing/2014/main" id="{D0FCBE85-DA91-2F1C-890F-5891AFBEEEC3}"/>
+              </a:ext>
+            </a:extLst>
+          </p:cNvPr>
+          <p:cNvSpPr>
+            <a:spLocks noGrp="1"/>
+          </p:cNvSpPr>
+          <p:nvPr>
+            <p:ph idx="1"/>
+          </p:nvPr>
+        </p:nvSpPr>
+        <p:spPr/>
+        <p:txBody>
+          <a:bodyPr/>
+          <a:lstStyle/>
+          <a:p>
+            <a:pPr>
+              <a:buClr>
+                <a:schemeClr val="tx1"/>
+              </a:buClr>
+              <a:buFont typeface="Arial" panose="020B0604020202020204" pitchFamily="34" charset="0"/>
+              <a:buChar char="•"/>
+            </a:pPr>
+            <a:r>
+              <a:rPr lang="en-US" dirty="0"/>
+              <a:t> WAR does not vary as much as expected</a:t>
+            </a:r>
+          </a:p>
+          <a:p>
+            <a:pPr>
+              <a:buClr>
+                <a:schemeClr val="tx1"/>
+              </a:buClr>
+              <a:buFont typeface="Arial" panose="020B0604020202020204" pitchFamily="34" charset="0"/>
+              <a:buChar char="•"/>
+            </a:pPr>
+            <a:r>
+              <a:rPr lang="en-US" dirty="0"/>
+              <a:t> WAR possibly already counts for positional adjustments</a:t>
+            </a:r>
+          </a:p>
+          <a:p>
+            <a:pPr>
+              <a:buClr>
+                <a:schemeClr val="tx1"/>
+              </a:buClr>
+              <a:buFont typeface="Arial" panose="020B0604020202020204" pitchFamily="34" charset="0"/>
+              <a:buChar char="•"/>
+            </a:pPr>
+            <a:r>
+              <a:rPr lang="en-US" dirty="0"/>
+              <a:t> Definite omitted variable bias: awards, championships, era played</a:t>
+            </a:r>
+          </a:p>
+          <a:p>
+            <a:pPr>
+              <a:buClr>
+                <a:schemeClr val="tx1"/>
+              </a:buClr>
+              <a:buFont typeface="Arial" panose="020B0604020202020204" pitchFamily="34" charset="0"/>
+              <a:buChar char="•"/>
+            </a:pPr>
+            <a:r>
+              <a:rPr lang="en-US" dirty="0"/>
+              <a:t> More correlation than causation</a:t>
+            </a:r>
+          </a:p>
+          <a:p>
+            <a:pPr>
+              <a:buClr>
+                <a:schemeClr val="tx1"/>
+              </a:buClr>
+              <a:buFont typeface="Arial" panose="020B0604020202020204" pitchFamily="34" charset="0"/>
+              <a:buChar char="•"/>
+            </a:pPr>
+            <a:endParaRPr lang="en-US" dirty="0"/>
+          </a:p>
+          <a:p>
+            <a:pPr>
+              <a:buClr>
+                <a:schemeClr val="tx1"/>
+              </a:buClr>
+              <a:buFont typeface="Arial" panose="020B0604020202020204" pitchFamily="34" charset="0"/>
+              <a:buChar char="•"/>
+            </a:pPr>
+            <a:r>
+              <a:rPr lang="en-US" dirty="0"/>
+              <a:t> Fixed effects, logit, or interaction models</a:t>
+            </a:r>
+          </a:p>
+          <a:p>
+            <a:pPr>
+              <a:buClr>
+                <a:schemeClr val="tx1"/>
+              </a:buClr>
+              <a:buFont typeface="Arial" panose="020B0604020202020204" pitchFamily="34" charset="0"/>
+              <a:buChar char="•"/>
+            </a:pPr>
+            <a:r>
+              <a:rPr lang="en-US" dirty="0"/>
+              <a:t> Locating better variables</a:t>
+            </a:r>
+          </a:p>
+        </p:txBody>
+      </p:sp>
+    </p:spTree>
+    <p:extLst>
+      <p:ext uri="{BB962C8B-B14F-4D97-AF65-F5344CB8AC3E}">
+        <p14:creationId xmlns:p14="http://schemas.microsoft.com/office/powerpoint/2010/main" val="3913236332"/>
       </p:ext>
     </p:extLst>
   </p:cSld>
@@ -3411,7 +5093,7 @@
           <p:cNvPr id="2" name="Title 1">
             <a:extLst>
               <a:ext uri="{FF2B5EF4-FFF2-40B4-BE49-F238E27FC236}">
-                <a16:creationId xmlns:a16="http://schemas.microsoft.com/office/drawing/2014/main" id="{5AF6942B-E9BC-6384-C088-00E8752B550F}"/>
+                <a16:creationId xmlns:a16="http://schemas.microsoft.com/office/drawing/2014/main" id="{0458B479-1DFF-090E-AB5E-F6A9FCF7FD10}"/>
               </a:ext>
             </a:extLst>
           </p:cNvPr>
@@ -3429,7 +5111,7 @@
           <a:p>
             <a:r>
               <a:rPr lang="en-US" dirty="0"/>
-              <a:t>Data</a:t>
+              <a:t>What is WAR?</a:t>
             </a:r>
           </a:p>
         </p:txBody>
@@ -3439,7 +5121,7 @@
           <p:cNvPr id="3" name="Content Placeholder 2">
             <a:extLst>
               <a:ext uri="{FF2B5EF4-FFF2-40B4-BE49-F238E27FC236}">
-                <a16:creationId xmlns:a16="http://schemas.microsoft.com/office/drawing/2014/main" id="{FDFEE5EF-CA2F-7C54-BC1B-1808C4158AB9}"/>
+                <a16:creationId xmlns:a16="http://schemas.microsoft.com/office/drawing/2014/main" id="{650D4589-F4A6-DA60-0A13-DA40E7FD8D99}"/>
               </a:ext>
             </a:extLst>
           </p:cNvPr>
@@ -3452,17 +5134,124 @@
         </p:nvSpPr>
         <p:spPr/>
         <p:txBody>
-          <a:bodyPr/>
-          <a:lstStyle/>
-          <a:p>
-            <a:endParaRPr lang="en-US"/>
+          <a:bodyPr>
+            <a:normAutofit/>
+          </a:bodyPr>
+          <a:lstStyle/>
+          <a:p>
+            <a:endParaRPr lang="en-US" dirty="0"/>
+          </a:p>
+          <a:p>
+            <a:pPr marL="0" indent="0">
+              <a:buNone/>
+            </a:pPr>
+            <a:endParaRPr lang="en-US" dirty="0"/>
+          </a:p>
+          <a:p>
+            <a:pPr marL="0" indent="0">
+              <a:buNone/>
+            </a:pPr>
+            <a:endParaRPr lang="en-US" dirty="0"/>
+          </a:p>
+        </p:txBody>
+      </p:sp>
+      <p:sp>
+        <p:nvSpPr>
+          <p:cNvPr id="6" name="TextBox 5">
+            <a:extLst>
+              <a:ext uri="{FF2B5EF4-FFF2-40B4-BE49-F238E27FC236}">
+                <a16:creationId xmlns:a16="http://schemas.microsoft.com/office/drawing/2014/main" id="{42C89103-A675-8A71-3A35-CBB42732F3E2}"/>
+              </a:ext>
+            </a:extLst>
+          </p:cNvPr>
+          <p:cNvSpPr txBox="1"/>
+          <p:nvPr/>
+        </p:nvSpPr>
+        <p:spPr>
+          <a:xfrm>
+            <a:off x="1097280" y="2046514"/>
+            <a:ext cx="10058400" cy="2862322"/>
+          </a:xfrm>
+          <a:prstGeom prst="rect">
+            <a:avLst/>
+          </a:prstGeom>
+          <a:noFill/>
+        </p:spPr>
+        <p:txBody>
+          <a:bodyPr wrap="square" rtlCol="0">
+            <a:spAutoFit/>
+          </a:bodyPr>
+          <a:lstStyle/>
+          <a:p>
+            <a:pPr marL="342900" indent="-342900">
+              <a:buFont typeface="Arial" panose="020B0604020202020204" pitchFamily="34" charset="0"/>
+              <a:buChar char="•"/>
+            </a:pPr>
+            <a:r>
+              <a:rPr lang="en-US" sz="2000" dirty="0"/>
+              <a:t>WAR (Wins above Replacement) is a key metric in measuring a baseball player’s value to their team.</a:t>
+            </a:r>
+          </a:p>
+          <a:p>
+            <a:pPr marL="342900" indent="-342900">
+              <a:buFont typeface="Arial" panose="020B0604020202020204" pitchFamily="34" charset="0"/>
+              <a:buChar char="•"/>
+            </a:pPr>
+            <a:r>
+              <a:rPr lang="en-US" sz="2000" dirty="0"/>
+              <a:t>It estimates how many more games a player helped their team win compared to a replacement level player.</a:t>
+            </a:r>
+          </a:p>
+          <a:p>
+            <a:pPr marL="342900" indent="-342900">
+              <a:buFont typeface="Arial" panose="020B0604020202020204" pitchFamily="34" charset="0"/>
+              <a:buChar char="•"/>
+            </a:pPr>
+            <a:r>
+              <a:rPr lang="en-US" sz="2000" dirty="0"/>
+              <a:t>WAR is split up into pitching WAR and batting WAR and utilizes all major stats to calculate it.</a:t>
+            </a:r>
+          </a:p>
+          <a:p>
+            <a:pPr marL="342900" indent="-342900">
+              <a:buFont typeface="Arial" panose="020B0604020202020204" pitchFamily="34" charset="0"/>
+              <a:buChar char="•"/>
+            </a:pPr>
+            <a:endParaRPr lang="en-US" sz="2000" dirty="0"/>
+          </a:p>
+          <a:p>
+            <a:pPr marL="342900" indent="-342900">
+              <a:buFont typeface="Arial" panose="020B0604020202020204" pitchFamily="34" charset="0"/>
+              <a:buChar char="•"/>
+            </a:pPr>
+            <a:r>
+              <a:rPr lang="en-US" sz="2000" dirty="0"/>
+              <a:t>Using Total WAR and Years played</a:t>
+            </a:r>
+          </a:p>
+          <a:p>
+            <a:pPr marL="342900" indent="-342900">
+              <a:buFont typeface="Arial" panose="020B0604020202020204" pitchFamily="34" charset="0"/>
+              <a:buChar char="•"/>
+            </a:pPr>
+            <a:r>
+              <a:rPr lang="en-US" sz="2000" dirty="0"/>
+              <a:t>Data was acquired from Baseball-Reference.com and the Lahman database</a:t>
+            </a:r>
+          </a:p>
+          <a:p>
+            <a:pPr marL="342900" indent="-342900">
+              <a:buFont typeface="Arial" panose="020B0604020202020204" pitchFamily="34" charset="0"/>
+              <a:buChar char="•"/>
+            </a:pPr>
+            <a:endParaRPr lang="en-US" sz="2000" dirty="0"/>
           </a:p>
         </p:txBody>
       </p:sp>
     </p:spTree>
     <p:extLst>
       <p:ext uri="{BB962C8B-B14F-4D97-AF65-F5344CB8AC3E}">
-        <p14:creationId xmlns:p14="http://schemas.microsoft.com/office/powerpoint/2010/main" val="1119798781"/>
+        <p14:creationId xmlns:p14="http://schemas.microsoft.com/office/powerpoint/2010/main" val="3592681227"/>
       </p:ext>
     </p:extLst>
   </p:cSld>
@@ -3494,7 +5283,7 @@
           <p:cNvPr id="2" name="Title 1">
             <a:extLst>
               <a:ext uri="{FF2B5EF4-FFF2-40B4-BE49-F238E27FC236}">
-                <a16:creationId xmlns:a16="http://schemas.microsoft.com/office/drawing/2014/main" id="{728F59D0-A487-2A87-8FD5-B9BE1C65F0B2}"/>
+                <a16:creationId xmlns:a16="http://schemas.microsoft.com/office/drawing/2014/main" id="{9285154A-2727-366B-75DD-2866BE1E4F37}"/>
               </a:ext>
             </a:extLst>
           </p:cNvPr>
@@ -3512,40 +5301,125 @@
           <a:p>
             <a:r>
               <a:rPr lang="en-US" dirty="0"/>
-              <a:t>Previous model</a:t>
-            </a:r>
-          </a:p>
-        </p:txBody>
-      </p:sp>
-      <p:sp>
-        <p:nvSpPr>
-          <p:cNvPr id="3" name="Content Placeholder 2">
+              <a:t>Data</a:t>
+            </a:r>
+          </a:p>
+        </p:txBody>
+      </p:sp>
+      <p:sp>
+        <p:nvSpPr>
+          <p:cNvPr id="6" name="TextBox 5">
             <a:extLst>
               <a:ext uri="{FF2B5EF4-FFF2-40B4-BE49-F238E27FC236}">
-                <a16:creationId xmlns:a16="http://schemas.microsoft.com/office/drawing/2014/main" id="{FE9D310F-DB9C-9807-4C95-8ED6382226BA}"/>
+                <a16:creationId xmlns:a16="http://schemas.microsoft.com/office/drawing/2014/main" id="{556BA39C-51F6-20B0-CAFE-8491FEAC8A93}"/>
               </a:ext>
             </a:extLst>
           </p:cNvPr>
-          <p:cNvSpPr>
-            <a:spLocks noGrp="1"/>
-          </p:cNvSpPr>
+          <p:cNvSpPr txBox="1"/>
+          <p:nvPr/>
+        </p:nvSpPr>
+        <p:spPr>
+          <a:xfrm>
+            <a:off x="1097280" y="1839685"/>
+            <a:ext cx="8619103" cy="1631216"/>
+          </a:xfrm>
+          <a:prstGeom prst="rect">
+            <a:avLst/>
+          </a:prstGeom>
+          <a:noFill/>
+        </p:spPr>
+        <p:txBody>
+          <a:bodyPr wrap="square" rtlCol="0">
+            <a:spAutoFit/>
+          </a:bodyPr>
+          <a:lstStyle/>
+          <a:p>
+            <a:r>
+              <a:rPr lang="en-US" sz="2000" dirty="0"/>
+              <a:t>Data collected:</a:t>
+            </a:r>
+          </a:p>
+          <a:p>
+            <a:pPr marL="342900" indent="-342900">
+              <a:buFont typeface="Arial" panose="020B0604020202020204" pitchFamily="34" charset="0"/>
+              <a:buChar char="•"/>
+            </a:pPr>
+            <a:r>
+              <a:rPr lang="en-US" sz="2000" dirty="0"/>
+              <a:t>992 observations of 87 variables</a:t>
+            </a:r>
+          </a:p>
+          <a:p>
+            <a:pPr marL="342900" indent="-342900">
+              <a:buFont typeface="Arial" panose="020B0604020202020204" pitchFamily="34" charset="0"/>
+              <a:buChar char="•"/>
+            </a:pPr>
+            <a:r>
+              <a:rPr lang="en-US" sz="2000" dirty="0"/>
+              <a:t>Hits, Homeruns, RBIs, Walks, Strikeouts</a:t>
+            </a:r>
+          </a:p>
+          <a:p>
+            <a:pPr marL="342900" indent="-342900">
+              <a:buFont typeface="Arial" panose="020B0604020202020204" pitchFamily="34" charset="0"/>
+              <a:buChar char="•"/>
+            </a:pPr>
+            <a:r>
+              <a:rPr lang="en-US" sz="2000" dirty="0"/>
+              <a:t>ERA, Innings Pitched, etc.</a:t>
+            </a:r>
+          </a:p>
+          <a:p>
+            <a:pPr marL="342900" indent="-342900">
+              <a:buFont typeface="Arial" panose="020B0604020202020204" pitchFamily="34" charset="0"/>
+              <a:buChar char="•"/>
+            </a:pPr>
+            <a:endParaRPr lang="en-US" sz="2000" dirty="0"/>
+          </a:p>
+        </p:txBody>
+      </p:sp>
+      <p:pic>
+        <p:nvPicPr>
+          <p:cNvPr id="10" name="Content Placeholder 9">
+            <a:extLst>
+              <a:ext uri="{FF2B5EF4-FFF2-40B4-BE49-F238E27FC236}">
+                <a16:creationId xmlns:a16="http://schemas.microsoft.com/office/drawing/2014/main" id="{12E0BE51-528C-7953-97EA-611ED0601AA1}"/>
+              </a:ext>
+            </a:extLst>
+          </p:cNvPr>
+          <p:cNvPicPr>
+            <a:picLocks noGrp="1" noChangeAspect="1"/>
+          </p:cNvPicPr>
           <p:nvPr>
             <p:ph idx="1"/>
           </p:nvPr>
-        </p:nvSpPr>
-        <p:spPr/>
-        <p:txBody>
-          <a:bodyPr/>
-          <a:lstStyle/>
-          <a:p>
-            <a:endParaRPr lang="en-US"/>
-          </a:p>
-        </p:txBody>
-      </p:sp>
+        </p:nvPicPr>
+        <p:blipFill>
+          <a:blip r:embed="rId2">
+            <a:extLst>
+              <a:ext uri="{28A0092B-C50C-407E-A947-70E740481C1C}">
+                <a14:useLocalDpi xmlns:a14="http://schemas.microsoft.com/office/drawing/2010/main" val="0"/>
+              </a:ext>
+            </a:extLst>
+          </a:blip>
+          <a:stretch>
+            <a:fillRect/>
+          </a:stretch>
+        </p:blipFill>
+        <p:spPr>
+          <a:xfrm>
+            <a:off x="5693700" y="1839685"/>
+            <a:ext cx="5061385" cy="4396219"/>
+          </a:xfrm>
+          <a:prstGeom prst="rect">
+            <a:avLst/>
+          </a:prstGeom>
+        </p:spPr>
+      </p:pic>
     </p:spTree>
     <p:extLst>
       <p:ext uri="{BB962C8B-B14F-4D97-AF65-F5344CB8AC3E}">
-        <p14:creationId xmlns:p14="http://schemas.microsoft.com/office/powerpoint/2010/main" val="3248631073"/>
+        <p14:creationId xmlns:p14="http://schemas.microsoft.com/office/powerpoint/2010/main" val="2971251357"/>
       </p:ext>
     </p:extLst>
   </p:cSld>
@@ -3577,7 +5451,7 @@
           <p:cNvPr id="2" name="Title 1">
             <a:extLst>
               <a:ext uri="{FF2B5EF4-FFF2-40B4-BE49-F238E27FC236}">
-                <a16:creationId xmlns:a16="http://schemas.microsoft.com/office/drawing/2014/main" id="{60D043DD-537B-260D-EFCD-0B39ED3BBA1B}"/>
+                <a16:creationId xmlns:a16="http://schemas.microsoft.com/office/drawing/2014/main" id="{FEAE23C2-AF1E-A4CF-8FA1-9E51CF83BA0A}"/>
               </a:ext>
             </a:extLst>
           </p:cNvPr>
@@ -3595,40 +5469,98 @@
           <a:p>
             <a:r>
               <a:rPr lang="en-US" dirty="0"/>
-              <a:t>Possibilities</a:t>
-            </a:r>
-          </a:p>
-        </p:txBody>
-      </p:sp>
-      <p:sp>
-        <p:nvSpPr>
-          <p:cNvPr id="3" name="Content Placeholder 2">
+              <a:t>Data</a:t>
+            </a:r>
+          </a:p>
+        </p:txBody>
+      </p:sp>
+      <p:pic>
+        <p:nvPicPr>
+          <p:cNvPr id="5" name="Content Placeholder 4">
             <a:extLst>
               <a:ext uri="{FF2B5EF4-FFF2-40B4-BE49-F238E27FC236}">
-                <a16:creationId xmlns:a16="http://schemas.microsoft.com/office/drawing/2014/main" id="{2A43364E-4D6A-AD1E-1738-170231C57E31}"/>
+                <a16:creationId xmlns:a16="http://schemas.microsoft.com/office/drawing/2014/main" id="{22A4FCD1-5578-1E9A-2259-25CBFCA9D96B}"/>
               </a:ext>
             </a:extLst>
           </p:cNvPr>
-          <p:cNvSpPr>
-            <a:spLocks noGrp="1"/>
-          </p:cNvSpPr>
+          <p:cNvPicPr>
+            <a:picLocks noGrp="1" noChangeAspect="1"/>
+          </p:cNvPicPr>
           <p:nvPr>
             <p:ph idx="1"/>
           </p:nvPr>
-        </p:nvSpPr>
-        <p:spPr/>
-        <p:txBody>
-          <a:bodyPr/>
-          <a:lstStyle/>
-          <a:p>
-            <a:endParaRPr lang="en-US"/>
+        </p:nvPicPr>
+        <p:blipFill>
+          <a:blip r:embed="rId2">
+            <a:extLst>
+              <a:ext uri="{28A0092B-C50C-407E-A947-70E740481C1C}">
+                <a14:useLocalDpi xmlns:a14="http://schemas.microsoft.com/office/drawing/2010/main" val="0"/>
+              </a:ext>
+            </a:extLst>
+          </a:blip>
+          <a:stretch>
+            <a:fillRect/>
+          </a:stretch>
+        </p:blipFill>
+        <p:spPr>
+          <a:xfrm>
+            <a:off x="1097280" y="3075579"/>
+            <a:ext cx="8202229" cy="2922449"/>
+          </a:xfrm>
+          <a:prstGeom prst="rect">
+            <a:avLst/>
+          </a:prstGeom>
+        </p:spPr>
+      </p:pic>
+      <p:sp>
+        <p:nvSpPr>
+          <p:cNvPr id="6" name="TextBox 5">
+            <a:extLst>
+              <a:ext uri="{FF2B5EF4-FFF2-40B4-BE49-F238E27FC236}">
+                <a16:creationId xmlns:a16="http://schemas.microsoft.com/office/drawing/2014/main" id="{73169073-2B6E-D87D-0903-40FF8671514D}"/>
+              </a:ext>
+            </a:extLst>
+          </p:cNvPr>
+          <p:cNvSpPr txBox="1"/>
+          <p:nvPr/>
+        </p:nvSpPr>
+        <p:spPr>
+          <a:xfrm>
+            <a:off x="1097281" y="2002971"/>
+            <a:ext cx="10058400" cy="707886"/>
+          </a:xfrm>
+          <a:prstGeom prst="rect">
+            <a:avLst/>
+          </a:prstGeom>
+          <a:noFill/>
+        </p:spPr>
+        <p:txBody>
+          <a:bodyPr wrap="square" rtlCol="0">
+            <a:spAutoFit/>
+          </a:bodyPr>
+          <a:lstStyle/>
+          <a:p>
+            <a:r>
+              <a:rPr lang="en-US" sz="2000" dirty="0"/>
+              <a:t>Filtered dataset to only include retired players</a:t>
+            </a:r>
+          </a:p>
+          <a:p>
+            <a:pPr marL="342900" indent="-342900">
+              <a:buFont typeface="Arial" panose="020B0604020202020204" pitchFamily="34" charset="0"/>
+              <a:buChar char="•"/>
+            </a:pPr>
+            <a:r>
+              <a:rPr lang="en-US" sz="2000" dirty="0"/>
+              <a:t>Mainly focus on total WAR and Years played</a:t>
+            </a:r>
           </a:p>
         </p:txBody>
       </p:sp>
     </p:spTree>
     <p:extLst>
       <p:ext uri="{BB962C8B-B14F-4D97-AF65-F5344CB8AC3E}">
-        <p14:creationId xmlns:p14="http://schemas.microsoft.com/office/powerpoint/2010/main" val="1230858642"/>
+        <p14:creationId xmlns:p14="http://schemas.microsoft.com/office/powerpoint/2010/main" val="1261220849"/>
       </p:ext>
     </p:extLst>
   </p:cSld>
@@ -3641,6 +5573,14 @@
 <file path=ppt/slides/slide5.xml><?xml version="1.0" encoding="utf-8"?>
 <p:sld xmlns:a="http://schemas.openxmlformats.org/drawingml/2006/main" xmlns:r="http://schemas.openxmlformats.org/officeDocument/2006/relationships" xmlns:p="http://schemas.openxmlformats.org/presentationml/2006/main">
   <p:cSld>
+    <p:bg>
+      <p:bgPr>
+        <a:solidFill>
+          <a:schemeClr val="bg1"/>
+        </a:solidFill>
+        <a:effectLst/>
+      </p:bgPr>
+    </p:bg>
     <p:spTree>
       <p:nvGrpSpPr>
         <p:cNvPr id="1" name=""/>
@@ -3655,12 +5595,134 @@
           <a:chExt cx="0" cy="0"/>
         </a:xfrm>
       </p:grpSpPr>
+      <p:sp useBgFill="1">
+        <p:nvSpPr>
+          <p:cNvPr id="12" name="Rectangle 11">
+            <a:extLst>
+              <a:ext uri="{FF2B5EF4-FFF2-40B4-BE49-F238E27FC236}">
+                <a16:creationId xmlns:a16="http://schemas.microsoft.com/office/drawing/2014/main" id="{44CC594A-A820-450F-B363-C19201FCFEC6}"/>
+              </a:ext>
+              <a:ext uri="{C183D7F6-B498-43B3-948B-1728B52AA6E4}">
+                <adec:decorative xmlns:adec="http://schemas.microsoft.com/office/drawing/2017/decorative" val="1"/>
+              </a:ext>
+            </a:extLst>
+          </p:cNvPr>
+          <p:cNvSpPr>
+            <a:spLocks noGrp="1" noRot="1" noChangeAspect="1" noMove="1" noResize="1" noEditPoints="1" noAdjustHandles="1" noChangeArrowheads="1" noChangeShapeType="1" noTextEdit="1"/>
+          </p:cNvSpPr>
+          <p:nvPr>
+            <p:extLst>
+              <p:ext uri="{386F3935-93C4-4BCD-93E2-E3B085C9AB24}">
+                <p16:designElem xmlns:p16="http://schemas.microsoft.com/office/powerpoint/2015/main" val="1"/>
+              </p:ext>
+            </p:extLst>
+          </p:nvPr>
+        </p:nvSpPr>
+        <p:spPr>
+          <a:xfrm>
+            <a:off x="0" y="0"/>
+            <a:ext cx="12186315" cy="6858000"/>
+          </a:xfrm>
+          <a:prstGeom prst="rect">
+            <a:avLst/>
+          </a:prstGeom>
+          <a:ln>
+            <a:noFill/>
+          </a:ln>
+        </p:spPr>
+        <p:style>
+          <a:lnRef idx="2">
+            <a:schemeClr val="accent6">
+              <a:shade val="50000"/>
+            </a:schemeClr>
+          </a:lnRef>
+          <a:fillRef idx="1001">
+            <a:schemeClr val="lt1"/>
+          </a:fillRef>
+          <a:effectRef idx="0">
+            <a:schemeClr val="accent6"/>
+          </a:effectRef>
+          <a:fontRef idx="minor">
+            <a:schemeClr val="lt1"/>
+          </a:fontRef>
+        </p:style>
+        <p:txBody>
+          <a:bodyPr rtlCol="0" anchor="ctr"/>
+          <a:lstStyle/>
+          <a:p>
+            <a:pPr algn="ctr"/>
+            <a:endParaRPr lang="en-US"/>
+          </a:p>
+        </p:txBody>
+      </p:sp>
+      <p:sp>
+        <p:nvSpPr>
+          <p:cNvPr id="14" name="Rectangle 13">
+            <a:extLst>
+              <a:ext uri="{FF2B5EF4-FFF2-40B4-BE49-F238E27FC236}">
+                <a16:creationId xmlns:a16="http://schemas.microsoft.com/office/drawing/2014/main" id="{59FAB3DA-E9ED-4574-ABCC-378BC0FF1BBC}"/>
+              </a:ext>
+              <a:ext uri="{C183D7F6-B498-43B3-948B-1728B52AA6E4}">
+                <adec:decorative xmlns:adec="http://schemas.microsoft.com/office/drawing/2017/decorative" val="1"/>
+              </a:ext>
+            </a:extLst>
+          </p:cNvPr>
+          <p:cNvSpPr>
+            <a:spLocks noGrp="1" noRot="1" noChangeAspect="1" noMove="1" noResize="1" noEditPoints="1" noAdjustHandles="1" noChangeArrowheads="1" noChangeShapeType="1" noTextEdit="1"/>
+          </p:cNvSpPr>
+          <p:nvPr>
+            <p:extLst>
+              <p:ext uri="{386F3935-93C4-4BCD-93E2-E3B085C9AB24}">
+                <p16:designElem xmlns:p16="http://schemas.microsoft.com/office/powerpoint/2015/main" val="1"/>
+              </p:ext>
+            </p:extLst>
+          </p:nvPr>
+        </p:nvSpPr>
+        <p:spPr>
+          <a:xfrm>
+            <a:off x="16" y="0"/>
+            <a:ext cx="4050791" cy="6858000"/>
+          </a:xfrm>
+          <a:prstGeom prst="rect">
+            <a:avLst/>
+          </a:prstGeom>
+          <a:solidFill>
+            <a:schemeClr val="accent2"/>
+          </a:solidFill>
+          <a:ln>
+            <a:noFill/>
+          </a:ln>
+        </p:spPr>
+        <p:style>
+          <a:lnRef idx="2">
+            <a:schemeClr val="accent1">
+              <a:shade val="50000"/>
+            </a:schemeClr>
+          </a:lnRef>
+          <a:fillRef idx="1">
+            <a:schemeClr val="accent1"/>
+          </a:fillRef>
+          <a:effectRef idx="0">
+            <a:schemeClr val="accent1"/>
+          </a:effectRef>
+          <a:fontRef idx="minor">
+            <a:schemeClr val="lt1"/>
+          </a:fontRef>
+        </p:style>
+        <p:txBody>
+          <a:bodyPr/>
+          <a:lstStyle/>
+          <a:p>
+            <a:endParaRPr lang="en-US"/>
+          </a:p>
+        </p:txBody>
+      </p:sp>
       <p:sp>
         <p:nvSpPr>
           <p:cNvPr id="2" name="Title 1">
             <a:extLst>
               <a:ext uri="{FF2B5EF4-FFF2-40B4-BE49-F238E27FC236}">
-                <a16:creationId xmlns:a16="http://schemas.microsoft.com/office/drawing/2014/main" id="{2FA65491-8A39-A081-9C7C-D5E9BEA3CC01}"/>
+                <a16:creationId xmlns:a16="http://schemas.microsoft.com/office/drawing/2014/main" id="{728F59D0-A487-2A87-8FD5-B9BE1C65F0B2}"/>
               </a:ext>
             </a:extLst>
           </p:cNvPr>
@@ -3671,24 +5733,35 @@
             <p:ph type="title"/>
           </p:nvPr>
         </p:nvSpPr>
-        <p:spPr/>
-        <p:txBody>
-          <a:bodyPr/>
-          <a:lstStyle/>
-          <a:p>
-            <a:r>
-              <a:rPr lang="en-US" dirty="0"/>
-              <a:t>Findings</a:t>
-            </a:r>
-          </a:p>
-        </p:txBody>
-      </p:sp>
-      <p:sp>
-        <p:nvSpPr>
-          <p:cNvPr id="3" name="Content Placeholder 2">
+        <p:spPr>
+          <a:xfrm>
+            <a:off x="492370" y="516835"/>
+            <a:ext cx="3084844" cy="2103875"/>
+          </a:xfrm>
+        </p:spPr>
+        <p:txBody>
+          <a:bodyPr>
+            <a:normAutofit/>
+          </a:bodyPr>
+          <a:lstStyle/>
+          <a:p>
+            <a:r>
+              <a:rPr lang="en-US" sz="3600">
+                <a:solidFill>
+                  <a:srgbClr val="FFFFFF"/>
+                </a:solidFill>
+              </a:rPr>
+              <a:t>Previous model</a:t>
+            </a:r>
+          </a:p>
+        </p:txBody>
+      </p:sp>
+      <p:sp>
+        <p:nvSpPr>
+          <p:cNvPr id="9" name="Content Placeholder 8">
             <a:extLst>
               <a:ext uri="{FF2B5EF4-FFF2-40B4-BE49-F238E27FC236}">
-                <a16:creationId xmlns:a16="http://schemas.microsoft.com/office/drawing/2014/main" id="{01F879A1-FBAB-EF81-3FF4-00B54F3DB3AE}"/>
+                <a16:creationId xmlns:a16="http://schemas.microsoft.com/office/drawing/2014/main" id="{7A8C65C0-0960-2909-36FD-96D32B192AAD}"/>
               </a:ext>
             </a:extLst>
           </p:cNvPr>
@@ -3699,7 +5772,118 @@
             <p:ph idx="1"/>
           </p:nvPr>
         </p:nvSpPr>
-        <p:spPr/>
+        <p:spPr>
+          <a:xfrm>
+            <a:off x="492371" y="2653800"/>
+            <a:ext cx="3084844" cy="3335519"/>
+          </a:xfrm>
+        </p:spPr>
+        <p:txBody>
+          <a:bodyPr>
+            <a:normAutofit/>
+          </a:bodyPr>
+          <a:lstStyle/>
+          <a:p>
+            <a:endParaRPr lang="en-US" sz="1500" dirty="0">
+              <a:solidFill>
+                <a:srgbClr val="FFFFFF"/>
+              </a:solidFill>
+            </a:endParaRPr>
+          </a:p>
+          <a:p>
+            <a:r>
+              <a:rPr lang="en-US" sz="1500" dirty="0">
+                <a:solidFill>
+                  <a:srgbClr val="FFFFFF"/>
+                </a:solidFill>
+              </a:rPr>
+              <a:t>Why does linear not work?</a:t>
+            </a:r>
+          </a:p>
+          <a:p>
+            <a:pPr>
+              <a:buFont typeface="Arial" panose="020B0604020202020204" pitchFamily="34" charset="0"/>
+              <a:buChar char="•"/>
+            </a:pPr>
+            <a:r>
+              <a:rPr lang="en-US" sz="1500" dirty="0">
+                <a:solidFill>
+                  <a:srgbClr val="FFFFFF"/>
+                </a:solidFill>
+              </a:rPr>
+              <a:t>HOF is a dummy variable (1/0)</a:t>
+            </a:r>
+          </a:p>
+          <a:p>
+            <a:pPr>
+              <a:buFont typeface="Arial" panose="020B0604020202020204" pitchFamily="34" charset="0"/>
+              <a:buChar char="•"/>
+            </a:pPr>
+            <a:r>
+              <a:rPr lang="en-US" sz="1500" dirty="0">
+                <a:solidFill>
+                  <a:srgbClr val="FFFFFF"/>
+                </a:solidFill>
+              </a:rPr>
+              <a:t>Assumes constant effect across all positions</a:t>
+            </a:r>
+          </a:p>
+        </p:txBody>
+      </p:sp>
+      <p:sp>
+        <p:nvSpPr>
+          <p:cNvPr id="16" name="Rectangle 15">
+            <a:extLst>
+              <a:ext uri="{FF2B5EF4-FFF2-40B4-BE49-F238E27FC236}">
+                <a16:creationId xmlns:a16="http://schemas.microsoft.com/office/drawing/2014/main" id="{53B8D6B0-55D6-48DC-86D8-FD95D5F118AB}"/>
+              </a:ext>
+              <a:ext uri="{C183D7F6-B498-43B3-948B-1728B52AA6E4}">
+                <adec:decorative xmlns:adec="http://schemas.microsoft.com/office/drawing/2017/decorative" val="1"/>
+              </a:ext>
+            </a:extLst>
+          </p:cNvPr>
+          <p:cNvSpPr>
+            <a:spLocks noGrp="1" noRot="1" noChangeAspect="1" noMove="1" noResize="1" noEditPoints="1" noAdjustHandles="1" noChangeArrowheads="1" noChangeShapeType="1" noTextEdit="1"/>
+          </p:cNvSpPr>
+          <p:nvPr>
+            <p:extLst>
+              <p:ext uri="{386F3935-93C4-4BCD-93E2-E3B085C9AB24}">
+                <p16:designElem xmlns:p16="http://schemas.microsoft.com/office/powerpoint/2015/main" val="1"/>
+              </p:ext>
+            </p:extLst>
+          </p:nvPr>
+        </p:nvSpPr>
+        <p:spPr>
+          <a:xfrm>
+            <a:off x="4040071" y="0"/>
+            <a:ext cx="64008" cy="6858000"/>
+          </a:xfrm>
+          <a:prstGeom prst="rect">
+            <a:avLst/>
+          </a:prstGeom>
+          <a:solidFill>
+            <a:schemeClr val="accent1"/>
+          </a:solidFill>
+          <a:ln>
+            <a:noFill/>
+          </a:ln>
+        </p:spPr>
+        <p:style>
+          <a:lnRef idx="2">
+            <a:schemeClr val="accent1">
+              <a:shade val="50000"/>
+            </a:schemeClr>
+          </a:lnRef>
+          <a:fillRef idx="1">
+            <a:schemeClr val="accent1"/>
+          </a:fillRef>
+          <a:effectRef idx="0">
+            <a:schemeClr val="accent1"/>
+          </a:effectRef>
+          <a:fontRef idx="minor">
+            <a:schemeClr val="lt1"/>
+          </a:fontRef>
+        </p:style>
         <p:txBody>
           <a:bodyPr/>
           <a:lstStyle/>
@@ -3708,10 +5892,46 @@
           </a:p>
         </p:txBody>
       </p:sp>
+      <p:pic>
+        <p:nvPicPr>
+          <p:cNvPr id="5" name="Content Placeholder 4">
+            <a:extLst>
+              <a:ext uri="{FF2B5EF4-FFF2-40B4-BE49-F238E27FC236}">
+                <a16:creationId xmlns:a16="http://schemas.microsoft.com/office/drawing/2014/main" id="{5732D919-61B8-7A2B-8886-7175AA8117C6}"/>
+              </a:ext>
+            </a:extLst>
+          </p:cNvPr>
+          <p:cNvPicPr>
+            <a:picLocks noChangeAspect="1"/>
+          </p:cNvPicPr>
+          <p:nvPr/>
+        </p:nvPicPr>
+        <p:blipFill>
+          <a:blip r:embed="rId3">
+            <a:extLst>
+              <a:ext uri="{28A0092B-C50C-407E-A947-70E740481C1C}">
+                <a14:useLocalDpi xmlns:a14="http://schemas.microsoft.com/office/drawing/2010/main" val="0"/>
+              </a:ext>
+            </a:extLst>
+          </a:blip>
+          <a:stretch>
+            <a:fillRect/>
+          </a:stretch>
+        </p:blipFill>
+        <p:spPr>
+          <a:xfrm>
+            <a:off x="4742017" y="1644503"/>
+            <a:ext cx="6798082" cy="3568993"/>
+          </a:xfrm>
+          <a:prstGeom prst="rect">
+            <a:avLst/>
+          </a:prstGeom>
+        </p:spPr>
+      </p:pic>
     </p:spTree>
     <p:extLst>
       <p:ext uri="{BB962C8B-B14F-4D97-AF65-F5344CB8AC3E}">
-        <p14:creationId xmlns:p14="http://schemas.microsoft.com/office/powerpoint/2010/main" val="2369601210"/>
+        <p14:creationId xmlns:p14="http://schemas.microsoft.com/office/powerpoint/2010/main" val="3248631073"/>
       </p:ext>
     </p:extLst>
   </p:cSld>
@@ -3743,7 +5963,7 @@
           <p:cNvPr id="2" name="Title 1">
             <a:extLst>
               <a:ext uri="{FF2B5EF4-FFF2-40B4-BE49-F238E27FC236}">
-                <a16:creationId xmlns:a16="http://schemas.microsoft.com/office/drawing/2014/main" id="{8D25F305-94E6-B4C0-A932-B8870117CE83}"/>
+                <a16:creationId xmlns:a16="http://schemas.microsoft.com/office/drawing/2014/main" id="{0BE50466-0710-FE7E-DF83-4E9FDF8DCB87}"/>
               </a:ext>
             </a:extLst>
           </p:cNvPr>
@@ -3761,7 +5981,7 @@
           <a:p>
             <a:r>
               <a:rPr lang="en-US" dirty="0"/>
-              <a:t>Critical thoughts</a:t>
+              <a:t>Solutions</a:t>
             </a:r>
           </a:p>
         </p:txBody>
@@ -3771,7 +5991,7 @@
           <p:cNvPr id="3" name="Content Placeholder 2">
             <a:extLst>
               <a:ext uri="{FF2B5EF4-FFF2-40B4-BE49-F238E27FC236}">
-                <a16:creationId xmlns:a16="http://schemas.microsoft.com/office/drawing/2014/main" id="{D0FCBE85-DA91-2F1C-890F-5891AFBEEEC3}"/>
+                <a16:creationId xmlns:a16="http://schemas.microsoft.com/office/drawing/2014/main" id="{4F2DCBED-85EC-12D7-723B-33B55383CEF3}"/>
               </a:ext>
             </a:extLst>
           </p:cNvPr>
@@ -3787,14 +6007,577 @@
           <a:bodyPr/>
           <a:lstStyle/>
           <a:p>
-            <a:endParaRPr lang="en-US"/>
+            <a:pPr>
+              <a:buClr>
+                <a:schemeClr val="tx1"/>
+              </a:buClr>
+              <a:buFont typeface="Arial" panose="020B0604020202020204" pitchFamily="34" charset="0"/>
+              <a:buChar char="•"/>
+            </a:pPr>
+            <a:r>
+              <a:rPr lang="en-US" dirty="0"/>
+              <a:t> Probit/Logit</a:t>
+            </a:r>
+          </a:p>
+          <a:p>
+            <a:pPr lvl="1">
+              <a:buClr>
+                <a:schemeClr val="tx1"/>
+              </a:buClr>
+              <a:buFont typeface="Arial" panose="020B0604020202020204" pitchFamily="34" charset="0"/>
+              <a:buChar char="•"/>
+            </a:pPr>
+            <a:r>
+              <a:rPr lang="en-US" dirty="0"/>
+              <a:t>Assumes the same WAR effect</a:t>
+            </a:r>
+          </a:p>
+          <a:p>
+            <a:pPr>
+              <a:buClr>
+                <a:schemeClr val="tx1"/>
+              </a:buClr>
+              <a:buFont typeface="Arial" panose="020B0604020202020204" pitchFamily="34" charset="0"/>
+              <a:buChar char="•"/>
+            </a:pPr>
+            <a:r>
+              <a:rPr lang="en-US" dirty="0"/>
+              <a:t> Fixed effects</a:t>
+            </a:r>
+          </a:p>
+          <a:p>
+            <a:pPr lvl="1">
+              <a:buClr>
+                <a:schemeClr val="tx1"/>
+              </a:buClr>
+              <a:buFont typeface="Arial" panose="020B0604020202020204" pitchFamily="34" charset="0"/>
+              <a:buChar char="•"/>
+            </a:pPr>
+            <a:r>
+              <a:rPr lang="en-US" dirty="0"/>
+              <a:t>Would not affect the slopes</a:t>
+            </a:r>
+          </a:p>
+          <a:p>
+            <a:pPr>
+              <a:buClr>
+                <a:schemeClr val="tx1"/>
+              </a:buClr>
+              <a:buFont typeface="Arial" panose="020B0604020202020204" pitchFamily="34" charset="0"/>
+              <a:buChar char="•"/>
+            </a:pPr>
+            <a:r>
+              <a:rPr lang="en-US" dirty="0"/>
+              <a:t> Separate positional regressions</a:t>
+            </a:r>
+          </a:p>
+          <a:p>
+            <a:pPr lvl="1">
+              <a:buClr>
+                <a:schemeClr val="tx1"/>
+              </a:buClr>
+              <a:buFont typeface="Arial" panose="020B0604020202020204" pitchFamily="34" charset="0"/>
+              <a:buChar char="•"/>
+            </a:pPr>
+            <a:r>
+              <a:rPr lang="en-US" dirty="0"/>
+              <a:t>Too noisy</a:t>
+            </a:r>
+          </a:p>
+          <a:p>
+            <a:pPr>
+              <a:buClr>
+                <a:schemeClr val="tx1"/>
+              </a:buClr>
+              <a:buFont typeface="Arial" panose="020B0604020202020204" pitchFamily="34" charset="0"/>
+              <a:buChar char="•"/>
+            </a:pPr>
+            <a:r>
+              <a:rPr lang="en-US" dirty="0"/>
+              <a:t> Random Coefficients</a:t>
+            </a:r>
+          </a:p>
+          <a:p>
+            <a:pPr lvl="1">
+              <a:buClr>
+                <a:schemeClr val="tx1"/>
+              </a:buClr>
+              <a:buFont typeface="Arial" panose="020B0604020202020204" pitchFamily="34" charset="0"/>
+              <a:buChar char="•"/>
+            </a:pPr>
+            <a:r>
+              <a:rPr lang="en-US" dirty="0"/>
+              <a:t>Random coefficients shows the WAR effect varied by position</a:t>
+            </a:r>
+          </a:p>
+          <a:p>
+            <a:pPr lvl="1">
+              <a:buClr>
+                <a:schemeClr val="tx1"/>
+              </a:buClr>
+              <a:buFont typeface="Arial" panose="020B0604020202020204" pitchFamily="34" charset="0"/>
+              <a:buChar char="•"/>
+            </a:pPr>
+            <a:r>
+              <a:rPr lang="en-US" dirty="0"/>
+              <a:t>Partially pools information across groups</a:t>
+            </a:r>
+          </a:p>
+          <a:p>
+            <a:pPr lvl="1">
+              <a:buClr>
+                <a:schemeClr val="tx1"/>
+              </a:buClr>
+              <a:buFont typeface="Arial" panose="020B0604020202020204" pitchFamily="34" charset="0"/>
+              <a:buChar char="•"/>
+            </a:pPr>
+            <a:r>
+              <a:rPr lang="en-US" dirty="0"/>
+              <a:t>Implements shrinkage</a:t>
+            </a:r>
           </a:p>
         </p:txBody>
       </p:sp>
     </p:spTree>
     <p:extLst>
       <p:ext uri="{BB962C8B-B14F-4D97-AF65-F5344CB8AC3E}">
-        <p14:creationId xmlns:p14="http://schemas.microsoft.com/office/powerpoint/2010/main" val="3913236332"/>
+        <p14:creationId xmlns:p14="http://schemas.microsoft.com/office/powerpoint/2010/main" val="3866767092"/>
+      </p:ext>
+    </p:extLst>
+  </p:cSld>
+  <p:clrMapOvr>
+    <a:masterClrMapping/>
+  </p:clrMapOvr>
+</p:sld>
+</file>
+
+<file path=ppt/slides/slide7.xml><?xml version="1.0" encoding="utf-8"?>
+<p:sld xmlns:a="http://schemas.openxmlformats.org/drawingml/2006/main" xmlns:r="http://schemas.openxmlformats.org/officeDocument/2006/relationships" xmlns:p="http://schemas.openxmlformats.org/presentationml/2006/main">
+  <p:cSld>
+    <p:spTree>
+      <p:nvGrpSpPr>
+        <p:cNvPr id="1" name=""/>
+        <p:cNvGrpSpPr/>
+        <p:nvPr/>
+      </p:nvGrpSpPr>
+      <p:grpSpPr>
+        <a:xfrm>
+          <a:off x="0" y="0"/>
+          <a:ext cx="0" cy="0"/>
+          <a:chOff x="0" y="0"/>
+          <a:chExt cx="0" cy="0"/>
+        </a:xfrm>
+      </p:grpSpPr>
+      <p:sp>
+        <p:nvSpPr>
+          <p:cNvPr id="2" name="Title 1">
+            <a:extLst>
+              <a:ext uri="{FF2B5EF4-FFF2-40B4-BE49-F238E27FC236}">
+                <a16:creationId xmlns:a16="http://schemas.microsoft.com/office/drawing/2014/main" id="{2A0C2966-8802-16C8-9649-211E88D95C31}"/>
+              </a:ext>
+            </a:extLst>
+          </p:cNvPr>
+          <p:cNvSpPr>
+            <a:spLocks noGrp="1"/>
+          </p:cNvSpPr>
+          <p:nvPr>
+            <p:ph type="title"/>
+          </p:nvPr>
+        </p:nvSpPr>
+        <p:spPr/>
+        <p:txBody>
+          <a:bodyPr/>
+          <a:lstStyle/>
+          <a:p>
+            <a:r>
+              <a:rPr lang="en-US" dirty="0"/>
+              <a:t>Assumptions</a:t>
+            </a:r>
+          </a:p>
+        </p:txBody>
+      </p:sp>
+      <p:sp>
+        <p:nvSpPr>
+          <p:cNvPr id="3" name="Content Placeholder 2">
+            <a:extLst>
+              <a:ext uri="{FF2B5EF4-FFF2-40B4-BE49-F238E27FC236}">
+                <a16:creationId xmlns:a16="http://schemas.microsoft.com/office/drawing/2014/main" id="{FED01660-A730-845F-A99F-E887C6B66945}"/>
+              </a:ext>
+            </a:extLst>
+          </p:cNvPr>
+          <p:cNvSpPr>
+            <a:spLocks noGrp="1"/>
+          </p:cNvSpPr>
+          <p:nvPr>
+            <p:ph idx="1"/>
+          </p:nvPr>
+        </p:nvSpPr>
+        <p:spPr/>
+        <p:txBody>
+          <a:bodyPr/>
+          <a:lstStyle/>
+          <a:p>
+            <a:pPr>
+              <a:buClr>
+                <a:schemeClr val="tx1"/>
+              </a:buClr>
+              <a:buFont typeface="Arial" panose="020B0604020202020204" pitchFamily="34" charset="0"/>
+              <a:buChar char="•"/>
+            </a:pPr>
+            <a:r>
+              <a:rPr lang="en-US" dirty="0"/>
+              <a:t> Players differ in how WAR matters</a:t>
+            </a:r>
+          </a:p>
+          <a:p>
+            <a:pPr>
+              <a:buClr>
+                <a:schemeClr val="tx1"/>
+              </a:buClr>
+              <a:buFont typeface="Arial" panose="020B0604020202020204" pitchFamily="34" charset="0"/>
+              <a:buChar char="•"/>
+            </a:pPr>
+            <a:r>
+              <a:rPr lang="en-US" dirty="0"/>
+              <a:t> WAR distribution is structured</a:t>
+            </a:r>
+          </a:p>
+          <a:p>
+            <a:pPr marL="0" indent="0">
+              <a:buClr>
+                <a:schemeClr val="tx1"/>
+              </a:buClr>
+              <a:buNone/>
+            </a:pPr>
+            <a:endParaRPr lang="en-US" dirty="0"/>
+          </a:p>
+          <a:p>
+            <a:pPr marL="0" indent="0">
+              <a:buClr>
+                <a:schemeClr val="tx1"/>
+              </a:buClr>
+              <a:buNone/>
+            </a:pPr>
+            <a:r>
+              <a:rPr lang="en-US" dirty="0"/>
+              <a:t>A questionable assumption:</a:t>
+            </a:r>
+          </a:p>
+          <a:p>
+            <a:pPr>
+              <a:buClr>
+                <a:schemeClr val="tx1"/>
+              </a:buClr>
+              <a:buFont typeface="Arial" panose="020B0604020202020204" pitchFamily="34" charset="0"/>
+              <a:buChar char="•"/>
+            </a:pPr>
+            <a:r>
+              <a:rPr lang="en-US" dirty="0"/>
+              <a:t> Random coefficients are independent of regressors</a:t>
+            </a:r>
+          </a:p>
+          <a:p>
+            <a:pPr>
+              <a:buClr>
+                <a:schemeClr val="tx1"/>
+              </a:buClr>
+              <a:buFont typeface="Arial" panose="020B0604020202020204" pitchFamily="34" charset="0"/>
+              <a:buChar char="•"/>
+            </a:pPr>
+            <a:endParaRPr lang="en-US" dirty="0"/>
+          </a:p>
+          <a:p>
+            <a:pPr marL="0" indent="0">
+              <a:buClr>
+                <a:schemeClr val="tx1"/>
+              </a:buClr>
+              <a:buNone/>
+            </a:pPr>
+            <a:r>
+              <a:rPr lang="en-US" dirty="0"/>
+              <a:t>Random coefficients are still a step up from a linear model</a:t>
+            </a:r>
+          </a:p>
+          <a:p>
+            <a:pPr>
+              <a:buClr>
+                <a:schemeClr val="tx1"/>
+              </a:buClr>
+              <a:buFont typeface="Arial" panose="020B0604020202020204" pitchFamily="34" charset="0"/>
+              <a:buChar char="•"/>
+            </a:pPr>
+            <a:endParaRPr lang="en-US" dirty="0"/>
+          </a:p>
+          <a:p>
+            <a:pPr>
+              <a:buClr>
+                <a:schemeClr val="tx1"/>
+              </a:buClr>
+              <a:buFont typeface="Arial" panose="020B0604020202020204" pitchFamily="34" charset="0"/>
+              <a:buChar char="•"/>
+            </a:pPr>
+            <a:endParaRPr lang="en-US" dirty="0"/>
+          </a:p>
+        </p:txBody>
+      </p:sp>
+    </p:spTree>
+    <p:extLst>
+      <p:ext uri="{BB962C8B-B14F-4D97-AF65-F5344CB8AC3E}">
+        <p14:creationId xmlns:p14="http://schemas.microsoft.com/office/powerpoint/2010/main" val="2993645484"/>
+      </p:ext>
+    </p:extLst>
+  </p:cSld>
+  <p:clrMapOvr>
+    <a:masterClrMapping/>
+  </p:clrMapOvr>
+</p:sld>
+</file>
+
+<file path=ppt/slides/slide8.xml><?xml version="1.0" encoding="utf-8"?>
+<p:sld xmlns:a="http://schemas.openxmlformats.org/drawingml/2006/main" xmlns:r="http://schemas.openxmlformats.org/officeDocument/2006/relationships" xmlns:p="http://schemas.openxmlformats.org/presentationml/2006/main">
+  <p:cSld>
+    <p:spTree>
+      <p:nvGrpSpPr>
+        <p:cNvPr id="1" name=""/>
+        <p:cNvGrpSpPr/>
+        <p:nvPr/>
+      </p:nvGrpSpPr>
+      <p:grpSpPr>
+        <a:xfrm>
+          <a:off x="0" y="0"/>
+          <a:ext cx="0" cy="0"/>
+          <a:chOff x="0" y="0"/>
+          <a:chExt cx="0" cy="0"/>
+        </a:xfrm>
+      </p:grpSpPr>
+      <p:sp>
+        <p:nvSpPr>
+          <p:cNvPr id="2" name="Title 1">
+            <a:extLst>
+              <a:ext uri="{FF2B5EF4-FFF2-40B4-BE49-F238E27FC236}">
+                <a16:creationId xmlns:a16="http://schemas.microsoft.com/office/drawing/2014/main" id="{2FA65491-8A39-A081-9C7C-D5E9BEA3CC01}"/>
+              </a:ext>
+            </a:extLst>
+          </p:cNvPr>
+          <p:cNvSpPr>
+            <a:spLocks noGrp="1"/>
+          </p:cNvSpPr>
+          <p:nvPr>
+            <p:ph type="title"/>
+          </p:nvPr>
+        </p:nvSpPr>
+        <p:spPr/>
+        <p:txBody>
+          <a:bodyPr/>
+          <a:lstStyle/>
+          <a:p>
+            <a:r>
+              <a:rPr lang="en-US" dirty="0"/>
+              <a:t>Findings</a:t>
+            </a:r>
+          </a:p>
+        </p:txBody>
+      </p:sp>
+      <p:sp>
+        <p:nvSpPr>
+          <p:cNvPr id="3" name="Content Placeholder 2">
+            <a:extLst>
+              <a:ext uri="{FF2B5EF4-FFF2-40B4-BE49-F238E27FC236}">
+                <a16:creationId xmlns:a16="http://schemas.microsoft.com/office/drawing/2014/main" id="{01F879A1-FBAB-EF81-3FF4-00B54F3DB3AE}"/>
+              </a:ext>
+            </a:extLst>
+          </p:cNvPr>
+          <p:cNvSpPr>
+            <a:spLocks noGrp="1"/>
+          </p:cNvSpPr>
+          <p:nvPr>
+            <p:ph idx="1"/>
+          </p:nvPr>
+        </p:nvSpPr>
+        <p:spPr/>
+        <p:txBody>
+          <a:bodyPr/>
+          <a:lstStyle/>
+          <a:p>
+            <a:r>
+              <a:rPr lang="en-US" dirty="0"/>
+              <a:t>With Years							Without Years</a:t>
+            </a:r>
+          </a:p>
+        </p:txBody>
+      </p:sp>
+      <p:pic>
+        <p:nvPicPr>
+          <p:cNvPr id="7" name="Picture 6">
+            <a:extLst>
+              <a:ext uri="{FF2B5EF4-FFF2-40B4-BE49-F238E27FC236}">
+                <a16:creationId xmlns:a16="http://schemas.microsoft.com/office/drawing/2014/main" id="{E57EF15A-46D8-6E9F-C55E-F8A95BA7F09C}"/>
+              </a:ext>
+            </a:extLst>
+          </p:cNvPr>
+          <p:cNvPicPr>
+            <a:picLocks noChangeAspect="1"/>
+          </p:cNvPicPr>
+          <p:nvPr/>
+        </p:nvPicPr>
+        <p:blipFill>
+          <a:blip r:embed="rId2">
+            <a:extLst>
+              <a:ext uri="{28A0092B-C50C-407E-A947-70E740481C1C}">
+                <a14:useLocalDpi xmlns:a14="http://schemas.microsoft.com/office/drawing/2010/main" val="0"/>
+              </a:ext>
+            </a:extLst>
+          </a:blip>
+          <a:stretch>
+            <a:fillRect/>
+          </a:stretch>
+        </p:blipFill>
+        <p:spPr>
+          <a:xfrm>
+            <a:off x="1097280" y="2310420"/>
+            <a:ext cx="4950310" cy="2871180"/>
+          </a:xfrm>
+          <a:prstGeom prst="rect">
+            <a:avLst/>
+          </a:prstGeom>
+        </p:spPr>
+      </p:pic>
+      <p:pic>
+        <p:nvPicPr>
+          <p:cNvPr id="9" name="Picture 8">
+            <a:extLst>
+              <a:ext uri="{FF2B5EF4-FFF2-40B4-BE49-F238E27FC236}">
+                <a16:creationId xmlns:a16="http://schemas.microsoft.com/office/drawing/2014/main" id="{F3115004-6FED-CBFA-51E3-CDD83CF6F24F}"/>
+              </a:ext>
+            </a:extLst>
+          </p:cNvPr>
+          <p:cNvPicPr>
+            <a:picLocks noChangeAspect="1"/>
+          </p:cNvPicPr>
+          <p:nvPr/>
+        </p:nvPicPr>
+        <p:blipFill>
+          <a:blip r:embed="rId3">
+            <a:extLst>
+              <a:ext uri="{28A0092B-C50C-407E-A947-70E740481C1C}">
+                <a14:useLocalDpi xmlns:a14="http://schemas.microsoft.com/office/drawing/2010/main" val="0"/>
+              </a:ext>
+            </a:extLst>
+          </a:blip>
+          <a:stretch>
+            <a:fillRect/>
+          </a:stretch>
+        </p:blipFill>
+        <p:spPr>
+          <a:xfrm>
+            <a:off x="6818694" y="2310420"/>
+            <a:ext cx="5296064" cy="2871180"/>
+          </a:xfrm>
+          <a:prstGeom prst="rect">
+            <a:avLst/>
+          </a:prstGeom>
+        </p:spPr>
+      </p:pic>
+    </p:spTree>
+    <p:extLst>
+      <p:ext uri="{BB962C8B-B14F-4D97-AF65-F5344CB8AC3E}">
+        <p14:creationId xmlns:p14="http://schemas.microsoft.com/office/powerpoint/2010/main" val="2369601210"/>
+      </p:ext>
+    </p:extLst>
+  </p:cSld>
+  <p:clrMapOvr>
+    <a:masterClrMapping/>
+  </p:clrMapOvr>
+</p:sld>
+</file>
+
+<file path=ppt/slides/slide9.xml><?xml version="1.0" encoding="utf-8"?>
+<p:sld xmlns:a="http://schemas.openxmlformats.org/drawingml/2006/main" xmlns:r="http://schemas.openxmlformats.org/officeDocument/2006/relationships" xmlns:p="http://schemas.openxmlformats.org/presentationml/2006/main">
+  <p:cSld>
+    <p:spTree>
+      <p:nvGrpSpPr>
+        <p:cNvPr id="1" name=""/>
+        <p:cNvGrpSpPr/>
+        <p:nvPr/>
+      </p:nvGrpSpPr>
+      <p:grpSpPr>
+        <a:xfrm>
+          <a:off x="0" y="0"/>
+          <a:ext cx="0" cy="0"/>
+          <a:chOff x="0" y="0"/>
+          <a:chExt cx="0" cy="0"/>
+        </a:xfrm>
+      </p:grpSpPr>
+      <p:sp>
+        <p:nvSpPr>
+          <p:cNvPr id="2" name="Title 1">
+            <a:extLst>
+              <a:ext uri="{FF2B5EF4-FFF2-40B4-BE49-F238E27FC236}">
+                <a16:creationId xmlns:a16="http://schemas.microsoft.com/office/drawing/2014/main" id="{576859A5-071A-913E-3523-C4A63808AF99}"/>
+              </a:ext>
+            </a:extLst>
+          </p:cNvPr>
+          <p:cNvSpPr>
+            <a:spLocks noGrp="1"/>
+          </p:cNvSpPr>
+          <p:nvPr>
+            <p:ph type="title"/>
+          </p:nvPr>
+        </p:nvSpPr>
+        <p:spPr/>
+        <p:txBody>
+          <a:bodyPr/>
+          <a:lstStyle/>
+          <a:p>
+            <a:r>
+              <a:rPr lang="en-US" dirty="0"/>
+              <a:t>Findings</a:t>
+            </a:r>
+          </a:p>
+        </p:txBody>
+      </p:sp>
+      <p:pic>
+        <p:nvPicPr>
+          <p:cNvPr id="5" name="Content Placeholder 4">
+            <a:extLst>
+              <a:ext uri="{FF2B5EF4-FFF2-40B4-BE49-F238E27FC236}">
+                <a16:creationId xmlns:a16="http://schemas.microsoft.com/office/drawing/2014/main" id="{E2403C3D-5106-61B6-E692-8AA55632B59E}"/>
+              </a:ext>
+            </a:extLst>
+          </p:cNvPr>
+          <p:cNvPicPr>
+            <a:picLocks noGrp="1" noChangeAspect="1"/>
+          </p:cNvPicPr>
+          <p:nvPr>
+            <p:ph idx="1"/>
+          </p:nvPr>
+        </p:nvPicPr>
+        <p:blipFill>
+          <a:blip r:embed="rId2">
+            <a:extLst>
+              <a:ext uri="{28A0092B-C50C-407E-A947-70E740481C1C}">
+                <a14:useLocalDpi xmlns:a14="http://schemas.microsoft.com/office/drawing/2010/main" val="0"/>
+              </a:ext>
+            </a:extLst>
+          </a:blip>
+          <a:stretch>
+            <a:fillRect/>
+          </a:stretch>
+        </p:blipFill>
+        <p:spPr>
+          <a:xfrm>
+            <a:off x="1097280" y="1889627"/>
+            <a:ext cx="7713599" cy="3606821"/>
+          </a:xfrm>
+          <a:prstGeom prst="rect">
+            <a:avLst/>
+          </a:prstGeom>
+        </p:spPr>
+      </p:pic>
+    </p:spTree>
+    <p:extLst>
+      <p:ext uri="{BB962C8B-B14F-4D97-AF65-F5344CB8AC3E}">
+        <p14:creationId xmlns:p14="http://schemas.microsoft.com/office/powerpoint/2010/main" val="796913952"/>
       </p:ext>
     </p:extLst>
   </p:cSld>
@@ -3805,6 +6588,289 @@
 </file>
 
 <file path=ppt/theme/theme1.xml><?xml version="1.0" encoding="utf-8"?>
+<a:theme xmlns:a="http://schemas.openxmlformats.org/drawingml/2006/main" name="Retrospect">
+  <a:themeElements>
+    <a:clrScheme name="Retrospect">
+      <a:dk1>
+        <a:srgbClr val="000000"/>
+      </a:dk1>
+      <a:lt1>
+        <a:sysClr val="window" lastClr="FFFFFF"/>
+      </a:lt1>
+      <a:dk2>
+        <a:srgbClr val="637052"/>
+      </a:dk2>
+      <a:lt2>
+        <a:srgbClr val="CCDDEA"/>
+      </a:lt2>
+      <a:accent1>
+        <a:srgbClr val="E48312"/>
+      </a:accent1>
+      <a:accent2>
+        <a:srgbClr val="BD582C"/>
+      </a:accent2>
+      <a:accent3>
+        <a:srgbClr val="865640"/>
+      </a:accent3>
+      <a:accent4>
+        <a:srgbClr val="9B8357"/>
+      </a:accent4>
+      <a:accent5>
+        <a:srgbClr val="C2BC80"/>
+      </a:accent5>
+      <a:accent6>
+        <a:srgbClr val="94A088"/>
+      </a:accent6>
+      <a:hlink>
+        <a:srgbClr val="2998E3"/>
+      </a:hlink>
+      <a:folHlink>
+        <a:srgbClr val="8C8C8C"/>
+      </a:folHlink>
+    </a:clrScheme>
+    <a:fontScheme name="Retrospect">
+      <a:majorFont>
+        <a:latin typeface="Calibri Light" panose="020F0302020204030204"/>
+        <a:ea typeface=""/>
+        <a:cs typeface=""/>
+        <a:font script="Jpan" typeface="ＭＳ Ｐゴシック"/>
+        <a:font script="Hang" typeface="맑은 고딕"/>
+        <a:font script="Hans" typeface="宋体"/>
+        <a:font script="Hant" typeface="新細明體"/>
+        <a:font script="Arab" typeface="Times New Roman"/>
+        <a:font script="Hebr" typeface="Times New Roman"/>
+        <a:font script="Thai" typeface="Angsana New"/>
+        <a:font script="Ethi" typeface="Nyala"/>
+        <a:font script="Beng" typeface="Vrinda"/>
+        <a:font script="Gujr" typeface="Shruti"/>
+        <a:font script="Khmr" typeface="MoolBoran"/>
+        <a:font script="Knda" typeface="Tunga"/>
+        <a:font script="Guru" typeface="Raavi"/>
+        <a:font script="Cans" typeface="Euphemia"/>
+        <a:font script="Cher" typeface="Plantagenet Cherokee"/>
+        <a:font script="Yiii" typeface="Microsoft Yi Baiti"/>
+        <a:font script="Tibt" typeface="Microsoft Himalaya"/>
+        <a:font script="Thaa" typeface="MV Boli"/>
+        <a:font script="Deva" typeface="Mangal"/>
+        <a:font script="Telu" typeface="Gautami"/>
+        <a:font script="Taml" typeface="Latha"/>
+        <a:font script="Syrc" typeface="Estrangelo Edessa"/>
+        <a:font script="Orya" typeface="Kalinga"/>
+        <a:font script="Mlym" typeface="Kartika"/>
+        <a:font script="Laoo" typeface="DokChampa"/>
+        <a:font script="Sinh" typeface="Iskoola Pota"/>
+        <a:font script="Mong" typeface="Mongolian Baiti"/>
+        <a:font script="Viet" typeface="Times New Roman"/>
+        <a:font script="Uigh" typeface="Microsoft Uighur"/>
+        <a:font script="Geor" typeface="Sylfaen"/>
+      </a:majorFont>
+      <a:minorFont>
+        <a:latin typeface="Calibri" panose="020F0502020204030204"/>
+        <a:ea typeface=""/>
+        <a:cs typeface=""/>
+        <a:font script="Jpan" typeface="ＭＳ Ｐゴシック"/>
+        <a:font script="Hang" typeface="맑은 고딕"/>
+        <a:font script="Hans" typeface="宋体"/>
+        <a:font script="Hant" typeface="新細明體"/>
+        <a:font script="Arab" typeface="Arial"/>
+        <a:font script="Hebr" typeface="Arial"/>
+        <a:font script="Thai" typeface="Cordia New"/>
+        <a:font script="Ethi" typeface="Nyala"/>
+        <a:font script="Beng" typeface="Vrinda"/>
+        <a:font script="Gujr" typeface="Shruti"/>
+        <a:font script="Khmr" typeface="DaunPenh"/>
+        <a:font script="Knda" typeface="Tunga"/>
+        <a:font script="Guru" typeface="Raavi"/>
+        <a:font script="Cans" typeface="Euphemia"/>
+        <a:font script="Cher" typeface="Plantagenet Cherokee"/>
+        <a:font script="Yiii" typeface="Microsoft Yi Baiti"/>
+        <a:font script="Tibt" typeface="Microsoft Himalaya"/>
+        <a:font script="Thaa" typeface="MV Boli"/>
+        <a:font script="Deva" typeface="Mangal"/>
+        <a:font script="Telu" typeface="Gautami"/>
+        <a:font script="Taml" typeface="Latha"/>
+        <a:font script="Syrc" typeface="Estrangelo Edessa"/>
+        <a:font script="Orya" typeface="Kalinga"/>
+        <a:font script="Mlym" typeface="Kartika"/>
+        <a:font script="Laoo" typeface="DokChampa"/>
+        <a:font script="Sinh" typeface="Iskoola Pota"/>
+        <a:font script="Mong" typeface="Mongolian Baiti"/>
+        <a:font script="Viet" typeface="Arial"/>
+        <a:font script="Uigh" typeface="Microsoft Uighur"/>
+        <a:font script="Geor" typeface="Sylfaen"/>
+      </a:minorFont>
+    </a:fontScheme>
+    <a:fmtScheme name="Retrospect">
+      <a:fillStyleLst>
+        <a:solidFill>
+          <a:schemeClr val="phClr"/>
+        </a:solidFill>
+        <a:gradFill rotWithShape="1">
+          <a:gsLst>
+            <a:gs pos="0">
+              <a:schemeClr val="phClr">
+                <a:tint val="65000"/>
+                <a:shade val="92000"/>
+                <a:satMod val="130000"/>
+              </a:schemeClr>
+            </a:gs>
+            <a:gs pos="45000">
+              <a:schemeClr val="phClr">
+                <a:tint val="60000"/>
+                <a:shade val="99000"/>
+                <a:satMod val="120000"/>
+              </a:schemeClr>
+            </a:gs>
+            <a:gs pos="100000">
+              <a:schemeClr val="phClr">
+                <a:tint val="55000"/>
+                <a:satMod val="140000"/>
+              </a:schemeClr>
+            </a:gs>
+          </a:gsLst>
+          <a:path path="circle">
+            <a:fillToRect l="100000" t="100000" r="100000" b="100000"/>
+          </a:path>
+        </a:gradFill>
+        <a:gradFill rotWithShape="1">
+          <a:gsLst>
+            <a:gs pos="0">
+              <a:schemeClr val="phClr">
+                <a:shade val="85000"/>
+                <a:satMod val="130000"/>
+              </a:schemeClr>
+            </a:gs>
+            <a:gs pos="34000">
+              <a:schemeClr val="phClr">
+                <a:shade val="87000"/>
+                <a:satMod val="125000"/>
+              </a:schemeClr>
+            </a:gs>
+            <a:gs pos="70000">
+              <a:schemeClr val="phClr">
+                <a:tint val="100000"/>
+                <a:shade val="90000"/>
+                <a:satMod val="130000"/>
+              </a:schemeClr>
+            </a:gs>
+            <a:gs pos="100000">
+              <a:schemeClr val="phClr">
+                <a:tint val="100000"/>
+                <a:shade val="100000"/>
+                <a:satMod val="110000"/>
+              </a:schemeClr>
+            </a:gs>
+          </a:gsLst>
+          <a:path path="circle">
+            <a:fillToRect l="100000" t="100000" r="100000" b="100000"/>
+          </a:path>
+        </a:gradFill>
+      </a:fillStyleLst>
+      <a:lnStyleLst>
+        <a:ln w="12700" cap="flat" cmpd="sng" algn="ctr">
+          <a:solidFill>
+            <a:schemeClr val="phClr"/>
+          </a:solidFill>
+          <a:prstDash val="solid"/>
+        </a:ln>
+        <a:ln w="15875" cap="flat" cmpd="sng" algn="ctr">
+          <a:solidFill>
+            <a:schemeClr val="phClr"/>
+          </a:solidFill>
+          <a:prstDash val="solid"/>
+        </a:ln>
+        <a:ln w="25400" cap="flat" cmpd="sng" algn="ctr">
+          <a:solidFill>
+            <a:schemeClr val="phClr"/>
+          </a:solidFill>
+          <a:prstDash val="solid"/>
+        </a:ln>
+      </a:lnStyleLst>
+      <a:effectStyleLst>
+        <a:effectStyle>
+          <a:effectLst/>
+        </a:effectStyle>
+        <a:effectStyle>
+          <a:effectLst>
+            <a:outerShdw blurRad="38100" dist="25400" dir="2700000" algn="br" rotWithShape="0">
+              <a:srgbClr val="000000">
+                <a:alpha val="60000"/>
+              </a:srgbClr>
+            </a:outerShdw>
+          </a:effectLst>
+        </a:effectStyle>
+        <a:effectStyle>
+          <a:effectLst>
+            <a:outerShdw blurRad="44450" dist="25400" dir="2700000" algn="br" rotWithShape="0">
+              <a:srgbClr val="000000">
+                <a:alpha val="60000"/>
+              </a:srgbClr>
+            </a:outerShdw>
+          </a:effectLst>
+          <a:scene3d>
+            <a:camera prst="orthographicFront">
+              <a:rot lat="0" lon="0" rev="0"/>
+            </a:camera>
+            <a:lightRig rig="threePt" dir="t">
+              <a:rot lat="0" lon="0" rev="19800000"/>
+            </a:lightRig>
+          </a:scene3d>
+          <a:sp3d prstMaterial="flat">
+            <a:bevelT w="25400" h="31750"/>
+          </a:sp3d>
+        </a:effectStyle>
+      </a:effectStyleLst>
+      <a:bgFillStyleLst>
+        <a:solidFill>
+          <a:schemeClr val="phClr"/>
+        </a:solidFill>
+        <a:solidFill>
+          <a:schemeClr val="phClr">
+            <a:tint val="90000"/>
+            <a:shade val="97000"/>
+            <a:satMod val="130000"/>
+          </a:schemeClr>
+        </a:solidFill>
+        <a:gradFill rotWithShape="1">
+          <a:gsLst>
+            <a:gs pos="0">
+              <a:schemeClr val="phClr">
+                <a:tint val="96000"/>
+                <a:shade val="99000"/>
+                <a:satMod val="140000"/>
+              </a:schemeClr>
+            </a:gs>
+            <a:gs pos="65000">
+              <a:schemeClr val="phClr">
+                <a:tint val="100000"/>
+                <a:shade val="80000"/>
+                <a:satMod val="130000"/>
+              </a:schemeClr>
+            </a:gs>
+            <a:gs pos="100000">
+              <a:schemeClr val="phClr">
+                <a:tint val="100000"/>
+                <a:shade val="48000"/>
+                <a:satMod val="120000"/>
+              </a:schemeClr>
+            </a:gs>
+          </a:gsLst>
+          <a:lin ang="16200000" scaled="0"/>
+        </a:gradFill>
+      </a:bgFillStyleLst>
+    </a:fmtScheme>
+  </a:themeElements>
+  <a:objectDefaults/>
+  <a:extraClrSchemeLst/>
+  <a:extLst>
+    <a:ext uri="{05A4C25C-085E-4340-85A3-A5531E510DB2}">
+      <thm15:themeFamily xmlns:thm15="http://schemas.microsoft.com/office/thememl/2012/main" name="Retrospect" id="{5F128B03-DCCA-4EEB-AB3B-CF2899314A46}" vid="{3F1AAB62-24C6-49D2-8E01-B56FAC9A3DCD}"/>
+    </a:ext>
+  </a:extLst>
+</a:theme>
+</file>
+
+<file path=ppt/theme/theme2.xml><?xml version="1.0" encoding="utf-8"?>
 <a:theme xmlns:a="http://schemas.openxmlformats.org/drawingml/2006/main" name="Office Theme">
   <a:themeElements>
     <a:clrScheme name="Office">
